--- a/technikdidaktisches-kolloquium/praesentationen/TdK_Termin-2_Mehrperspektivischer-Technikunterricht.pptx
+++ b/technikdidaktisches-kolloquium/praesentationen/TdK_Termin-2_Mehrperspektivischer-Technikunterricht.pptx
@@ -2026,7 +2026,7 @@
       </p:grpSpPr>
       <p:sp>
         <p:nvSpPr>
-          <p:cNvPr id="2" name="titel-116"/>
+          <p:cNvPr id="2" name="titel-120"/>
           <p:cNvSpPr txBox="1"/>
           <p:nvPr/>
         </p:nvSpPr>
@@ -2062,7 +2062,7 @@
       </p:sp>
       <p:sp>
         <p:nvSpPr>
-          <p:cNvPr id="3" name="text-117"/>
+          <p:cNvPr id="3" name="text-121"/>
           <p:cNvSpPr txBox="1"/>
           <p:nvPr/>
         </p:nvSpPr>
@@ -2098,14 +2098,14 @@
       </p:sp>
       <p:sp>
         <p:nvSpPr>
-          <p:cNvPr id="4" name="box-118"/>
+          <p:cNvPr id="4" name="box-122"/>
           <p:cNvSpPr txBox="1"/>
           <p:nvPr/>
         </p:nvSpPr>
         <p:spPr>
           <a:xfrm>
-            <a:off x="548640" y="3611880"/>
-            <a:ext cx="1828800" cy="566928"/>
+            <a:off x="548640" y="3566160"/>
+            <a:ext cx="1828800" cy="530352"/>
           </a:xfrm>
           <a:prstGeom prst="rect">
             <a:avLst/>
@@ -2136,14 +2136,14 @@
       </p:sp>
       <p:sp>
         <p:nvSpPr>
-          <p:cNvPr id="5" name="text-119"/>
+          <p:cNvPr id="5" name="text-123"/>
           <p:cNvSpPr txBox="1"/>
           <p:nvPr/>
         </p:nvSpPr>
         <p:spPr>
           <a:xfrm>
-            <a:off x="2560320" y="3611880"/>
-            <a:ext cx="8961120" cy="566928"/>
+            <a:off x="2560320" y="3566160"/>
+            <a:ext cx="8961120" cy="530352"/>
           </a:xfrm>
           <a:prstGeom prst="rect">
             <a:avLst/>
@@ -2172,14 +2172,14 @@
       </p:sp>
       <p:sp>
         <p:nvSpPr>
-          <p:cNvPr id="6" name="box-120"/>
+          <p:cNvPr id="6" name="box-124"/>
           <p:cNvSpPr txBox="1"/>
           <p:nvPr/>
         </p:nvSpPr>
         <p:spPr>
           <a:xfrm>
-            <a:off x="548640" y="4325112"/>
-            <a:ext cx="1828800" cy="566928"/>
+            <a:off x="548640" y="4206240"/>
+            <a:ext cx="1828800" cy="530352"/>
           </a:xfrm>
           <a:prstGeom prst="rect">
             <a:avLst/>
@@ -2210,14 +2210,14 @@
       </p:sp>
       <p:sp>
         <p:nvSpPr>
-          <p:cNvPr id="7" name="text-121"/>
+          <p:cNvPr id="7" name="text-125"/>
           <p:cNvSpPr txBox="1"/>
           <p:nvPr/>
         </p:nvSpPr>
         <p:spPr>
           <a:xfrm>
-            <a:off x="2560320" y="4325112"/>
-            <a:ext cx="8961120" cy="566928"/>
+            <a:off x="2560320" y="4206240"/>
+            <a:ext cx="8961120" cy="530352"/>
           </a:xfrm>
           <a:prstGeom prst="rect">
             <a:avLst/>
@@ -2246,14 +2246,14 @@
       </p:sp>
       <p:sp>
         <p:nvSpPr>
-          <p:cNvPr id="8" name="box-122"/>
+          <p:cNvPr id="8" name="box-126"/>
           <p:cNvSpPr txBox="1"/>
           <p:nvPr/>
         </p:nvSpPr>
         <p:spPr>
           <a:xfrm>
-            <a:off x="548640" y="5038344"/>
-            <a:ext cx="1828800" cy="566928"/>
+            <a:off x="548640" y="4846320"/>
+            <a:ext cx="1828800" cy="530352"/>
           </a:xfrm>
           <a:prstGeom prst="rect">
             <a:avLst/>
@@ -2284,14 +2284,14 @@
       </p:sp>
       <p:sp>
         <p:nvSpPr>
-          <p:cNvPr id="9" name="text-123"/>
+          <p:cNvPr id="9" name="text-127"/>
           <p:cNvSpPr txBox="1"/>
           <p:nvPr/>
         </p:nvSpPr>
         <p:spPr>
           <a:xfrm>
-            <a:off x="2560320" y="5038344"/>
-            <a:ext cx="8961120" cy="566928"/>
+            <a:off x="2560320" y="4846320"/>
+            <a:ext cx="8961120" cy="530352"/>
           </a:xfrm>
           <a:prstGeom prst="rect">
             <a:avLst/>
@@ -2312,7 +2312,81 @@
                   <a:srgbClr val="C9D8E6"/>
                 </a:solidFill>
               </a:rPr>
-              <a:t>Besprechung Paket 2 · Aktuelle Entwicklungen · Referat und Diskussion</a:t>
+              <a:t>Besprechung Paket 2 · Aktuelle Entwicklungen im Technikunterricht</a:t>
+            </a:r>
+            <a:endParaRPr lang="en-US" sz="2200" dirty="0"/>
+          </a:p>
+        </p:txBody>
+      </p:sp>
+      <p:sp>
+        <p:nvSpPr>
+          <p:cNvPr id="10" name="box-128"/>
+          <p:cNvSpPr txBox="1"/>
+          <p:nvPr/>
+        </p:nvSpPr>
+        <p:spPr>
+          <a:xfrm>
+            <a:off x="548640" y="5486400"/>
+            <a:ext cx="1828800" cy="530352"/>
+          </a:xfrm>
+          <a:prstGeom prst="rect">
+            <a:avLst/>
+          </a:prstGeom>
+          <a:solidFill>
+            <a:srgbClr val="0F4F7E"/>
+          </a:solidFill>
+          <a:ln/>
+        </p:spPr>
+        <p:txBody>
+          <a:bodyPr wrap="square" lIns="101600" tIns="101600" rIns="101600" bIns="101600" rtlCol="0" anchor="ctr"/>
+          <a:lstStyle/>
+          <a:p>
+            <a:pPr algn="ctr" indent="0" marL="0">
+              <a:buNone/>
+            </a:pPr>
+            <a:r>
+              <a:rPr lang="en-US" sz="2000" b="1" dirty="0">
+                <a:solidFill>
+                  <a:srgbClr val="FFFFFF"/>
+                </a:solidFill>
+              </a:rPr>
+              <a:t>Termin 4</a:t>
+            </a:r>
+            <a:endParaRPr lang="en-US" sz="2000" dirty="0"/>
+          </a:p>
+        </p:txBody>
+      </p:sp>
+      <p:sp>
+        <p:nvSpPr>
+          <p:cNvPr id="11" name="text-129"/>
+          <p:cNvSpPr txBox="1"/>
+          <p:nvPr/>
+        </p:nvSpPr>
+        <p:spPr>
+          <a:xfrm>
+            <a:off x="2560320" y="5486400"/>
+            <a:ext cx="8961120" cy="530352"/>
+          </a:xfrm>
+          <a:prstGeom prst="rect">
+            <a:avLst/>
+          </a:prstGeom>
+          <a:noFill/>
+          <a:ln/>
+        </p:spPr>
+        <p:txBody>
+          <a:bodyPr wrap="square" lIns="38100" tIns="38100" rIns="38100" bIns="38100" rtlCol="0" anchor="ctr"/>
+          <a:lstStyle/>
+          <a:p>
+            <a:pPr algn="l" indent="0" marL="0">
+              <a:buNone/>
+            </a:pPr>
+            <a:r>
+              <a:rPr lang="en-US" sz="2200" dirty="0">
+                <a:solidFill>
+                  <a:srgbClr val="C9D8E6"/>
+                </a:solidFill>
+              </a:rPr>
+              <a:t>Referat oder Vortrag und Diskussion</a:t>
             </a:r>
             <a:endParaRPr lang="en-US" sz="2200" dirty="0"/>
           </a:p>
@@ -2345,7 +2419,7 @@
       </p:grpSpPr>
       <p:sp>
         <p:nvSpPr>
-          <p:cNvPr id="2" name="titel-153"/>
+          <p:cNvPr id="2" name="titel-159"/>
           <p:cNvSpPr txBox="1"/>
           <p:nvPr/>
         </p:nvSpPr>
@@ -2381,7 +2455,7 @@
       </p:sp>
       <p:sp>
         <p:nvSpPr>
-          <p:cNvPr id="3" name="tile-154"/>
+          <p:cNvPr id="3" name="tile-160"/>
           <p:cNvSpPr txBox="1"/>
           <p:nvPr/>
         </p:nvSpPr>
@@ -2440,7 +2514,7 @@
       </p:sp>
       <p:sp>
         <p:nvSpPr>
-          <p:cNvPr id="4" name="tile-155"/>
+          <p:cNvPr id="4" name="tile-161"/>
           <p:cNvSpPr txBox="1"/>
           <p:nvPr/>
         </p:nvSpPr>
@@ -2474,7 +2548,7 @@
                   <a:srgbClr val="035591"/>
                 </a:solidFill>
               </a:rPr>
-              <a:t>Referat · 2.4–2.5</a:t>
+              <a:t>Referat · 2.4</a:t>
             </a:r>
             <a:endParaRPr lang="en-US" sz="2200" dirty="0"/>
           </a:p>
@@ -2491,7 +2565,7 @@
                   <a:srgbClr val="14232F"/>
                 </a:solidFill>
               </a:rPr>
-              <a:t>Thema wählen, Beitrag planen</a:t>
+              <a:t>Thema wählen, Weg A oder B</a:t>
             </a:r>
             <a:endParaRPr lang="en-US" sz="2200" dirty="0"/>
           </a:p>
@@ -2499,7 +2573,7 @@
       </p:sp>
       <p:sp>
         <p:nvSpPr>
-          <p:cNvPr id="5" name="link-156"/>
+          <p:cNvPr id="5" name="link-162"/>
           <p:cNvSpPr txBox="1"/>
           <p:nvPr/>
         </p:nvSpPr>
@@ -2553,7 +2627,7 @@
       </p:sp>
       <p:sp>
         <p:nvSpPr>
-          <p:cNvPr id="6" name="text-157"/>
+          <p:cNvPr id="6" name="text-163"/>
           <p:cNvSpPr txBox="1"/>
           <p:nvPr/>
         </p:nvSpPr>
@@ -2589,7 +2663,7 @@
       </p:sp>
       <p:pic>
         <p:nvPicPr>
-          <p:cNvPr id="7" name="qr-158" descr="QR-Code zur Kursseite: https://t1p.de/tdk-26">    </p:cNvPr>
+          <p:cNvPr id="7" name="qr-164" descr="QR-Code zur Kursseite: https://t1p.de/tdk-26">    </p:cNvPr>
           <p:cNvPicPr>
             <a:picLocks noChangeAspect="1"/>
           </p:cNvPicPr>
@@ -2683,7 +2757,7 @@
       </p:grpSpPr>
       <p:sp>
         <p:nvSpPr>
-          <p:cNvPr id="2" name="titel-124"/>
+          <p:cNvPr id="2" name="titel-130"/>
           <p:cNvSpPr txBox="1"/>
           <p:nvPr/>
         </p:nvSpPr>
@@ -2719,7 +2793,7 @@
       </p:sp>
       <p:sp>
         <p:nvSpPr>
-          <p:cNvPr id="3" name="ntile-125"/>
+          <p:cNvPr id="3" name="ntile-131"/>
           <p:cNvSpPr txBox="1"/>
           <p:nvPr/>
         </p:nvSpPr>
@@ -2778,7 +2852,7 @@
       </p:sp>
       <p:sp>
         <p:nvSpPr>
-          <p:cNvPr id="4" name="ntile-126"/>
+          <p:cNvPr id="4" name="ntile-132"/>
           <p:cNvSpPr txBox="1"/>
           <p:nvPr/>
         </p:nvSpPr>
@@ -2837,7 +2911,7 @@
       </p:sp>
       <p:sp>
         <p:nvSpPr>
-          <p:cNvPr id="5" name="ntile-127"/>
+          <p:cNvPr id="5" name="ntile-133"/>
           <p:cNvSpPr txBox="1"/>
           <p:nvPr/>
         </p:nvSpPr>
@@ -2966,7 +3040,7 @@
       </p:grpSpPr>
       <p:sp>
         <p:nvSpPr>
-          <p:cNvPr id="2" name="titel-128"/>
+          <p:cNvPr id="2" name="titel-134"/>
           <p:cNvSpPr txBox="1"/>
           <p:nvPr/>
         </p:nvSpPr>
@@ -3002,7 +3076,7 @@
       </p:sp>
       <p:sp>
         <p:nvSpPr>
-          <p:cNvPr id="3" name="ntile-129"/>
+          <p:cNvPr id="3" name="ntile-135"/>
           <p:cNvSpPr txBox="1"/>
           <p:nvPr/>
         </p:nvSpPr>
@@ -3061,7 +3135,7 @@
       </p:sp>
       <p:sp>
         <p:nvSpPr>
-          <p:cNvPr id="4" name="ntile-130"/>
+          <p:cNvPr id="4" name="ntile-136"/>
           <p:cNvSpPr txBox="1"/>
           <p:nvPr/>
         </p:nvSpPr>
@@ -3120,7 +3194,7 @@
       </p:sp>
       <p:sp>
         <p:nvSpPr>
-          <p:cNvPr id="5" name="ntile-131"/>
+          <p:cNvPr id="5" name="ntile-137"/>
           <p:cNvSpPr txBox="1"/>
           <p:nvPr/>
         </p:nvSpPr>
@@ -3179,7 +3253,7 @@
       </p:sp>
       <p:sp>
         <p:nvSpPr>
-          <p:cNvPr id="6" name="ntile-132"/>
+          <p:cNvPr id="6" name="ntile-138"/>
           <p:cNvSpPr txBox="1"/>
           <p:nvPr/>
         </p:nvSpPr>
@@ -3238,7 +3312,7 @@
       </p:sp>
       <p:sp>
         <p:nvSpPr>
-          <p:cNvPr id="7" name="ntile-133"/>
+          <p:cNvPr id="7" name="ntile-139"/>
           <p:cNvSpPr txBox="1"/>
           <p:nvPr/>
         </p:nvSpPr>
@@ -3297,7 +3371,7 @@
       </p:sp>
       <p:sp>
         <p:nvSpPr>
-          <p:cNvPr id="8" name="ntile-134"/>
+          <p:cNvPr id="8" name="ntile-140"/>
           <p:cNvSpPr txBox="1"/>
           <p:nvPr/>
         </p:nvSpPr>
@@ -3426,7 +3500,7 @@
       </p:grpSpPr>
       <p:sp>
         <p:nvSpPr>
-          <p:cNvPr id="2" name="titel-135"/>
+          <p:cNvPr id="2" name="titel-141"/>
           <p:cNvSpPr txBox="1"/>
           <p:nvPr/>
         </p:nvSpPr>
@@ -3462,7 +3536,7 @@
       </p:sp>
       <p:sp>
         <p:nvSpPr>
-          <p:cNvPr id="3" name="box-136"/>
+          <p:cNvPr id="3" name="box-142"/>
           <p:cNvSpPr txBox="1"/>
           <p:nvPr/>
         </p:nvSpPr>
@@ -3514,7 +3588,7 @@
       </p:sp>
       <p:sp>
         <p:nvSpPr>
-          <p:cNvPr id="4" name="text-137"/>
+          <p:cNvPr id="4" name="text-143"/>
           <p:cNvSpPr txBox="1"/>
           <p:nvPr/>
         </p:nvSpPr>
@@ -3620,7 +3694,7 @@
       </p:grpSpPr>
       <p:sp>
         <p:nvSpPr>
-          <p:cNvPr id="2" name="titel-138"/>
+          <p:cNvPr id="2" name="titel-144"/>
           <p:cNvSpPr txBox="1"/>
           <p:nvPr/>
         </p:nvSpPr>
@@ -3656,7 +3730,7 @@
       </p:sp>
       <p:sp>
         <p:nvSpPr>
-          <p:cNvPr id="3" name="aufgabe-139"/>
+          <p:cNvPr id="3" name="aufgabe-145"/>
           <p:cNvSpPr txBox="1"/>
           <p:nvPr/>
         </p:nvSpPr>
@@ -3785,7 +3859,7 @@
       </p:grpSpPr>
       <p:sp>
         <p:nvSpPr>
-          <p:cNvPr id="2" name="titel-140"/>
+          <p:cNvPr id="2" name="titel-146"/>
           <p:cNvSpPr txBox="1"/>
           <p:nvPr/>
         </p:nvSpPr>
@@ -3821,7 +3895,7 @@
       </p:sp>
       <p:sp>
         <p:nvSpPr>
-          <p:cNvPr id="3" name="aufgabe-141"/>
+          <p:cNvPr id="3" name="aufgabe-147"/>
           <p:cNvSpPr txBox="1"/>
           <p:nvPr/>
         </p:nvSpPr>
@@ -3950,7 +4024,7 @@
       </p:grpSpPr>
       <p:sp>
         <p:nvSpPr>
-          <p:cNvPr id="2" name="titel-142"/>
+          <p:cNvPr id="2" name="titel-148"/>
           <p:cNvSpPr txBox="1"/>
           <p:nvPr/>
         </p:nvSpPr>
@@ -3986,7 +4060,7 @@
       </p:sp>
       <p:sp>
         <p:nvSpPr>
-          <p:cNvPr id="3" name="aufgabe-143"/>
+          <p:cNvPr id="3" name="aufgabe-149"/>
           <p:cNvSpPr txBox="1"/>
           <p:nvPr/>
         </p:nvSpPr>
@@ -4132,7 +4206,7 @@
       </p:grpSpPr>
       <p:sp>
         <p:nvSpPr>
-          <p:cNvPr id="2" name="titel-144"/>
+          <p:cNvPr id="2" name="titel-150"/>
           <p:cNvSpPr txBox="1"/>
           <p:nvPr/>
         </p:nvSpPr>
@@ -4168,7 +4242,7 @@
       </p:sp>
       <p:graphicFrame>
         <p:nvGraphicFramePr>
-          <p:cNvPr id="9" name="table-145"/>
+          <p:cNvPr id="9" name="table-151"/>
           <p:cNvGraphicFramePr>
             <a:graphicFrameLocks noGrp="1"/>
           </p:cNvGraphicFramePr>
@@ -4890,7 +4964,7 @@
       </p:graphicFrame>
       <p:sp>
         <p:nvSpPr>
-          <p:cNvPr id="4" name="box-146"/>
+          <p:cNvPr id="4" name="box-152"/>
           <p:cNvSpPr txBox="1"/>
           <p:nvPr/>
         </p:nvSpPr>
@@ -4928,7 +5002,7 @@
       </p:sp>
       <p:sp>
         <p:nvSpPr>
-          <p:cNvPr id="5" name="text-147"/>
+          <p:cNvPr id="5" name="text-153"/>
           <p:cNvSpPr txBox="1"/>
           <p:nvPr/>
         </p:nvSpPr>
@@ -5034,7 +5108,7 @@
       </p:grpSpPr>
       <p:sp>
         <p:nvSpPr>
-          <p:cNvPr id="2" name="titel-148"/>
+          <p:cNvPr id="2" name="titel-154"/>
           <p:cNvSpPr txBox="1"/>
           <p:nvPr/>
         </p:nvSpPr>
@@ -5062,7 +5136,7 @@
                   <a:srgbClr val="14232F"/>
                 </a:solidFill>
               </a:rPr>
-              <a:t>Dein Referat in Termin 3</a:t>
+              <a:t>Dein Referat in Termin 4</a:t>
             </a:r>
             <a:endParaRPr lang="en-US" sz="2800" dirty="0"/>
           </a:p>
@@ -5070,7 +5144,7 @@
       </p:sp>
       <p:sp>
         <p:nvSpPr>
-          <p:cNvPr id="3" name="tile-149"/>
+          <p:cNvPr id="3" name="tile-155"/>
           <p:cNvSpPr txBox="1"/>
           <p:nvPr/>
         </p:nvSpPr>
@@ -5129,7 +5203,7 @@
       </p:sp>
       <p:sp>
         <p:nvSpPr>
-          <p:cNvPr id="4" name="tile-150"/>
+          <p:cNvPr id="4" name="tile-156"/>
           <p:cNvSpPr txBox="1"/>
           <p:nvPr/>
         </p:nvSpPr>
@@ -5188,14 +5262,14 @@
       </p:sp>
       <p:sp>
         <p:nvSpPr>
-          <p:cNvPr id="5" name="aufgabe-151"/>
+          <p:cNvPr id="5" name="aufgabe-157"/>
           <p:cNvSpPr txBox="1"/>
           <p:nvPr/>
         </p:nvSpPr>
         <p:spPr>
           <a:xfrm>
             <a:off x="548640" y="3246120"/>
-            <a:ext cx="11094415" cy="1143000"/>
+            <a:ext cx="11094415" cy="1371600"/>
           </a:xfrm>
           <a:prstGeom prst="rect">
             <a:avLst/>
@@ -5234,12 +5308,12 @@
               <a:buNone/>
             </a:pPr>
             <a:r>
-              <a:rPr lang="en-US" sz="2100" dirty="0">
+              <a:rPr lang="en-US" sz="2200" dirty="0">
                 <a:solidFill>
                   <a:srgbClr val="14232F"/>
                 </a:solidFill>
               </a:rPr>
-              <a:t>Wähle ein Thema aus der Liste der Seminarthemen oder schlage ein eigenes vor.</a:t>
+              <a:t>Wähle ein Thema aus der Liste der Seminarthemen oder schlage ein eigenes vor. Entscheide dich für Weg A oder B.</a:t>
             </a:r>
             <a:endParaRPr lang="en-US" sz="2000" dirty="0"/>
           </a:p>
@@ -5247,58 +5321,35 @@
       </p:sp>
       <p:sp>
         <p:nvSpPr>
-          <p:cNvPr id="6" name="aufgabe-152"/>
+          <p:cNvPr id="6" name="text-158"/>
           <p:cNvSpPr txBox="1"/>
           <p:nvPr/>
         </p:nvSpPr>
         <p:spPr>
           <a:xfrm>
-            <a:off x="548640" y="4526280"/>
-            <a:ext cx="11094415" cy="1143000"/>
-          </a:xfrm>
-          <a:prstGeom prst="rect">
-            <a:avLst/>
-          </a:prstGeom>
-          <a:solidFill>
-            <a:srgbClr val="FFF3C9"/>
-          </a:solidFill>
-          <a:ln w="25400">
-            <a:solidFill>
-              <a:srgbClr val="F5B700"/>
-            </a:solidFill>
-          </a:ln>
-        </p:spPr>
-        <p:txBody>
-          <a:bodyPr wrap="square" lIns="101600" tIns="177800" rIns="177800" bIns="101600" rtlCol="0" anchor="ctr"/>
-          <a:lstStyle/>
-          <a:p>
-            <a:pPr indent="0" marL="0">
-              <a:buNone/>
-            </a:pPr>
-            <a:r>
-              <a:rPr lang="en-US" sz="2000" b="1" dirty="0">
-                <a:solidFill>
-                  <a:srgbClr val="035591"/>
-                </a:solidFill>
-              </a:rPr>
-              <a:t>Aufgabe 2.5</a:t>
-            </a:r>
-            <a:endParaRPr lang="en-US" sz="2000" dirty="0"/>
-          </a:p>
-          <a:p>
-            <a:pPr indent="0" marL="0">
-              <a:spcBef>
-                <a:spcPts val="400"/>
-              </a:spcBef>
-              <a:buNone/>
-            </a:pPr>
-            <a:r>
-              <a:rPr lang="en-US" sz="2100" dirty="0">
-                <a:solidFill>
-                  <a:srgbClr val="14232F"/>
-                </a:solidFill>
-              </a:rPr>
-              <a:t>Plane deinen Beitrag: Fragestellung, Quellen, Gliederung, Diskussionsfragen.</a:t>
+            <a:off x="548640" y="4846320"/>
+            <a:ext cx="11094415" cy="548640"/>
+          </a:xfrm>
+          <a:prstGeom prst="rect">
+            <a:avLst/>
+          </a:prstGeom>
+          <a:noFill/>
+          <a:ln/>
+        </p:spPr>
+        <p:txBody>
+          <a:bodyPr wrap="square" lIns="38100" tIns="38100" rIns="38100" bIns="38100" rtlCol="0" anchor="t"/>
+          <a:lstStyle/>
+          <a:p>
+            <a:pPr algn="l" indent="0" marL="0">
+              <a:buNone/>
+            </a:pPr>
+            <a:r>
+              <a:rPr lang="en-US" sz="2000" dirty="0">
+                <a:solidFill>
+                  <a:srgbClr val="56687A"/>
+                </a:solidFill>
+              </a:rPr>
+              <a:t>Den Beitrag planst du nach Termin 3 in Aufgabenpaket 3.</a:t>
             </a:r>
             <a:endParaRPr lang="en-US" sz="2000" dirty="0"/>
           </a:p>

--- a/technikdidaktisches-kolloquium/praesentationen/TdK_Termin-2_Mehrperspektivischer-Technikunterricht.pptx
+++ b/technikdidaktisches-kolloquium/praesentationen/TdK_Termin-2_Mehrperspektivischer-Technikunterricht.pptx
@@ -15,9 +15,14 @@
     <p:sldId id="263" r:id="rId9"/>
     <p:sldId id="264" r:id="rId10"/>
     <p:sldId id="265" r:id="rId11"/>
+    <p:sldId id="266" r:id="rId12"/>
+    <p:sldId id="267" r:id="rId13"/>
+    <p:sldId id="268" r:id="rId14"/>
+    <p:sldId id="269" r:id="rId15"/>
+    <p:sldId id="270" r:id="rId16"/>
   </p:sldIdLst>
   <p:notesMasterIdLst>
-    <p:notesMasterId r:id="rId12"/>
+    <p:notesMasterId r:id="rId17"/>
   </p:notesMasterIdLst>
   <p:sldSz cx="12192000" cy="6858000"/>
   <p:notesSz cx="6858000" cy="12192000"/>
@@ -641,6 +646,446 @@
 </p:notes>
 </file>
 
+<file path=ppt/notesSlides/notesSlide11.xml><?xml version="1.0" encoding="utf-8"?>
+<p:notes xmlns:a="http://schemas.openxmlformats.org/drawingml/2006/main" xmlns:r="http://schemas.openxmlformats.org/officeDocument/2006/relationships" xmlns:p="http://schemas.openxmlformats.org/presentationml/2006/main">
+  <p:cSld>
+    <p:spTree>
+      <p:nvGrpSpPr>
+        <p:cNvPr id="1" name=""/>
+        <p:cNvGrpSpPr/>
+        <p:nvPr/>
+      </p:nvGrpSpPr>
+      <p:grpSpPr>
+        <a:xfrm>
+          <a:off x="0" y="0"/>
+          <a:ext cx="0" cy="0"/>
+          <a:chOff x="0" y="0"/>
+          <a:chExt cx="0" cy="0"/>
+        </a:xfrm>
+      </p:grpSpPr>
+      <p:sp>
+        <p:nvSpPr>
+          <p:cNvPr id="2" name="Slide Image Placeholder 1"/>
+          <p:cNvSpPr>
+            <a:spLocks noGrp="1" noRot="1" noChangeAspect="1"/>
+          </p:cNvSpPr>
+          <p:nvPr>
+            <p:ph type="sldImg"/>
+          </p:nvPr>
+        </p:nvSpPr>
+        <p:spPr/>
+      </p:sp>
+      <p:sp>
+        <p:nvSpPr>
+          <p:cNvPr id="3" name="Notes Placeholder 2"/>
+          <p:cNvSpPr>
+            <a:spLocks noGrp="1"/>
+          </p:cNvSpPr>
+          <p:nvPr>
+            <p:ph type="body" idx="1"/>
+          </p:nvPr>
+        </p:nvSpPr>
+        <p:spPr/>
+        <p:txBody>
+          <a:bodyPr/>
+          <a:lstStyle/>
+          <a:p>
+            <a:r>
+              <a:rPr lang="en-US" dirty="0"/>
+              <a:t/>
+            </a:r>
+            <a:endParaRPr lang="en-US" dirty="0"/>
+          </a:p>
+        </p:txBody>
+      </p:sp>
+      <p:sp>
+        <p:nvSpPr>
+          <p:cNvPr id="4" name="Slide Number Placeholder 3"/>
+          <p:cNvSpPr>
+            <a:spLocks noGrp="1"/>
+          </p:cNvSpPr>
+          <p:nvPr>
+            <p:ph type="sldNum" sz="quarter" idx="10"/>
+          </p:nvPr>
+        </p:nvSpPr>
+        <p:spPr/>
+        <p:txBody>
+          <a:bodyPr/>
+          <a:lstStyle/>
+          <a:p>
+            <a:fld id="{F7021451-1387-4CA6-816F-3879F97B5CBC}" type="slidenum">
+              <a:rPr lang="en-US"/>
+              <a:t>11</a:t>
+            </a:fld>
+            <a:endParaRPr lang="en-US"/>
+          </a:p>
+        </p:txBody>
+      </p:sp>
+    </p:spTree>
+    <p:extLst>
+      <p:ext uri="{BB962C8B-B14F-4D97-AF65-F5344CB8AC3E}">
+        <p14:creationId xmlns:p14="http://schemas.microsoft.com/office/powerpoint/2010/main" val="1024086991"/>
+      </p:ext>
+    </p:extLst>
+  </p:cSld>
+  <p:clrMapOvr>
+    <a:masterClrMapping/>
+  </p:clrMapOvr>
+</p:notes>
+</file>
+
+<file path=ppt/notesSlides/notesSlide12.xml><?xml version="1.0" encoding="utf-8"?>
+<p:notes xmlns:a="http://schemas.openxmlformats.org/drawingml/2006/main" xmlns:r="http://schemas.openxmlformats.org/officeDocument/2006/relationships" xmlns:p="http://schemas.openxmlformats.org/presentationml/2006/main">
+  <p:cSld>
+    <p:spTree>
+      <p:nvGrpSpPr>
+        <p:cNvPr id="1" name=""/>
+        <p:cNvGrpSpPr/>
+        <p:nvPr/>
+      </p:nvGrpSpPr>
+      <p:grpSpPr>
+        <a:xfrm>
+          <a:off x="0" y="0"/>
+          <a:ext cx="0" cy="0"/>
+          <a:chOff x="0" y="0"/>
+          <a:chExt cx="0" cy="0"/>
+        </a:xfrm>
+      </p:grpSpPr>
+      <p:sp>
+        <p:nvSpPr>
+          <p:cNvPr id="2" name="Slide Image Placeholder 1"/>
+          <p:cNvSpPr>
+            <a:spLocks noGrp="1" noRot="1" noChangeAspect="1"/>
+          </p:cNvSpPr>
+          <p:nvPr>
+            <p:ph type="sldImg"/>
+          </p:nvPr>
+        </p:nvSpPr>
+        <p:spPr/>
+      </p:sp>
+      <p:sp>
+        <p:nvSpPr>
+          <p:cNvPr id="3" name="Notes Placeholder 2"/>
+          <p:cNvSpPr>
+            <a:spLocks noGrp="1"/>
+          </p:cNvSpPr>
+          <p:nvPr>
+            <p:ph type="body" idx="1"/>
+          </p:nvPr>
+        </p:nvSpPr>
+        <p:spPr/>
+        <p:txBody>
+          <a:bodyPr/>
+          <a:lstStyle/>
+          <a:p>
+            <a:r>
+              <a:rPr lang="en-US" dirty="0"/>
+              <a:t/>
+            </a:r>
+            <a:endParaRPr lang="en-US" dirty="0"/>
+          </a:p>
+        </p:txBody>
+      </p:sp>
+      <p:sp>
+        <p:nvSpPr>
+          <p:cNvPr id="4" name="Slide Number Placeholder 3"/>
+          <p:cNvSpPr>
+            <a:spLocks noGrp="1"/>
+          </p:cNvSpPr>
+          <p:nvPr>
+            <p:ph type="sldNum" sz="quarter" idx="10"/>
+          </p:nvPr>
+        </p:nvSpPr>
+        <p:spPr/>
+        <p:txBody>
+          <a:bodyPr/>
+          <a:lstStyle/>
+          <a:p>
+            <a:fld id="{F7021451-1387-4CA6-816F-3879F97B5CBC}" type="slidenum">
+              <a:rPr lang="en-US"/>
+              <a:t>12</a:t>
+            </a:fld>
+            <a:endParaRPr lang="en-US"/>
+          </a:p>
+        </p:txBody>
+      </p:sp>
+    </p:spTree>
+    <p:extLst>
+      <p:ext uri="{BB962C8B-B14F-4D97-AF65-F5344CB8AC3E}">
+        <p14:creationId xmlns:p14="http://schemas.microsoft.com/office/powerpoint/2010/main" val="1024086991"/>
+      </p:ext>
+    </p:extLst>
+  </p:cSld>
+  <p:clrMapOvr>
+    <a:masterClrMapping/>
+  </p:clrMapOvr>
+</p:notes>
+</file>
+
+<file path=ppt/notesSlides/notesSlide13.xml><?xml version="1.0" encoding="utf-8"?>
+<p:notes xmlns:a="http://schemas.openxmlformats.org/drawingml/2006/main" xmlns:r="http://schemas.openxmlformats.org/officeDocument/2006/relationships" xmlns:p="http://schemas.openxmlformats.org/presentationml/2006/main">
+  <p:cSld>
+    <p:spTree>
+      <p:nvGrpSpPr>
+        <p:cNvPr id="1" name=""/>
+        <p:cNvGrpSpPr/>
+        <p:nvPr/>
+      </p:nvGrpSpPr>
+      <p:grpSpPr>
+        <a:xfrm>
+          <a:off x="0" y="0"/>
+          <a:ext cx="0" cy="0"/>
+          <a:chOff x="0" y="0"/>
+          <a:chExt cx="0" cy="0"/>
+        </a:xfrm>
+      </p:grpSpPr>
+      <p:sp>
+        <p:nvSpPr>
+          <p:cNvPr id="2" name="Slide Image Placeholder 1"/>
+          <p:cNvSpPr>
+            <a:spLocks noGrp="1" noRot="1" noChangeAspect="1"/>
+          </p:cNvSpPr>
+          <p:nvPr>
+            <p:ph type="sldImg"/>
+          </p:nvPr>
+        </p:nvSpPr>
+        <p:spPr/>
+      </p:sp>
+      <p:sp>
+        <p:nvSpPr>
+          <p:cNvPr id="3" name="Notes Placeholder 2"/>
+          <p:cNvSpPr>
+            <a:spLocks noGrp="1"/>
+          </p:cNvSpPr>
+          <p:nvPr>
+            <p:ph type="body" idx="1"/>
+          </p:nvPr>
+        </p:nvSpPr>
+        <p:spPr/>
+        <p:txBody>
+          <a:bodyPr/>
+          <a:lstStyle/>
+          <a:p>
+            <a:r>
+              <a:rPr lang="en-US" dirty="0"/>
+              <a:t/>
+            </a:r>
+            <a:endParaRPr lang="en-US" dirty="0"/>
+          </a:p>
+        </p:txBody>
+      </p:sp>
+      <p:sp>
+        <p:nvSpPr>
+          <p:cNvPr id="4" name="Slide Number Placeholder 3"/>
+          <p:cNvSpPr>
+            <a:spLocks noGrp="1"/>
+          </p:cNvSpPr>
+          <p:nvPr>
+            <p:ph type="sldNum" sz="quarter" idx="10"/>
+          </p:nvPr>
+        </p:nvSpPr>
+        <p:spPr/>
+        <p:txBody>
+          <a:bodyPr/>
+          <a:lstStyle/>
+          <a:p>
+            <a:fld id="{F7021451-1387-4CA6-816F-3879F97B5CBC}" type="slidenum">
+              <a:rPr lang="en-US"/>
+              <a:t>13</a:t>
+            </a:fld>
+            <a:endParaRPr lang="en-US"/>
+          </a:p>
+        </p:txBody>
+      </p:sp>
+    </p:spTree>
+    <p:extLst>
+      <p:ext uri="{BB962C8B-B14F-4D97-AF65-F5344CB8AC3E}">
+        <p14:creationId xmlns:p14="http://schemas.microsoft.com/office/powerpoint/2010/main" val="1024086991"/>
+      </p:ext>
+    </p:extLst>
+  </p:cSld>
+  <p:clrMapOvr>
+    <a:masterClrMapping/>
+  </p:clrMapOvr>
+</p:notes>
+</file>
+
+<file path=ppt/notesSlides/notesSlide14.xml><?xml version="1.0" encoding="utf-8"?>
+<p:notes xmlns:a="http://schemas.openxmlformats.org/drawingml/2006/main" xmlns:r="http://schemas.openxmlformats.org/officeDocument/2006/relationships" xmlns:p="http://schemas.openxmlformats.org/presentationml/2006/main">
+  <p:cSld>
+    <p:spTree>
+      <p:nvGrpSpPr>
+        <p:cNvPr id="1" name=""/>
+        <p:cNvGrpSpPr/>
+        <p:nvPr/>
+      </p:nvGrpSpPr>
+      <p:grpSpPr>
+        <a:xfrm>
+          <a:off x="0" y="0"/>
+          <a:ext cx="0" cy="0"/>
+          <a:chOff x="0" y="0"/>
+          <a:chExt cx="0" cy="0"/>
+        </a:xfrm>
+      </p:grpSpPr>
+      <p:sp>
+        <p:nvSpPr>
+          <p:cNvPr id="2" name="Slide Image Placeholder 1"/>
+          <p:cNvSpPr>
+            <a:spLocks noGrp="1" noRot="1" noChangeAspect="1"/>
+          </p:cNvSpPr>
+          <p:nvPr>
+            <p:ph type="sldImg"/>
+          </p:nvPr>
+        </p:nvSpPr>
+        <p:spPr/>
+      </p:sp>
+      <p:sp>
+        <p:nvSpPr>
+          <p:cNvPr id="3" name="Notes Placeholder 2"/>
+          <p:cNvSpPr>
+            <a:spLocks noGrp="1"/>
+          </p:cNvSpPr>
+          <p:nvPr>
+            <p:ph type="body" idx="1"/>
+          </p:nvPr>
+        </p:nvSpPr>
+        <p:spPr/>
+        <p:txBody>
+          <a:bodyPr/>
+          <a:lstStyle/>
+          <a:p>
+            <a:r>
+              <a:rPr lang="en-US" dirty="0"/>
+              <a:t/>
+            </a:r>
+            <a:endParaRPr lang="en-US" dirty="0"/>
+          </a:p>
+        </p:txBody>
+      </p:sp>
+      <p:sp>
+        <p:nvSpPr>
+          <p:cNvPr id="4" name="Slide Number Placeholder 3"/>
+          <p:cNvSpPr>
+            <a:spLocks noGrp="1"/>
+          </p:cNvSpPr>
+          <p:nvPr>
+            <p:ph type="sldNum" sz="quarter" idx="10"/>
+          </p:nvPr>
+        </p:nvSpPr>
+        <p:spPr/>
+        <p:txBody>
+          <a:bodyPr/>
+          <a:lstStyle/>
+          <a:p>
+            <a:fld id="{F7021451-1387-4CA6-816F-3879F97B5CBC}" type="slidenum">
+              <a:rPr lang="en-US"/>
+              <a:t>14</a:t>
+            </a:fld>
+            <a:endParaRPr lang="en-US"/>
+          </a:p>
+        </p:txBody>
+      </p:sp>
+    </p:spTree>
+    <p:extLst>
+      <p:ext uri="{BB962C8B-B14F-4D97-AF65-F5344CB8AC3E}">
+        <p14:creationId xmlns:p14="http://schemas.microsoft.com/office/powerpoint/2010/main" val="1024086991"/>
+      </p:ext>
+    </p:extLst>
+  </p:cSld>
+  <p:clrMapOvr>
+    <a:masterClrMapping/>
+  </p:clrMapOvr>
+</p:notes>
+</file>
+
+<file path=ppt/notesSlides/notesSlide15.xml><?xml version="1.0" encoding="utf-8"?>
+<p:notes xmlns:a="http://schemas.openxmlformats.org/drawingml/2006/main" xmlns:r="http://schemas.openxmlformats.org/officeDocument/2006/relationships" xmlns:p="http://schemas.openxmlformats.org/presentationml/2006/main">
+  <p:cSld>
+    <p:spTree>
+      <p:nvGrpSpPr>
+        <p:cNvPr id="1" name=""/>
+        <p:cNvGrpSpPr/>
+        <p:nvPr/>
+      </p:nvGrpSpPr>
+      <p:grpSpPr>
+        <a:xfrm>
+          <a:off x="0" y="0"/>
+          <a:ext cx="0" cy="0"/>
+          <a:chOff x="0" y="0"/>
+          <a:chExt cx="0" cy="0"/>
+        </a:xfrm>
+      </p:grpSpPr>
+      <p:sp>
+        <p:nvSpPr>
+          <p:cNvPr id="2" name="Slide Image Placeholder 1"/>
+          <p:cNvSpPr>
+            <a:spLocks noGrp="1" noRot="1" noChangeAspect="1"/>
+          </p:cNvSpPr>
+          <p:nvPr>
+            <p:ph type="sldImg"/>
+          </p:nvPr>
+        </p:nvSpPr>
+        <p:spPr/>
+      </p:sp>
+      <p:sp>
+        <p:nvSpPr>
+          <p:cNvPr id="3" name="Notes Placeholder 2"/>
+          <p:cNvSpPr>
+            <a:spLocks noGrp="1"/>
+          </p:cNvSpPr>
+          <p:nvPr>
+            <p:ph type="body" idx="1"/>
+          </p:nvPr>
+        </p:nvSpPr>
+        <p:spPr/>
+        <p:txBody>
+          <a:bodyPr/>
+          <a:lstStyle/>
+          <a:p>
+            <a:r>
+              <a:rPr lang="en-US" dirty="0"/>
+              <a:t/>
+            </a:r>
+            <a:endParaRPr lang="en-US" dirty="0"/>
+          </a:p>
+        </p:txBody>
+      </p:sp>
+      <p:sp>
+        <p:nvSpPr>
+          <p:cNvPr id="4" name="Slide Number Placeholder 3"/>
+          <p:cNvSpPr>
+            <a:spLocks noGrp="1"/>
+          </p:cNvSpPr>
+          <p:nvPr>
+            <p:ph type="sldNum" sz="quarter" idx="10"/>
+          </p:nvPr>
+        </p:nvSpPr>
+        <p:spPr/>
+        <p:txBody>
+          <a:bodyPr/>
+          <a:lstStyle/>
+          <a:p>
+            <a:fld id="{F7021451-1387-4CA6-816F-3879F97B5CBC}" type="slidenum">
+              <a:rPr lang="en-US"/>
+              <a:t>15</a:t>
+            </a:fld>
+            <a:endParaRPr lang="en-US"/>
+          </a:p>
+        </p:txBody>
+      </p:sp>
+    </p:spTree>
+    <p:extLst>
+      <p:ext uri="{BB962C8B-B14F-4D97-AF65-F5344CB8AC3E}">
+        <p14:creationId xmlns:p14="http://schemas.microsoft.com/office/powerpoint/2010/main" val="1024086991"/>
+      </p:ext>
+    </p:extLst>
+  </p:cSld>
+  <p:clrMapOvr>
+    <a:masterClrMapping/>
+  </p:clrMapOvr>
+</p:notes>
+</file>
+
 <file path=ppt/notesSlides/notesSlide2.xml><?xml version="1.0" encoding="utf-8"?>
 <p:notes xmlns:a="http://schemas.openxmlformats.org/drawingml/2006/main" xmlns:r="http://schemas.openxmlformats.org/officeDocument/2006/relationships" xmlns:p="http://schemas.openxmlformats.org/presentationml/2006/main">
   <p:cSld>
@@ -1431,8 +1876,8 @@
         </p:nvSpPr>
         <p:spPr>
           <a:xfrm>
-            <a:off x="5029200" y="201168"/>
-            <a:ext cx="6720840" cy="457200"/>
+            <a:off x="2926080" y="201168"/>
+            <a:ext cx="5852160" cy="457200"/>
           </a:xfrm>
           <a:prstGeom prst="rect">
             <a:avLst/>
@@ -1572,6 +2017,118 @@
 </file>
 
 <file path=ppt/slideLayouts/slideLayout3.xml><?xml version="1.0" encoding="utf-8"?>
+<p:sldLayout xmlns:a="http://schemas.openxmlformats.org/drawingml/2006/main" xmlns:r="http://schemas.openxmlformats.org/officeDocument/2006/relationships" xmlns:p="http://schemas.openxmlformats.org/presentationml/2006/main" preserve="1">
+  <p:cSld name="TRENNER">
+    <p:bg>
+      <p:bgPr>
+        <a:solidFill>
+          <a:srgbClr val="FFFFFF"/>
+        </a:solidFill>
+      </p:bgPr>
+    </p:bg>
+    <p:spTree>
+      <p:nvGrpSpPr>
+        <p:cNvPr id="1" name=""/>
+        <p:cNvGrpSpPr/>
+        <p:nvPr/>
+      </p:nvGrpSpPr>
+      <p:grpSpPr>
+        <a:xfrm>
+          <a:off x="0" y="0"/>
+          <a:ext cx="0" cy="0"/>
+          <a:chOff x="0" y="0"/>
+          <a:chExt cx="0" cy="0"/>
+        </a:xfrm>
+      </p:grpSpPr>
+      <p:sp>
+        <p:nvSpPr>
+          <p:cNvPr id="2" name="Shape 0"/>
+          <p:cNvSpPr/>
+          <p:nvPr/>
+        </p:nvSpPr>
+        <p:spPr>
+          <a:xfrm>
+            <a:off x="685800" y="274320"/>
+            <a:ext cx="1920240" cy="603504"/>
+          </a:xfrm>
+          <a:prstGeom prst="rect">
+            <a:avLst/>
+          </a:prstGeom>
+          <a:solidFill>
+            <a:srgbClr val="FFFFFF"/>
+          </a:solidFill>
+          <a:ln/>
+        </p:spPr>
+      </p:sp>
+      <p:pic>
+        <p:nvPicPr>
+          <p:cNvPr id="3" name="Image 0" descr="/tmp/claude-0/-home-claude/f0df0622-abb2-5c0a-a841-b1a0cebc56b9/scratchpad/pptx/logo.png">    </p:cNvPr>
+          <p:cNvPicPr>
+            <a:picLocks noChangeAspect="1"/>
+          </p:cNvPicPr>
+          <p:nvPr/>
+        </p:nvPicPr>
+        <p:blipFill>
+          <a:blip r:embed="rId1"/>
+          <a:stretch>
+            <a:fillRect/>
+          </a:stretch>
+        </p:blipFill>
+        <p:spPr>
+          <a:xfrm>
+            <a:off x="777240" y="329184"/>
+            <a:ext cx="1737360" cy="493776"/>
+          </a:xfrm>
+          <a:prstGeom prst="rect">
+            <a:avLst/>
+          </a:prstGeom>
+        </p:spPr>
+      </p:pic>
+      <p:sp>
+        <p:nvSpPr>
+          <p:cNvPr id="4" name="Text 1"/>
+          <p:cNvSpPr/>
+          <p:nvPr/>
+        </p:nvSpPr>
+        <p:spPr>
+          <a:xfrm>
+            <a:off x="548640" y="6400800"/>
+            <a:ext cx="9144000" cy="274320"/>
+          </a:xfrm>
+          <a:prstGeom prst="rect">
+            <a:avLst/>
+          </a:prstGeom>
+          <a:noFill/>
+          <a:ln/>
+        </p:spPr>
+        <p:txBody>
+          <a:bodyPr wrap="square" lIns="0" tIns="0" rIns="0" bIns="0" rtlCol="0" anchor="ctr"/>
+          <a:lstStyle/>
+          <a:p>
+            <a:pPr indent="0" marL="0">
+              <a:buNone/>
+            </a:pPr>
+            <a:r>
+              <a:rPr lang="en-US" sz="1000" dirty="0">
+                <a:solidFill>
+                  <a:srgbClr val="56687A"/>
+                </a:solidFill>
+              </a:rPr>
+              <a:t>Daniel Beyrodt · Universität Hildesheim · WiSe 2026/27 · CC BY-NC-SA 4.0</a:t>
+            </a:r>
+            <a:endParaRPr lang="en-US" sz="1000" dirty="0"/>
+          </a:p>
+        </p:txBody>
+      </p:sp>
+    </p:spTree>
+  </p:cSld>
+  <p:clrMapOvr>
+    <a:masterClrMapping/>
+  </p:clrMapOvr>
+</p:sldLayout>
+</file>
+
+<file path=ppt/slideLayouts/slideLayout4.xml><?xml version="1.0" encoding="utf-8"?>
 <p:sldLayout xmlns:a="http://schemas.openxmlformats.org/drawingml/2006/main" xmlns:r="http://schemas.openxmlformats.org/officeDocument/2006/relationships" xmlns:p="http://schemas.openxmlformats.org/presentationml/2006/main" preserve="1">
   <p:cSld name="TITEL">
     <p:bg>
@@ -1752,6 +2309,7 @@
     <p:sldLayoutId id="2147483649" r:id="rId1"/>
     <p:sldLayoutId id="2147483650" r:id="rId2"/>
     <p:sldLayoutId id="2147483651" r:id="rId3"/>
+    <p:sldLayoutId id="2147483652" r:id="rId4"/>
   </p:sldLayoutIdLst>
   <p:hf sldNum="0" hdr="0" ftr="0" dt="0"/>
   <p:txStyles>
@@ -2026,7 +2584,7 @@
       </p:grpSpPr>
       <p:sp>
         <p:nvSpPr>
-          <p:cNvPr id="2" name="titel-120"/>
+          <p:cNvPr id="2" name="titel-149"/>
           <p:cNvSpPr txBox="1"/>
           <p:nvPr/>
         </p:nvSpPr>
@@ -2062,7 +2620,7 @@
       </p:sp>
       <p:sp>
         <p:nvSpPr>
-          <p:cNvPr id="3" name="text-121"/>
+          <p:cNvPr id="3" name="text-150"/>
           <p:cNvSpPr txBox="1"/>
           <p:nvPr/>
         </p:nvSpPr>
@@ -2098,7 +2656,7 @@
       </p:sp>
       <p:sp>
         <p:nvSpPr>
-          <p:cNvPr id="4" name="box-122"/>
+          <p:cNvPr id="4" name="box-151"/>
           <p:cNvSpPr txBox="1"/>
           <p:nvPr/>
         </p:nvSpPr>
@@ -2136,7 +2694,7 @@
       </p:sp>
       <p:sp>
         <p:nvSpPr>
-          <p:cNvPr id="5" name="text-123"/>
+          <p:cNvPr id="5" name="text-152"/>
           <p:cNvSpPr txBox="1"/>
           <p:nvPr/>
         </p:nvSpPr>
@@ -2172,7 +2730,7 @@
       </p:sp>
       <p:sp>
         <p:nvSpPr>
-          <p:cNvPr id="6" name="box-124"/>
+          <p:cNvPr id="6" name="box-153"/>
           <p:cNvSpPr txBox="1"/>
           <p:nvPr/>
         </p:nvSpPr>
@@ -2210,7 +2768,7 @@
       </p:sp>
       <p:sp>
         <p:nvSpPr>
-          <p:cNvPr id="7" name="text-125"/>
+          <p:cNvPr id="7" name="text-154"/>
           <p:cNvSpPr txBox="1"/>
           <p:nvPr/>
         </p:nvSpPr>
@@ -2246,7 +2804,7 @@
       </p:sp>
       <p:sp>
         <p:nvSpPr>
-          <p:cNvPr id="8" name="box-126"/>
+          <p:cNvPr id="8" name="box-155"/>
           <p:cNvSpPr txBox="1"/>
           <p:nvPr/>
         </p:nvSpPr>
@@ -2284,7 +2842,7 @@
       </p:sp>
       <p:sp>
         <p:nvSpPr>
-          <p:cNvPr id="9" name="text-127"/>
+          <p:cNvPr id="9" name="text-156"/>
           <p:cNvSpPr txBox="1"/>
           <p:nvPr/>
         </p:nvSpPr>
@@ -2320,7 +2878,7 @@
       </p:sp>
       <p:sp>
         <p:nvSpPr>
-          <p:cNvPr id="10" name="box-128"/>
+          <p:cNvPr id="10" name="box-157"/>
           <p:cNvSpPr txBox="1"/>
           <p:nvPr/>
         </p:nvSpPr>
@@ -2358,7 +2916,7 @@
       </p:sp>
       <p:sp>
         <p:nvSpPr>
-          <p:cNvPr id="11" name="text-129"/>
+          <p:cNvPr id="11" name="text-158"/>
           <p:cNvSpPr txBox="1"/>
           <p:nvPr/>
         </p:nvSpPr>
@@ -2419,7 +2977,45 @@
       </p:grpSpPr>
       <p:sp>
         <p:nvSpPr>
-          <p:cNvPr id="2" name="titel-159"/>
+          <p:cNvPr id="2" name="box-203"/>
+          <p:cNvSpPr txBox="1"/>
+          <p:nvPr/>
+        </p:nvSpPr>
+        <p:spPr>
+          <a:xfrm>
+            <a:off x="8915400" y="246888"/>
+            <a:ext cx="2862072" cy="384048"/>
+          </a:xfrm>
+          <a:prstGeom prst="rect">
+            <a:avLst/>
+          </a:prstGeom>
+          <a:solidFill>
+            <a:srgbClr val="F5B700"/>
+          </a:solidFill>
+          <a:ln/>
+        </p:spPr>
+        <p:txBody>
+          <a:bodyPr wrap="square" lIns="25400" tIns="25400" rIns="25400" bIns="25400" rtlCol="0" anchor="ctr"/>
+          <a:lstStyle/>
+          <a:p>
+            <a:pPr algn="ctr" indent="0" marL="0">
+              <a:buNone/>
+            </a:pPr>
+            <a:r>
+              <a:rPr lang="en-US" sz="1400" b="1" dirty="0">
+                <a:solidFill>
+                  <a:srgbClr val="14232F"/>
+                </a:solidFill>
+              </a:rPr>
+              <a:t>Aufgaben für zu Hause</a:t>
+            </a:r>
+            <a:endParaRPr lang="en-US" sz="1400" dirty="0"/>
+          </a:p>
+        </p:txBody>
+      </p:sp>
+      <p:sp>
+        <p:nvSpPr>
+          <p:cNvPr id="3" name="titel-204"/>
           <p:cNvSpPr txBox="1"/>
           <p:nvPr/>
         </p:nvSpPr>
@@ -2447,7 +3043,7 @@
                   <a:srgbClr val="14232F"/>
                 </a:solidFill>
               </a:rPr>
-              <a:t>Bis Termin 3: Aufgabenpaket 2</a:t>
+              <a:t>Erkenntnisperspektive und Zielperspektive</a:t>
             </a:r>
             <a:endParaRPr lang="en-US" sz="2800" dirty="0"/>
           </a:p>
@@ -2455,43 +3051,43 @@
       </p:sp>
       <p:sp>
         <p:nvSpPr>
-          <p:cNvPr id="3" name="tile-160"/>
+          <p:cNvPr id="4" name="aufgabe-205"/>
           <p:cNvSpPr txBox="1"/>
           <p:nvPr/>
         </p:nvSpPr>
         <p:spPr>
           <a:xfrm>
-            <a:off x="548640" y="1600200"/>
-            <a:ext cx="5440680" cy="1920240"/>
+            <a:off x="548640" y="2057400"/>
+            <a:ext cx="11094415" cy="2926080"/>
           </a:xfrm>
           <a:prstGeom prst="rect">
             <a:avLst/>
           </a:prstGeom>
           <a:solidFill>
-            <a:srgbClr val="EEF3F7"/>
+            <a:srgbClr val="FFF3C9"/>
           </a:solidFill>
-          <a:ln w="6350">
+          <a:ln w="25400">
             <a:solidFill>
-              <a:srgbClr val="EEF3F7"/>
+              <a:srgbClr val="F5B700"/>
             </a:solidFill>
           </a:ln>
         </p:spPr>
         <p:txBody>
-          <a:bodyPr wrap="square" lIns="127000" tIns="127000" rIns="127000" bIns="127000" rtlCol="0" anchor="t"/>
+          <a:bodyPr wrap="square" lIns="101600" tIns="177800" rIns="177800" bIns="101600" rtlCol="0" anchor="ctr"/>
           <a:lstStyle/>
           <a:p>
             <a:pPr indent="0" marL="0">
               <a:buNone/>
             </a:pPr>
             <a:r>
-              <a:rPr lang="en-US" sz="2200" b="1" dirty="0">
+              <a:rPr lang="en-US" sz="2600" b="1" dirty="0">
                 <a:solidFill>
                   <a:srgbClr val="035591"/>
                 </a:solidFill>
               </a:rPr>
-              <a:t>mpTu · 2.1–2.3</a:t>
-            </a:r>
-            <a:endParaRPr lang="en-US" sz="2200" dirty="0"/>
+              <a:t>Aufgabe 2.1</a:t>
+            </a:r>
+            <a:endParaRPr lang="en-US" sz="2600" dirty="0"/>
           </a:p>
           <a:p>
             <a:pPr indent="0" marL="0">
@@ -2501,190 +3097,17 @@
               <a:buNone/>
             </a:pPr>
             <a:r>
-              <a:rPr lang="en-US" sz="1900" dirty="0">
+              <a:rPr lang="en-US" sz="2600" dirty="0">
                 <a:solidFill>
                   <a:srgbClr val="14232F"/>
                 </a:solidFill>
               </a:rPr>
-              <a:t>Erkenntnis- und Zielperspektive, Perspektiven im KC, Inhaltsfelder im KC</a:t>
-            </a:r>
-            <a:endParaRPr lang="en-US" sz="2200" dirty="0"/>
-          </a:p>
-        </p:txBody>
-      </p:sp>
-      <p:sp>
-        <p:nvSpPr>
-          <p:cNvPr id="4" name="tile-161"/>
-          <p:cNvSpPr txBox="1"/>
-          <p:nvPr/>
-        </p:nvSpPr>
-        <p:spPr>
-          <a:xfrm>
-            <a:off x="6199632" y="1600200"/>
-            <a:ext cx="5440680" cy="1920240"/>
-          </a:xfrm>
-          <a:prstGeom prst="rect">
-            <a:avLst/>
-          </a:prstGeom>
-          <a:solidFill>
-            <a:srgbClr val="FFF3C9"/>
-          </a:solidFill>
-          <a:ln w="6350">
-            <a:solidFill>
-              <a:srgbClr val="FFF3C9"/>
-            </a:solidFill>
-          </a:ln>
-        </p:spPr>
-        <p:txBody>
-          <a:bodyPr wrap="square" lIns="127000" tIns="127000" rIns="127000" bIns="127000" rtlCol="0" anchor="t"/>
-          <a:lstStyle/>
-          <a:p>
-            <a:pPr indent="0" marL="0">
-              <a:buNone/>
-            </a:pPr>
-            <a:r>
-              <a:rPr lang="en-US" sz="2200" b="1" dirty="0">
-                <a:solidFill>
-                  <a:srgbClr val="035591"/>
-                </a:solidFill>
-              </a:rPr>
-              <a:t>Referat · 2.4</a:t>
-            </a:r>
-            <a:endParaRPr lang="en-US" sz="2200" dirty="0"/>
-          </a:p>
-          <a:p>
-            <a:pPr indent="0" marL="0">
-              <a:spcBef>
-                <a:spcPts val="400"/>
-              </a:spcBef>
-              <a:buNone/>
-            </a:pPr>
-            <a:r>
-              <a:rPr lang="en-US" sz="1900" dirty="0">
-                <a:solidFill>
-                  <a:srgbClr val="14232F"/>
-                </a:solidFill>
-              </a:rPr>
-              <a:t>Thema wählen, Weg A oder B</a:t>
-            </a:r>
-            <a:endParaRPr lang="en-US" sz="2200" dirty="0"/>
-          </a:p>
-        </p:txBody>
-      </p:sp>
-      <p:sp>
-        <p:nvSpPr>
-          <p:cNvPr id="5" name="link-162"/>
-          <p:cNvSpPr txBox="1"/>
-          <p:nvPr/>
-        </p:nvSpPr>
-        <p:spPr>
-          <a:xfrm>
-            <a:off x="548640" y="3931920"/>
-            <a:ext cx="7132320" cy="640080"/>
-          </a:xfrm>
-          <a:prstGeom prst="rect">
-            <a:avLst/>
-          </a:prstGeom>
-          <a:noFill/>
-          <a:ln/>
-        </p:spPr>
-        <p:txBody>
-          <a:bodyPr wrap="square" lIns="38100" tIns="38100" rIns="38100" bIns="38100" rtlCol="0" anchor="ctr"/>
-          <a:lstStyle/>
-          <a:p>
-            <a:pPr indent="0" marL="0">
-              <a:buNone/>
-            </a:pPr>
-            <a:r>
-              <a:rPr lang="en-US" sz="3000" dirty="0">
-                <a:solidFill>
-                  <a:srgbClr val="14232F"/>
-                </a:solidFill>
-              </a:rPr>
-              <a:t>Kursseite: </a:t>
-            </a:r>
-            <a:pPr indent="0" marL="0">
-              <a:buNone/>
-            </a:pPr>
-            <a:r>
-              <a:rPr lang="en-US" sz="3000" b="1" u="sng" dirty="0">
-                <a:solidFill>
-                  <a:srgbClr val="035591"/>
-                </a:solidFill>
-                <a:hlinkClick r:id="rId1" invalidUrl="" action="" tgtFrame="" tooltip="" history="1" highlightClick="0" endSnd="0">
-                  <a:extLst>
-                    <a:ext uri="{A12FA001-AC4F-418D-AE19-62706E023703}">
-                      <ahyp:hlinkClr xmlns:ahyp="http://schemas.microsoft.com/office/drawing/2018/hyperlinkcolor" val="tx"/>
-                    </a:ext>
-                  </a:extLst>
-                </a:hlinkClick>
-              </a:rPr>
-              <a:t>https://t1p.de/tdk-26</a:t>
-            </a:r>
-            <a:endParaRPr lang="en-US" sz="3000" dirty="0"/>
-          </a:p>
-        </p:txBody>
-      </p:sp>
-      <p:sp>
-        <p:nvSpPr>
-          <p:cNvPr id="6" name="text-163"/>
-          <p:cNvSpPr txBox="1"/>
-          <p:nvPr/>
-        </p:nvSpPr>
-        <p:spPr>
-          <a:xfrm>
-            <a:off x="548640" y="4663440"/>
-            <a:ext cx="7132320" cy="548640"/>
-          </a:xfrm>
-          <a:prstGeom prst="rect">
-            <a:avLst/>
-          </a:prstGeom>
-          <a:noFill/>
-          <a:ln/>
-        </p:spPr>
-        <p:txBody>
-          <a:bodyPr wrap="square" lIns="38100" tIns="38100" rIns="38100" bIns="38100" rtlCol="0" anchor="t"/>
-          <a:lstStyle/>
-          <a:p>
-            <a:pPr algn="l" indent="0" marL="0">
-              <a:buNone/>
-            </a:pPr>
-            <a:r>
-              <a:rPr lang="en-US" sz="2000" dirty="0">
-                <a:solidFill>
-                  <a:srgbClr val="14232F"/>
-                </a:solidFill>
-              </a:rPr>
-              <a:t>Vor Termin 3: Export „Nur Aufgabenpaket 2“ schicken</a:t>
-            </a:r>
-            <a:endParaRPr lang="en-US" sz="2000" dirty="0"/>
-          </a:p>
-        </p:txBody>
-      </p:sp>
-      <p:pic>
-        <p:nvPicPr>
-          <p:cNvPr id="7" name="qr-164" descr="QR-Code zur Kursseite: https://t1p.de/tdk-26">    </p:cNvPr>
-          <p:cNvPicPr>
-            <a:picLocks noChangeAspect="1"/>
-          </p:cNvPicPr>
-          <p:nvPr/>
-        </p:nvPicPr>
-        <p:blipFill>
-          <a:blip r:embed="rId2"/>
-          <a:stretch>
-            <a:fillRect/>
-          </a:stretch>
-        </p:blipFill>
-        <p:spPr>
-          <a:xfrm>
-            <a:off x="9098280" y="3703320"/>
-            <a:ext cx="2103120" cy="2103120"/>
-          </a:xfrm>
-          <a:prstGeom prst="rect">
-            <a:avLst/>
-          </a:prstGeom>
-        </p:spPr>
-      </p:pic>
+              <a:t>Lies den Auszug „Technikdidaktik – der mehrperspektivische Ansatz“ von Bienhaus (Kursseite, Spalte „Material“). Erkläre die Begriffe Erkenntnisperspektive und Zielperspektive und nenne die jeweiligen Perspektiven.</a:t>
+            </a:r>
+            <a:endParaRPr lang="en-US" sz="2600" dirty="0"/>
+          </a:p>
+        </p:txBody>
+      </p:sp>
       <p:sp>
         <p:nvSpPr>
           <p:cNvPr id="25" name="Slide Number Placeholder 0"/>
@@ -2738,9 +3161,9 @@
 </p:sld>
 </file>
 
-<file path=ppt/slides/slide2.xml><?xml version="1.0" encoding="utf-8"?>
+<file path=ppt/slides/slide11.xml><?xml version="1.0" encoding="utf-8"?>
 <p:sld xmlns:a="http://schemas.openxmlformats.org/drawingml/2006/main" xmlns:r="http://schemas.openxmlformats.org/officeDocument/2006/relationships" xmlns:p="http://schemas.openxmlformats.org/presentationml/2006/main">
-  <p:cSld name="Slide 2">
+  <p:cSld name="Slide 11">
     <p:spTree>
       <p:nvGrpSpPr>
         <p:cNvPr id="1" name=""/>
@@ -2757,7 +3180,45 @@
       </p:grpSpPr>
       <p:sp>
         <p:nvSpPr>
-          <p:cNvPr id="2" name="titel-130"/>
+          <p:cNvPr id="2" name="box-206"/>
+          <p:cNvSpPr txBox="1"/>
+          <p:nvPr/>
+        </p:nvSpPr>
+        <p:spPr>
+          <a:xfrm>
+            <a:off x="8915400" y="246888"/>
+            <a:ext cx="2862072" cy="384048"/>
+          </a:xfrm>
+          <a:prstGeom prst="rect">
+            <a:avLst/>
+          </a:prstGeom>
+          <a:solidFill>
+            <a:srgbClr val="F5B700"/>
+          </a:solidFill>
+          <a:ln/>
+        </p:spPr>
+        <p:txBody>
+          <a:bodyPr wrap="square" lIns="25400" tIns="25400" rIns="25400" bIns="25400" rtlCol="0" anchor="ctr"/>
+          <a:lstStyle/>
+          <a:p>
+            <a:pPr algn="ctr" indent="0" marL="0">
+              <a:buNone/>
+            </a:pPr>
+            <a:r>
+              <a:rPr lang="en-US" sz="1400" b="1" dirty="0">
+                <a:solidFill>
+                  <a:srgbClr val="14232F"/>
+                </a:solidFill>
+              </a:rPr>
+              <a:t>Aufgaben für zu Hause</a:t>
+            </a:r>
+            <a:endParaRPr lang="en-US" sz="1400" dirty="0"/>
+          </a:p>
+        </p:txBody>
+      </p:sp>
+      <p:sp>
+        <p:nvSpPr>
+          <p:cNvPr id="3" name="titel-207"/>
           <p:cNvSpPr txBox="1"/>
           <p:nvPr/>
         </p:nvSpPr>
@@ -2785,7 +3246,7 @@
                   <a:srgbClr val="14232F"/>
                 </a:solidFill>
               </a:rPr>
-              <a:t>Besprechung: Technikbegriff</a:t>
+              <a:t>Erkenntnisperspektiven im Kerncurriculum</a:t>
             </a:r>
             <a:endParaRPr lang="en-US" sz="2800" dirty="0"/>
           </a:p>
@@ -2793,43 +3254,43 @@
       </p:sp>
       <p:sp>
         <p:nvSpPr>
-          <p:cNvPr id="3" name="ntile-131"/>
+          <p:cNvPr id="4" name="aufgabe-208"/>
           <p:cNvSpPr txBox="1"/>
           <p:nvPr/>
         </p:nvSpPr>
         <p:spPr>
           <a:xfrm>
-            <a:off x="548640" y="1783080"/>
-            <a:ext cx="3515258" cy="3291840"/>
+            <a:off x="548640" y="2057400"/>
+            <a:ext cx="11094415" cy="2926080"/>
           </a:xfrm>
           <a:prstGeom prst="rect">
             <a:avLst/>
           </a:prstGeom>
           <a:solidFill>
-            <a:srgbClr val="EEF3F7"/>
+            <a:srgbClr val="FFF3C9"/>
           </a:solidFill>
-          <a:ln w="19050">
+          <a:ln w="25400">
             <a:solidFill>
-              <a:srgbClr val="EEF3F7"/>
+              <a:srgbClr val="F5B700"/>
             </a:solidFill>
           </a:ln>
         </p:spPr>
         <p:txBody>
-          <a:bodyPr wrap="square" lIns="152400" tIns="152400" rIns="152400" bIns="152400" rtlCol="0" anchor="t"/>
+          <a:bodyPr wrap="square" lIns="101600" tIns="177800" rIns="177800" bIns="101600" rtlCol="0" anchor="ctr"/>
           <a:lstStyle/>
           <a:p>
             <a:pPr indent="0" marL="0">
               <a:buNone/>
             </a:pPr>
             <a:r>
-              <a:rPr lang="en-US" sz="3400" b="1" dirty="0">
+              <a:rPr lang="en-US" sz="2600" b="1" dirty="0">
                 <a:solidFill>
                   <a:srgbClr val="035591"/>
                 </a:solidFill>
               </a:rPr>
-              <a:t>1.1</a:t>
-            </a:r>
-            <a:endParaRPr lang="en-US" sz="3400" dirty="0"/>
+              <a:t>Aufgabe 2.2</a:t>
+            </a:r>
+            <a:endParaRPr lang="en-US" sz="2600" dirty="0"/>
           </a:p>
           <a:p>
             <a:pPr indent="0" marL="0">
@@ -2839,132 +3300,14 @@
               <a:buNone/>
             </a:pPr>
             <a:r>
-              <a:rPr lang="en-US" sz="2200" dirty="0">
+              <a:rPr lang="en-US" sz="2600" dirty="0">
                 <a:solidFill>
                   <a:srgbClr val="14232F"/>
                 </a:solidFill>
               </a:rPr>
-              <a:t>Deine Definition für die 6. Klasse: vereinfacht, aber nicht verfälscht?</a:t>
-            </a:r>
-            <a:endParaRPr lang="en-US" sz="3400" dirty="0"/>
-          </a:p>
-        </p:txBody>
-      </p:sp>
-      <p:sp>
-        <p:nvSpPr>
-          <p:cNvPr id="4" name="ntile-132"/>
-          <p:cNvSpPr txBox="1"/>
-          <p:nvPr/>
-        </p:nvSpPr>
-        <p:spPr>
-          <a:xfrm>
-            <a:off x="4338218" y="1783080"/>
-            <a:ext cx="3515258" cy="3291840"/>
-          </a:xfrm>
-          <a:prstGeom prst="rect">
-            <a:avLst/>
-          </a:prstGeom>
-          <a:solidFill>
-            <a:srgbClr val="EEF3F7"/>
-          </a:solidFill>
-          <a:ln w="19050">
-            <a:solidFill>
-              <a:srgbClr val="EEF3F7"/>
-            </a:solidFill>
-          </a:ln>
-        </p:spPr>
-        <p:txBody>
-          <a:bodyPr wrap="square" lIns="152400" tIns="152400" rIns="152400" bIns="152400" rtlCol="0" anchor="t"/>
-          <a:lstStyle/>
-          <a:p>
-            <a:pPr indent="0" marL="0">
-              <a:buNone/>
-            </a:pPr>
-            <a:r>
-              <a:rPr lang="en-US" sz="3400" b="1" dirty="0">
-                <a:solidFill>
-                  <a:srgbClr val="035591"/>
-                </a:solidFill>
-              </a:rPr>
-              <a:t>1.2</a:t>
-            </a:r>
-            <a:endParaRPr lang="en-US" sz="3400" dirty="0"/>
-          </a:p>
-          <a:p>
-            <a:pPr indent="0" marL="0">
-              <a:spcBef>
-                <a:spcPts val="400"/>
-              </a:spcBef>
-              <a:buNone/>
-            </a:pPr>
-            <a:r>
-              <a:rPr lang="en-US" sz="2200" dirty="0">
-                <a:solidFill>
-                  <a:srgbClr val="14232F"/>
-                </a:solidFill>
-              </a:rPr>
-              <a:t>Wie beschreibt das KC Technik?</a:t>
-            </a:r>
-            <a:endParaRPr lang="en-US" sz="3400" dirty="0"/>
-          </a:p>
-        </p:txBody>
-      </p:sp>
-      <p:sp>
-        <p:nvSpPr>
-          <p:cNvPr id="5" name="ntile-133"/>
-          <p:cNvSpPr txBox="1"/>
-          <p:nvPr/>
-        </p:nvSpPr>
-        <p:spPr>
-          <a:xfrm>
-            <a:off x="8127797" y="1783080"/>
-            <a:ext cx="3515258" cy="3291840"/>
-          </a:xfrm>
-          <a:prstGeom prst="rect">
-            <a:avLst/>
-          </a:prstGeom>
-          <a:solidFill>
-            <a:srgbClr val="FFF3C9"/>
-          </a:solidFill>
-          <a:ln w="19050">
-            <a:solidFill>
-              <a:srgbClr val="F5B700"/>
-            </a:solidFill>
-          </a:ln>
-        </p:spPr>
-        <p:txBody>
-          <a:bodyPr wrap="square" lIns="152400" tIns="152400" rIns="152400" bIns="152400" rtlCol="0" anchor="t"/>
-          <a:lstStyle/>
-          <a:p>
-            <a:pPr indent="0" marL="0">
-              <a:buNone/>
-            </a:pPr>
-            <a:r>
-              <a:rPr lang="en-US" sz="3400" b="1" dirty="0">
-                <a:solidFill>
-                  <a:srgbClr val="035591"/>
-                </a:solidFill>
-              </a:rPr>
-              <a:t>1.3</a:t>
-            </a:r>
-            <a:endParaRPr lang="en-US" sz="3400" dirty="0"/>
-          </a:p>
-          <a:p>
-            <a:pPr indent="0" marL="0">
-              <a:spcBef>
-                <a:spcPts val="400"/>
-              </a:spcBef>
-              <a:buNone/>
-            </a:pPr>
-            <a:r>
-              <a:rPr lang="en-US" sz="2200" dirty="0">
-                <a:solidFill>
-                  <a:srgbClr val="14232F"/>
-                </a:solidFill>
-              </a:rPr>
-              <a:t>KC und Ropohl: Was ist gleich, was fehlt?</a:t>
-            </a:r>
-            <a:endParaRPr lang="en-US" sz="3400" dirty="0"/>
+              <a:t>Analysiere, in welcher Form die Erkenntnisperspektiven nach Schmayl im Kerncurriculum Technik für die Realschule wiederzufinden sind.</a:t>
+            </a:r>
+            <a:endParaRPr lang="en-US" sz="2600" dirty="0"/>
           </a:p>
         </p:txBody>
       </p:sp>
@@ -3007,7 +3350,7 @@
             <a:pPr algn="r"/>
             <a:fld id="{F7021451-1387-4CA6-816F-3879F97B5CBC}" type="slidenum">
               <a:rPr b="0" lang="en-US"/>
-              <a:t>2</a:t>
+              <a:t>11</a:t>
             </a:fld>
             <a:endParaRPr lang="en-US"/>
           </a:p>
@@ -3021,9 +3364,9 @@
 </p:sld>
 </file>
 
-<file path=ppt/slides/slide3.xml><?xml version="1.0" encoding="utf-8"?>
+<file path=ppt/slides/slide12.xml><?xml version="1.0" encoding="utf-8"?>
 <p:sld xmlns:a="http://schemas.openxmlformats.org/drawingml/2006/main" xmlns:r="http://schemas.openxmlformats.org/officeDocument/2006/relationships" xmlns:p="http://schemas.openxmlformats.org/presentationml/2006/main">
-  <p:cSld name="Slide 3">
+  <p:cSld name="Slide 12">
     <p:spTree>
       <p:nvGrpSpPr>
         <p:cNvPr id="1" name=""/>
@@ -3040,7 +3383,45 @@
       </p:grpSpPr>
       <p:sp>
         <p:nvSpPr>
-          <p:cNvPr id="2" name="titel-134"/>
+          <p:cNvPr id="2" name="box-209"/>
+          <p:cNvSpPr txBox="1"/>
+          <p:nvPr/>
+        </p:nvSpPr>
+        <p:spPr>
+          <a:xfrm>
+            <a:off x="8915400" y="246888"/>
+            <a:ext cx="2862072" cy="384048"/>
+          </a:xfrm>
+          <a:prstGeom prst="rect">
+            <a:avLst/>
+          </a:prstGeom>
+          <a:solidFill>
+            <a:srgbClr val="F5B700"/>
+          </a:solidFill>
+          <a:ln/>
+        </p:spPr>
+        <p:txBody>
+          <a:bodyPr wrap="square" lIns="25400" tIns="25400" rIns="25400" bIns="25400" rtlCol="0" anchor="ctr"/>
+          <a:lstStyle/>
+          <a:p>
+            <a:pPr algn="ctr" indent="0" marL="0">
+              <a:buNone/>
+            </a:pPr>
+            <a:r>
+              <a:rPr lang="en-US" sz="1400" b="1" dirty="0">
+                <a:solidFill>
+                  <a:srgbClr val="14232F"/>
+                </a:solidFill>
+              </a:rPr>
+              <a:t>Aufgaben für zu Hause</a:t>
+            </a:r>
+            <a:endParaRPr lang="en-US" sz="1400" dirty="0"/>
+          </a:p>
+        </p:txBody>
+      </p:sp>
+      <p:sp>
+        <p:nvSpPr>
+          <p:cNvPr id="3" name="titel-210"/>
           <p:cNvSpPr txBox="1"/>
           <p:nvPr/>
         </p:nvSpPr>
@@ -3068,7 +3449,7 @@
                   <a:srgbClr val="14232F"/>
                 </a:solidFill>
               </a:rPr>
-              <a:t>Besprechung: Technik im Fächerkanon</a:t>
+              <a:t>Inhaltsfelder im Kerncurriculum</a:t>
             </a:r>
             <a:endParaRPr lang="en-US" sz="2800" dirty="0"/>
           </a:p>
@@ -3076,43 +3457,43 @@
       </p:sp>
       <p:sp>
         <p:nvSpPr>
-          <p:cNvPr id="3" name="ntile-135"/>
+          <p:cNvPr id="4" name="aufgabe-211"/>
           <p:cNvSpPr txBox="1"/>
           <p:nvPr/>
         </p:nvSpPr>
         <p:spPr>
           <a:xfrm>
-            <a:off x="548640" y="1691640"/>
-            <a:ext cx="3515258" cy="2011680"/>
+            <a:off x="548640" y="2057400"/>
+            <a:ext cx="11094415" cy="2926080"/>
           </a:xfrm>
           <a:prstGeom prst="rect">
             <a:avLst/>
           </a:prstGeom>
           <a:solidFill>
-            <a:srgbClr val="EEF3F7"/>
+            <a:srgbClr val="FFF3C9"/>
           </a:solidFill>
-          <a:ln w="19050">
+          <a:ln w="25400">
             <a:solidFill>
-              <a:srgbClr val="EEF3F7"/>
+              <a:srgbClr val="F5B700"/>
             </a:solidFill>
           </a:ln>
         </p:spPr>
         <p:txBody>
-          <a:bodyPr wrap="square" lIns="152400" tIns="152400" rIns="152400" bIns="152400" rtlCol="0" anchor="t"/>
+          <a:bodyPr wrap="square" lIns="101600" tIns="177800" rIns="177800" bIns="101600" rtlCol="0" anchor="ctr"/>
           <a:lstStyle/>
           <a:p>
             <a:pPr indent="0" marL="0">
               <a:buNone/>
             </a:pPr>
             <a:r>
-              <a:rPr lang="en-US" sz="3400" b="1" dirty="0">
+              <a:rPr lang="en-US" sz="2600" b="1" dirty="0">
                 <a:solidFill>
                   <a:srgbClr val="035591"/>
                 </a:solidFill>
               </a:rPr>
-              <a:t>1.4</a:t>
-            </a:r>
-            <a:endParaRPr lang="en-US" sz="3400" dirty="0"/>
+              <a:t>Aufgabe 2.3</a:t>
+            </a:r>
+            <a:endParaRPr lang="en-US" sz="2600" dirty="0"/>
           </a:p>
           <a:p>
             <a:pPr indent="0" marL="0">
@@ -3122,56 +3503,14 @@
               <a:buNone/>
             </a:pPr>
             <a:r>
-              <a:rPr lang="en-US" sz="2000" dirty="0">
+              <a:rPr lang="en-US" sz="2600" dirty="0">
                 <a:solidFill>
                   <a:srgbClr val="14232F"/>
                 </a:solidFill>
               </a:rPr>
-              <a:t>Intentionen und Begründungen</a:t>
-            </a:r>
-            <a:endParaRPr lang="en-US" sz="3400" dirty="0"/>
-          </a:p>
-        </p:txBody>
-      </p:sp>
-      <p:sp>
-        <p:nvSpPr>
-          <p:cNvPr id="4" name="ntile-136"/>
-          <p:cNvSpPr txBox="1"/>
-          <p:nvPr/>
-        </p:nvSpPr>
-        <p:spPr>
-          <a:xfrm>
-            <a:off x="4338218" y="1691640"/>
-            <a:ext cx="3515258" cy="2011680"/>
-          </a:xfrm>
-          <a:prstGeom prst="rect">
-            <a:avLst/>
-          </a:prstGeom>
-          <a:solidFill>
-            <a:srgbClr val="EEF3F7"/>
-          </a:solidFill>
-          <a:ln w="19050">
-            <a:solidFill>
-              <a:srgbClr val="EEF3F7"/>
-            </a:solidFill>
-          </a:ln>
-        </p:spPr>
-        <p:txBody>
-          <a:bodyPr wrap="square" lIns="152400" tIns="152400" rIns="152400" bIns="152400" rtlCol="0" anchor="t"/>
-          <a:lstStyle/>
-          <a:p>
-            <a:pPr indent="0" marL="0">
-              <a:buNone/>
-            </a:pPr>
-            <a:r>
-              <a:rPr lang="en-US" sz="3400" b="1" dirty="0">
-                <a:solidFill>
-                  <a:srgbClr val="035591"/>
-                </a:solidFill>
-              </a:rPr>
-              <a:t>1.5</a:t>
-            </a:r>
-            <a:endParaRPr lang="en-US" sz="3400" dirty="0"/>
+              <a:t>Vergleiche, welche Inhaltsfelder des mehrperspektivischen Technikunterrichts im Kerncurriculum Technik für die Realschule vorkommen und welche nicht.</a:t>
+            </a:r>
+            <a:endParaRPr lang="en-US" sz="2600" dirty="0"/>
           </a:p>
           <a:p>
             <a:pPr indent="0" marL="0">
@@ -3183,248 +3522,12 @@
             <a:r>
               <a:rPr lang="en-US" sz="2000" dirty="0">
                 <a:solidFill>
-                  <a:srgbClr val="14232F"/>
-                </a:solidFill>
-              </a:rPr>
-              <a:t>Harald Lesch und das Fach Technik</a:t>
-            </a:r>
-            <a:endParaRPr lang="en-US" sz="3400" dirty="0"/>
-          </a:p>
-        </p:txBody>
-      </p:sp>
-      <p:sp>
-        <p:nvSpPr>
-          <p:cNvPr id="5" name="ntile-137"/>
-          <p:cNvSpPr txBox="1"/>
-          <p:nvPr/>
-        </p:nvSpPr>
-        <p:spPr>
-          <a:xfrm>
-            <a:off x="8127797" y="1691640"/>
-            <a:ext cx="3515258" cy="2011680"/>
-          </a:xfrm>
-          <a:prstGeom prst="rect">
-            <a:avLst/>
-          </a:prstGeom>
-          <a:solidFill>
-            <a:srgbClr val="EEF3F7"/>
-          </a:solidFill>
-          <a:ln w="19050">
-            <a:solidFill>
-              <a:srgbClr val="EEF3F7"/>
-            </a:solidFill>
-          </a:ln>
-        </p:spPr>
-        <p:txBody>
-          <a:bodyPr wrap="square" lIns="152400" tIns="152400" rIns="152400" bIns="152400" rtlCol="0" anchor="t"/>
-          <a:lstStyle/>
-          <a:p>
-            <a:pPr indent="0" marL="0">
-              <a:buNone/>
-            </a:pPr>
-            <a:r>
-              <a:rPr lang="en-US" sz="3400" b="1" dirty="0">
-                <a:solidFill>
-                  <a:srgbClr val="035591"/>
-                </a:solidFill>
-              </a:rPr>
-              <a:t>1.6</a:t>
-            </a:r>
-            <a:endParaRPr lang="en-US" sz="3400" dirty="0"/>
-          </a:p>
-          <a:p>
-            <a:pPr indent="0" marL="0">
-              <a:spcBef>
-                <a:spcPts val="400"/>
-              </a:spcBef>
-              <a:buNone/>
-            </a:pPr>
-            <a:r>
-              <a:rPr lang="en-US" sz="2000" dirty="0">
-                <a:solidFill>
-                  <a:srgbClr val="14232F"/>
-                </a:solidFill>
-              </a:rPr>
-              <a:t>Der Schulversuch der RBG</a:t>
-            </a:r>
-            <a:endParaRPr lang="en-US" sz="3400" dirty="0"/>
-          </a:p>
-        </p:txBody>
-      </p:sp>
-      <p:sp>
-        <p:nvSpPr>
-          <p:cNvPr id="6" name="ntile-138"/>
-          <p:cNvSpPr txBox="1"/>
-          <p:nvPr/>
-        </p:nvSpPr>
-        <p:spPr>
-          <a:xfrm>
-            <a:off x="548640" y="3931920"/>
-            <a:ext cx="3515258" cy="2011680"/>
-          </a:xfrm>
-          <a:prstGeom prst="rect">
-            <a:avLst/>
-          </a:prstGeom>
-          <a:solidFill>
-            <a:srgbClr val="EEF3F7"/>
-          </a:solidFill>
-          <a:ln w="19050">
-            <a:solidFill>
-              <a:srgbClr val="EEF3F7"/>
-            </a:solidFill>
-          </a:ln>
-        </p:spPr>
-        <p:txBody>
-          <a:bodyPr wrap="square" lIns="152400" tIns="152400" rIns="152400" bIns="152400" rtlCol="0" anchor="t"/>
-          <a:lstStyle/>
-          <a:p>
-            <a:pPr indent="0" marL="0">
-              <a:buNone/>
-            </a:pPr>
-            <a:r>
-              <a:rPr lang="en-US" sz="3400" b="1" dirty="0">
-                <a:solidFill>
-                  <a:srgbClr val="035591"/>
-                </a:solidFill>
-              </a:rPr>
-              <a:t>1.7</a:t>
-            </a:r>
-            <a:endParaRPr lang="en-US" sz="3400" dirty="0"/>
-          </a:p>
-          <a:p>
-            <a:pPr indent="0" marL="0">
-              <a:spcBef>
-                <a:spcPts val="400"/>
-              </a:spcBef>
-              <a:buNone/>
-            </a:pPr>
-            <a:r>
-              <a:rPr lang="en-US" sz="2000" dirty="0">
-                <a:solidFill>
-                  <a:srgbClr val="14232F"/>
-                </a:solidFill>
-              </a:rPr>
-              <a:t>Physik und Technik zusammenlegen?</a:t>
-            </a:r>
-            <a:endParaRPr lang="en-US" sz="3400" dirty="0"/>
-          </a:p>
-        </p:txBody>
-      </p:sp>
-      <p:sp>
-        <p:nvSpPr>
-          <p:cNvPr id="7" name="ntile-139"/>
-          <p:cNvSpPr txBox="1"/>
-          <p:nvPr/>
-        </p:nvSpPr>
-        <p:spPr>
-          <a:xfrm>
-            <a:off x="4338218" y="3931920"/>
-            <a:ext cx="3515258" cy="2011680"/>
-          </a:xfrm>
-          <a:prstGeom prst="rect">
-            <a:avLst/>
-          </a:prstGeom>
-          <a:solidFill>
-            <a:srgbClr val="EEF3F7"/>
-          </a:solidFill>
-          <a:ln w="19050">
-            <a:solidFill>
-              <a:srgbClr val="EEF3F7"/>
-            </a:solidFill>
-          </a:ln>
-        </p:spPr>
-        <p:txBody>
-          <a:bodyPr wrap="square" lIns="152400" tIns="152400" rIns="152400" bIns="152400" rtlCol="0" anchor="t"/>
-          <a:lstStyle/>
-          <a:p>
-            <a:pPr indent="0" marL="0">
-              <a:buNone/>
-            </a:pPr>
-            <a:r>
-              <a:rPr lang="en-US" sz="3400" b="1" dirty="0">
-                <a:solidFill>
-                  <a:srgbClr val="035591"/>
-                </a:solidFill>
-              </a:rPr>
-              <a:t>1.8</a:t>
-            </a:r>
-            <a:endParaRPr lang="en-US" sz="3400" dirty="0"/>
-          </a:p>
-          <a:p>
-            <a:pPr indent="0" marL="0">
-              <a:spcBef>
-                <a:spcPts val="400"/>
-              </a:spcBef>
-              <a:buNone/>
-            </a:pPr>
-            <a:r>
-              <a:rPr lang="en-US" sz="2000" dirty="0">
-                <a:solidFill>
-                  <a:srgbClr val="14232F"/>
-                </a:solidFill>
-              </a:rPr>
-              <a:t>Und der VDI?</a:t>
-            </a:r>
-            <a:endParaRPr lang="en-US" sz="3400" dirty="0"/>
-          </a:p>
-        </p:txBody>
-      </p:sp>
-      <p:sp>
-        <p:nvSpPr>
-          <p:cNvPr id="8" name="ntile-140"/>
-          <p:cNvSpPr txBox="1"/>
-          <p:nvPr/>
-        </p:nvSpPr>
-        <p:spPr>
-          <a:xfrm>
-            <a:off x="8127797" y="3931920"/>
-            <a:ext cx="3515258" cy="2011680"/>
-          </a:xfrm>
-          <a:prstGeom prst="rect">
-            <a:avLst/>
-          </a:prstGeom>
-          <a:solidFill>
-            <a:srgbClr val="FFF3C9"/>
-          </a:solidFill>
-          <a:ln w="19050">
-            <a:solidFill>
-              <a:srgbClr val="F5B700"/>
-            </a:solidFill>
-          </a:ln>
-        </p:spPr>
-        <p:txBody>
-          <a:bodyPr wrap="square" lIns="152400" tIns="152400" rIns="152400" bIns="152400" rtlCol="0" anchor="t"/>
-          <a:lstStyle/>
-          <a:p>
-            <a:pPr indent="0" marL="0">
-              <a:buNone/>
-            </a:pPr>
-            <a:r>
-              <a:rPr lang="en-US" sz="3400" b="1" dirty="0">
-                <a:solidFill>
-                  <a:srgbClr val="035591"/>
-                </a:solidFill>
-              </a:rPr>
-              <a:t>1.9</a:t>
-            </a:r>
-            <a:endParaRPr lang="en-US" sz="3400" dirty="0"/>
-          </a:p>
-          <a:p>
-            <a:pPr indent="0" marL="0">
-              <a:spcBef>
-                <a:spcPts val="400"/>
-              </a:spcBef>
-              <a:buNone/>
-            </a:pPr>
-            <a:r>
-              <a:rPr lang="en-US" sz="2000" dirty="0">
-                <a:solidFill>
-                  <a:srgbClr val="14232F"/>
-                </a:solidFill>
-              </a:rPr>
-              <a:t>Deine Entscheidung (a–f) und dein stärkstes Argument</a:t>
-            </a:r>
-            <a:endParaRPr lang="en-US" sz="3400" dirty="0"/>
+                  <a:srgbClr val="56687A"/>
+                </a:solidFill>
+              </a:rPr>
+              <a:t>Auf der nächsten Folie findest du eine Übersicht der Inhaltsfelder des mpTu.</a:t>
+            </a:r>
+            <a:endParaRPr lang="en-US" sz="2600" dirty="0"/>
           </a:p>
         </p:txBody>
       </p:sp>
@@ -3467,7 +3570,7 @@
             <a:pPr algn="r"/>
             <a:fld id="{F7021451-1387-4CA6-816F-3879F97B5CBC}" type="slidenum">
               <a:rPr b="0" lang="en-US"/>
-              <a:t>3</a:t>
+              <a:t>12</a:t>
             </a:fld>
             <a:endParaRPr lang="en-US"/>
           </a:p>
@@ -3481,9 +3584,9 @@
 </p:sld>
 </file>
 
-<file path=ppt/slides/slide4.xml><?xml version="1.0" encoding="utf-8"?>
+<file path=ppt/slides/slide13.xml><?xml version="1.0" encoding="utf-8"?>
 <p:sld xmlns:a="http://schemas.openxmlformats.org/drawingml/2006/main" xmlns:r="http://schemas.openxmlformats.org/officeDocument/2006/relationships" xmlns:p="http://schemas.openxmlformats.org/presentationml/2006/main">
-  <p:cSld name="Slide 4">
+  <p:cSld name="Slide 13">
     <p:spTree>
       <p:nvGrpSpPr>
         <p:cNvPr id="1" name=""/>
@@ -3500,7 +3603,45 @@
       </p:grpSpPr>
       <p:sp>
         <p:nvSpPr>
-          <p:cNvPr id="2" name="titel-141"/>
+          <p:cNvPr id="2" name="box-212"/>
+          <p:cNvSpPr txBox="1"/>
+          <p:nvPr/>
+        </p:nvSpPr>
+        <p:spPr>
+          <a:xfrm>
+            <a:off x="8915400" y="246888"/>
+            <a:ext cx="2862072" cy="384048"/>
+          </a:xfrm>
+          <a:prstGeom prst="rect">
+            <a:avLst/>
+          </a:prstGeom>
+          <a:solidFill>
+            <a:srgbClr val="F5B700"/>
+          </a:solidFill>
+          <a:ln/>
+        </p:spPr>
+        <p:txBody>
+          <a:bodyPr wrap="square" lIns="25400" tIns="25400" rIns="25400" bIns="25400" rtlCol="0" anchor="ctr"/>
+          <a:lstStyle/>
+          <a:p>
+            <a:pPr algn="ctr" indent="0" marL="0">
+              <a:buNone/>
+            </a:pPr>
+            <a:r>
+              <a:rPr lang="en-US" sz="1400" b="1" dirty="0">
+                <a:solidFill>
+                  <a:srgbClr val="14232F"/>
+                </a:solidFill>
+              </a:rPr>
+              <a:t>Aufgaben für zu Hause</a:t>
+            </a:r>
+            <a:endParaRPr lang="en-US" sz="1400" dirty="0"/>
+          </a:p>
+        </p:txBody>
+      </p:sp>
+      <p:sp>
+        <p:nvSpPr>
+          <p:cNvPr id="3" name="titel-213"/>
           <p:cNvSpPr txBox="1"/>
           <p:nvPr/>
         </p:nvSpPr>
@@ -3528,712 +3669,6 @@
                   <a:srgbClr val="14232F"/>
                 </a:solidFill>
               </a:rPr>
-              <a:t>Der mehrperspektivische Technikunterricht</a:t>
-            </a:r>
-            <a:endParaRPr lang="en-US" sz="2800" dirty="0"/>
-          </a:p>
-        </p:txBody>
-      </p:sp>
-      <p:sp>
-        <p:nvSpPr>
-          <p:cNvPr id="3" name="box-142"/>
-          <p:cNvSpPr txBox="1"/>
-          <p:nvPr/>
-        </p:nvSpPr>
-        <p:spPr>
-          <a:xfrm>
-            <a:off x="548640" y="2148840"/>
-            <a:ext cx="11094415" cy="2011680"/>
-          </a:xfrm>
-          <a:prstGeom prst="rect">
-            <a:avLst/>
-          </a:prstGeom>
-          <a:solidFill>
-            <a:srgbClr val="EEF3F7"/>
-          </a:solidFill>
-          <a:ln/>
-        </p:spPr>
-        <p:txBody>
-          <a:bodyPr wrap="square" lIns="101600" tIns="101600" rIns="101600" bIns="101600" rtlCol="0" anchor="ctr"/>
-          <a:lstStyle/>
-          <a:p>
-            <a:pPr algn="ctr" indent="0" marL="0">
-              <a:buNone/>
-            </a:pPr>
-            <a:r>
-              <a:rPr lang="en-US" sz="4000" b="1" dirty="0">
-                <a:solidFill>
-                  <a:srgbClr val="035591"/>
-                </a:solidFill>
-              </a:rPr>
-              <a:t>Der mehrperspektivische Technikunterricht</a:t>
-            </a:r>
-            <a:endParaRPr lang="en-US" sz="2000" dirty="0"/>
-          </a:p>
-          <a:p>
-            <a:pPr algn="ctr" indent="0" marL="0">
-              <a:buNone/>
-            </a:pPr>
-            <a:r>
-              <a:rPr lang="en-US" sz="2600" dirty="0">
-                <a:solidFill>
-                  <a:srgbClr val="14232F"/>
-                </a:solidFill>
-              </a:rPr>
-              <a:t>(mpTu) nach Wilkening und Schmayl</a:t>
-            </a:r>
-            <a:endParaRPr lang="en-US" sz="2000" dirty="0"/>
-          </a:p>
-        </p:txBody>
-      </p:sp>
-      <p:sp>
-        <p:nvSpPr>
-          <p:cNvPr id="4" name="text-143"/>
-          <p:cNvSpPr txBox="1"/>
-          <p:nvPr/>
-        </p:nvSpPr>
-        <p:spPr>
-          <a:xfrm>
-            <a:off x="548640" y="4206240"/>
-            <a:ext cx="11094415" cy="548640"/>
-          </a:xfrm>
-          <a:prstGeom prst="rect">
-            <a:avLst/>
-          </a:prstGeom>
-          <a:noFill/>
-          <a:ln/>
-        </p:spPr>
-        <p:txBody>
-          <a:bodyPr wrap="square" lIns="38100" tIns="38100" rIns="38100" bIns="38100" rtlCol="0" anchor="t"/>
-          <a:lstStyle/>
-          <a:p>
-            <a:pPr algn="ctr" indent="0" marL="0">
-              <a:buNone/>
-            </a:pPr>
-            <a:r>
-              <a:rPr lang="en-US" sz="2000" dirty="0">
-                <a:solidFill>
-                  <a:srgbClr val="56687A"/>
-                </a:solidFill>
-              </a:rPr>
-              <a:t>Grundlage: Bienhaus (2008): Technikdidaktik – der mehrperspektivische Ansatz</a:t>
-            </a:r>
-            <a:endParaRPr lang="en-US" sz="2000" dirty="0"/>
-          </a:p>
-        </p:txBody>
-      </p:sp>
-      <p:sp>
-        <p:nvSpPr>
-          <p:cNvPr id="25" name="Slide Number Placeholder 0"/>
-          <p:cNvSpPr>
-            <a:spLocks noGrp="1"/>
-          </p:cNvSpPr>
-          <p:nvPr>
-            <p:ph type="sldNum" sz="quarter" idx="4294967295"/>
-          </p:nvPr>
-        </p:nvSpPr>
-        <p:spPr>
-          <a:xfrm>
-            <a:off x="11247120" y="6473952"/>
-            <a:ext cx="548640" cy="274320"/>
-          </a:xfrm>
-          <a:prstGeom prst="rect">
-            <a:avLst/>
-          </a:prstGeom>
-          <a:extLst>
-            <a:ext uri="{C572A759-6A51-4108-AA02-DFA0A04FC94B}">
-              <ma14:wrappingTextBoxFlag xmlns:ma14="http://schemas.microsoft.com/office/mac/drawingml/2011/main" val="0"/>
-            </a:ext>
-          </a:extLst>
-        </p:spPr>
-        <p:txBody>
-          <a:bodyPr/>
-          <a:lstStyle>
-            <a:lvl1pPr>
-              <a:defRPr sz="1000">
-                <a:solidFill>
-                  <a:srgbClr val="56687A"/>
-                </a:solidFill>
-              </a:defRPr>
-            </a:lvl1pPr>
-          </a:lstStyle>
-          <a:p>
-            <a:pPr algn="r"/>
-            <a:fld id="{F7021451-1387-4CA6-816F-3879F97B5CBC}" type="slidenum">
-              <a:rPr b="0" lang="en-US"/>
-              <a:t>4</a:t>
-            </a:fld>
-            <a:endParaRPr lang="en-US"/>
-          </a:p>
-        </p:txBody>
-      </p:sp>
-    </p:spTree>
-  </p:cSld>
-  <p:clrMapOvr>
-    <a:masterClrMapping/>
-  </p:clrMapOvr>
-</p:sld>
-</file>
-
-<file path=ppt/slides/slide5.xml><?xml version="1.0" encoding="utf-8"?>
-<p:sld xmlns:a="http://schemas.openxmlformats.org/drawingml/2006/main" xmlns:r="http://schemas.openxmlformats.org/officeDocument/2006/relationships" xmlns:p="http://schemas.openxmlformats.org/presentationml/2006/main">
-  <p:cSld name="Slide 5">
-    <p:spTree>
-      <p:nvGrpSpPr>
-        <p:cNvPr id="1" name=""/>
-        <p:cNvGrpSpPr/>
-        <p:nvPr/>
-      </p:nvGrpSpPr>
-      <p:grpSpPr>
-        <a:xfrm>
-          <a:off x="0" y="0"/>
-          <a:ext cx="0" cy="0"/>
-          <a:chOff x="0" y="0"/>
-          <a:chExt cx="0" cy="0"/>
-        </a:xfrm>
-      </p:grpSpPr>
-      <p:sp>
-        <p:nvSpPr>
-          <p:cNvPr id="2" name="titel-144"/>
-          <p:cNvSpPr txBox="1"/>
-          <p:nvPr/>
-        </p:nvSpPr>
-        <p:spPr>
-          <a:xfrm>
-            <a:off x="548640" y="896112"/>
-            <a:ext cx="11094415" cy="640080"/>
-          </a:xfrm>
-          <a:prstGeom prst="rect">
-            <a:avLst/>
-          </a:prstGeom>
-          <a:noFill/>
-          <a:ln/>
-        </p:spPr>
-        <p:txBody>
-          <a:bodyPr wrap="square" lIns="0" tIns="0" rIns="0" bIns="0" rtlCol="0" anchor="ctr"/>
-          <a:lstStyle/>
-          <a:p>
-            <a:pPr indent="0" marL="0">
-              <a:buNone/>
-            </a:pPr>
-            <a:r>
-              <a:rPr lang="en-US" sz="2800" b="1" dirty="0">
-                <a:solidFill>
-                  <a:srgbClr val="14232F"/>
-                </a:solidFill>
-              </a:rPr>
-              <a:t>Erkenntnisperspektive und Zielperspektive</a:t>
-            </a:r>
-            <a:endParaRPr lang="en-US" sz="2800" dirty="0"/>
-          </a:p>
-        </p:txBody>
-      </p:sp>
-      <p:sp>
-        <p:nvSpPr>
-          <p:cNvPr id="3" name="aufgabe-145"/>
-          <p:cNvSpPr txBox="1"/>
-          <p:nvPr/>
-        </p:nvSpPr>
-        <p:spPr>
-          <a:xfrm>
-            <a:off x="548640" y="2057400"/>
-            <a:ext cx="11094415" cy="2926080"/>
-          </a:xfrm>
-          <a:prstGeom prst="rect">
-            <a:avLst/>
-          </a:prstGeom>
-          <a:solidFill>
-            <a:srgbClr val="FFF3C9"/>
-          </a:solidFill>
-          <a:ln w="25400">
-            <a:solidFill>
-              <a:srgbClr val="F5B700"/>
-            </a:solidFill>
-          </a:ln>
-        </p:spPr>
-        <p:txBody>
-          <a:bodyPr wrap="square" lIns="101600" tIns="177800" rIns="177800" bIns="101600" rtlCol="0" anchor="ctr"/>
-          <a:lstStyle/>
-          <a:p>
-            <a:pPr indent="0" marL="0">
-              <a:buNone/>
-            </a:pPr>
-            <a:r>
-              <a:rPr lang="en-US" sz="2600" b="1" dirty="0">
-                <a:solidFill>
-                  <a:srgbClr val="035591"/>
-                </a:solidFill>
-              </a:rPr>
-              <a:t>Aufgabe 2.1</a:t>
-            </a:r>
-            <a:endParaRPr lang="en-US" sz="2600" dirty="0"/>
-          </a:p>
-          <a:p>
-            <a:pPr indent="0" marL="0">
-              <a:spcBef>
-                <a:spcPts val="400"/>
-              </a:spcBef>
-              <a:buNone/>
-            </a:pPr>
-            <a:r>
-              <a:rPr lang="en-US" sz="2600" dirty="0">
-                <a:solidFill>
-                  <a:srgbClr val="14232F"/>
-                </a:solidFill>
-              </a:rPr>
-              <a:t>Lies den Auszug „Technikdidaktik – der mehrperspektivische Ansatz“ von Bienhaus. Erkläre die Begriffe Erkenntnisperspektive und Zielperspektive und nenne die jeweiligen Perspektiven.</a:t>
-            </a:r>
-            <a:endParaRPr lang="en-US" sz="2600" dirty="0"/>
-          </a:p>
-        </p:txBody>
-      </p:sp>
-      <p:sp>
-        <p:nvSpPr>
-          <p:cNvPr id="25" name="Slide Number Placeholder 0"/>
-          <p:cNvSpPr>
-            <a:spLocks noGrp="1"/>
-          </p:cNvSpPr>
-          <p:nvPr>
-            <p:ph type="sldNum" sz="quarter" idx="4294967295"/>
-          </p:nvPr>
-        </p:nvSpPr>
-        <p:spPr>
-          <a:xfrm>
-            <a:off x="11247120" y="6473952"/>
-            <a:ext cx="548640" cy="274320"/>
-          </a:xfrm>
-          <a:prstGeom prst="rect">
-            <a:avLst/>
-          </a:prstGeom>
-          <a:extLst>
-            <a:ext uri="{C572A759-6A51-4108-AA02-DFA0A04FC94B}">
-              <ma14:wrappingTextBoxFlag xmlns:ma14="http://schemas.microsoft.com/office/mac/drawingml/2011/main" val="0"/>
-            </a:ext>
-          </a:extLst>
-        </p:spPr>
-        <p:txBody>
-          <a:bodyPr/>
-          <a:lstStyle>
-            <a:lvl1pPr>
-              <a:defRPr sz="1000">
-                <a:solidFill>
-                  <a:srgbClr val="56687A"/>
-                </a:solidFill>
-              </a:defRPr>
-            </a:lvl1pPr>
-          </a:lstStyle>
-          <a:p>
-            <a:pPr algn="r"/>
-            <a:fld id="{F7021451-1387-4CA6-816F-3879F97B5CBC}" type="slidenum">
-              <a:rPr b="0" lang="en-US"/>
-              <a:t>5</a:t>
-            </a:fld>
-            <a:endParaRPr lang="en-US"/>
-          </a:p>
-        </p:txBody>
-      </p:sp>
-    </p:spTree>
-  </p:cSld>
-  <p:clrMapOvr>
-    <a:masterClrMapping/>
-  </p:clrMapOvr>
-</p:sld>
-</file>
-
-<file path=ppt/slides/slide6.xml><?xml version="1.0" encoding="utf-8"?>
-<p:sld xmlns:a="http://schemas.openxmlformats.org/drawingml/2006/main" xmlns:r="http://schemas.openxmlformats.org/officeDocument/2006/relationships" xmlns:p="http://schemas.openxmlformats.org/presentationml/2006/main">
-  <p:cSld name="Slide 6">
-    <p:spTree>
-      <p:nvGrpSpPr>
-        <p:cNvPr id="1" name=""/>
-        <p:cNvGrpSpPr/>
-        <p:nvPr/>
-      </p:nvGrpSpPr>
-      <p:grpSpPr>
-        <a:xfrm>
-          <a:off x="0" y="0"/>
-          <a:ext cx="0" cy="0"/>
-          <a:chOff x="0" y="0"/>
-          <a:chExt cx="0" cy="0"/>
-        </a:xfrm>
-      </p:grpSpPr>
-      <p:sp>
-        <p:nvSpPr>
-          <p:cNvPr id="2" name="titel-146"/>
-          <p:cNvSpPr txBox="1"/>
-          <p:nvPr/>
-        </p:nvSpPr>
-        <p:spPr>
-          <a:xfrm>
-            <a:off x="548640" y="896112"/>
-            <a:ext cx="11094415" cy="640080"/>
-          </a:xfrm>
-          <a:prstGeom prst="rect">
-            <a:avLst/>
-          </a:prstGeom>
-          <a:noFill/>
-          <a:ln/>
-        </p:spPr>
-        <p:txBody>
-          <a:bodyPr wrap="square" lIns="0" tIns="0" rIns="0" bIns="0" rtlCol="0" anchor="ctr"/>
-          <a:lstStyle/>
-          <a:p>
-            <a:pPr indent="0" marL="0">
-              <a:buNone/>
-            </a:pPr>
-            <a:r>
-              <a:rPr lang="en-US" sz="2800" b="1" dirty="0">
-                <a:solidFill>
-                  <a:srgbClr val="14232F"/>
-                </a:solidFill>
-              </a:rPr>
-              <a:t>Erkenntnisperspektiven im Kerncurriculum</a:t>
-            </a:r>
-            <a:endParaRPr lang="en-US" sz="2800" dirty="0"/>
-          </a:p>
-        </p:txBody>
-      </p:sp>
-      <p:sp>
-        <p:nvSpPr>
-          <p:cNvPr id="3" name="aufgabe-147"/>
-          <p:cNvSpPr txBox="1"/>
-          <p:nvPr/>
-        </p:nvSpPr>
-        <p:spPr>
-          <a:xfrm>
-            <a:off x="548640" y="2057400"/>
-            <a:ext cx="11094415" cy="2926080"/>
-          </a:xfrm>
-          <a:prstGeom prst="rect">
-            <a:avLst/>
-          </a:prstGeom>
-          <a:solidFill>
-            <a:srgbClr val="FFF3C9"/>
-          </a:solidFill>
-          <a:ln w="25400">
-            <a:solidFill>
-              <a:srgbClr val="F5B700"/>
-            </a:solidFill>
-          </a:ln>
-        </p:spPr>
-        <p:txBody>
-          <a:bodyPr wrap="square" lIns="101600" tIns="177800" rIns="177800" bIns="101600" rtlCol="0" anchor="ctr"/>
-          <a:lstStyle/>
-          <a:p>
-            <a:pPr indent="0" marL="0">
-              <a:buNone/>
-            </a:pPr>
-            <a:r>
-              <a:rPr lang="en-US" sz="2600" b="1" dirty="0">
-                <a:solidFill>
-                  <a:srgbClr val="035591"/>
-                </a:solidFill>
-              </a:rPr>
-              <a:t>Aufgabe 2.2</a:t>
-            </a:r>
-            <a:endParaRPr lang="en-US" sz="2600" dirty="0"/>
-          </a:p>
-          <a:p>
-            <a:pPr indent="0" marL="0">
-              <a:spcBef>
-                <a:spcPts val="400"/>
-              </a:spcBef>
-              <a:buNone/>
-            </a:pPr>
-            <a:r>
-              <a:rPr lang="en-US" sz="2600" dirty="0">
-                <a:solidFill>
-                  <a:srgbClr val="14232F"/>
-                </a:solidFill>
-              </a:rPr>
-              <a:t>Analysiere, in welcher Form die Erkenntnisperspektiven nach Schmayl im Kerncurriculum Technik für die Realschule wiederzufinden sind.</a:t>
-            </a:r>
-            <a:endParaRPr lang="en-US" sz="2600" dirty="0"/>
-          </a:p>
-        </p:txBody>
-      </p:sp>
-      <p:sp>
-        <p:nvSpPr>
-          <p:cNvPr id="25" name="Slide Number Placeholder 0"/>
-          <p:cNvSpPr>
-            <a:spLocks noGrp="1"/>
-          </p:cNvSpPr>
-          <p:nvPr>
-            <p:ph type="sldNum" sz="quarter" idx="4294967295"/>
-          </p:nvPr>
-        </p:nvSpPr>
-        <p:spPr>
-          <a:xfrm>
-            <a:off x="11247120" y="6473952"/>
-            <a:ext cx="548640" cy="274320"/>
-          </a:xfrm>
-          <a:prstGeom prst="rect">
-            <a:avLst/>
-          </a:prstGeom>
-          <a:extLst>
-            <a:ext uri="{C572A759-6A51-4108-AA02-DFA0A04FC94B}">
-              <ma14:wrappingTextBoxFlag xmlns:ma14="http://schemas.microsoft.com/office/mac/drawingml/2011/main" val="0"/>
-            </a:ext>
-          </a:extLst>
-        </p:spPr>
-        <p:txBody>
-          <a:bodyPr/>
-          <a:lstStyle>
-            <a:lvl1pPr>
-              <a:defRPr sz="1000">
-                <a:solidFill>
-                  <a:srgbClr val="56687A"/>
-                </a:solidFill>
-              </a:defRPr>
-            </a:lvl1pPr>
-          </a:lstStyle>
-          <a:p>
-            <a:pPr algn="r"/>
-            <a:fld id="{F7021451-1387-4CA6-816F-3879F97B5CBC}" type="slidenum">
-              <a:rPr b="0" lang="en-US"/>
-              <a:t>6</a:t>
-            </a:fld>
-            <a:endParaRPr lang="en-US"/>
-          </a:p>
-        </p:txBody>
-      </p:sp>
-    </p:spTree>
-  </p:cSld>
-  <p:clrMapOvr>
-    <a:masterClrMapping/>
-  </p:clrMapOvr>
-</p:sld>
-</file>
-
-<file path=ppt/slides/slide7.xml><?xml version="1.0" encoding="utf-8"?>
-<p:sld xmlns:a="http://schemas.openxmlformats.org/drawingml/2006/main" xmlns:r="http://schemas.openxmlformats.org/officeDocument/2006/relationships" xmlns:p="http://schemas.openxmlformats.org/presentationml/2006/main">
-  <p:cSld name="Slide 7">
-    <p:spTree>
-      <p:nvGrpSpPr>
-        <p:cNvPr id="1" name=""/>
-        <p:cNvGrpSpPr/>
-        <p:nvPr/>
-      </p:nvGrpSpPr>
-      <p:grpSpPr>
-        <a:xfrm>
-          <a:off x="0" y="0"/>
-          <a:ext cx="0" cy="0"/>
-          <a:chOff x="0" y="0"/>
-          <a:chExt cx="0" cy="0"/>
-        </a:xfrm>
-      </p:grpSpPr>
-      <p:sp>
-        <p:nvSpPr>
-          <p:cNvPr id="2" name="titel-148"/>
-          <p:cNvSpPr txBox="1"/>
-          <p:nvPr/>
-        </p:nvSpPr>
-        <p:spPr>
-          <a:xfrm>
-            <a:off x="548640" y="896112"/>
-            <a:ext cx="11094415" cy="640080"/>
-          </a:xfrm>
-          <a:prstGeom prst="rect">
-            <a:avLst/>
-          </a:prstGeom>
-          <a:noFill/>
-          <a:ln/>
-        </p:spPr>
-        <p:txBody>
-          <a:bodyPr wrap="square" lIns="0" tIns="0" rIns="0" bIns="0" rtlCol="0" anchor="ctr"/>
-          <a:lstStyle/>
-          <a:p>
-            <a:pPr indent="0" marL="0">
-              <a:buNone/>
-            </a:pPr>
-            <a:r>
-              <a:rPr lang="en-US" sz="2800" b="1" dirty="0">
-                <a:solidFill>
-                  <a:srgbClr val="14232F"/>
-                </a:solidFill>
-              </a:rPr>
-              <a:t>Inhaltsfelder im Kerncurriculum</a:t>
-            </a:r>
-            <a:endParaRPr lang="en-US" sz="2800" dirty="0"/>
-          </a:p>
-        </p:txBody>
-      </p:sp>
-      <p:sp>
-        <p:nvSpPr>
-          <p:cNvPr id="3" name="aufgabe-149"/>
-          <p:cNvSpPr txBox="1"/>
-          <p:nvPr/>
-        </p:nvSpPr>
-        <p:spPr>
-          <a:xfrm>
-            <a:off x="548640" y="2057400"/>
-            <a:ext cx="11094415" cy="2926080"/>
-          </a:xfrm>
-          <a:prstGeom prst="rect">
-            <a:avLst/>
-          </a:prstGeom>
-          <a:solidFill>
-            <a:srgbClr val="FFF3C9"/>
-          </a:solidFill>
-          <a:ln w="25400">
-            <a:solidFill>
-              <a:srgbClr val="F5B700"/>
-            </a:solidFill>
-          </a:ln>
-        </p:spPr>
-        <p:txBody>
-          <a:bodyPr wrap="square" lIns="101600" tIns="177800" rIns="177800" bIns="101600" rtlCol="0" anchor="ctr"/>
-          <a:lstStyle/>
-          <a:p>
-            <a:pPr indent="0" marL="0">
-              <a:buNone/>
-            </a:pPr>
-            <a:r>
-              <a:rPr lang="en-US" sz="2600" b="1" dirty="0">
-                <a:solidFill>
-                  <a:srgbClr val="035591"/>
-                </a:solidFill>
-              </a:rPr>
-              <a:t>Aufgabe 2.3</a:t>
-            </a:r>
-            <a:endParaRPr lang="en-US" sz="2600" dirty="0"/>
-          </a:p>
-          <a:p>
-            <a:pPr indent="0" marL="0">
-              <a:spcBef>
-                <a:spcPts val="400"/>
-              </a:spcBef>
-              <a:buNone/>
-            </a:pPr>
-            <a:r>
-              <a:rPr lang="en-US" sz="2600" dirty="0">
-                <a:solidFill>
-                  <a:srgbClr val="14232F"/>
-                </a:solidFill>
-              </a:rPr>
-              <a:t>Vergleiche, welche Inhaltsfelder des mehrperspektivischen Technikunterrichts im Kerncurriculum Technik für die Realschule vorkommen und welche nicht.</a:t>
-            </a:r>
-            <a:endParaRPr lang="en-US" sz="2600" dirty="0"/>
-          </a:p>
-          <a:p>
-            <a:pPr indent="0" marL="0">
-              <a:spcBef>
-                <a:spcPts val="400"/>
-              </a:spcBef>
-              <a:buNone/>
-            </a:pPr>
-            <a:r>
-              <a:rPr lang="en-US" sz="2000" dirty="0">
-                <a:solidFill>
-                  <a:srgbClr val="56687A"/>
-                </a:solidFill>
-              </a:rPr>
-              <a:t>Auf der nächsten Folie findest du eine Übersicht der Inhaltsfelder des mpTu.</a:t>
-            </a:r>
-            <a:endParaRPr lang="en-US" sz="2600" dirty="0"/>
-          </a:p>
-        </p:txBody>
-      </p:sp>
-      <p:sp>
-        <p:nvSpPr>
-          <p:cNvPr id="25" name="Slide Number Placeholder 0"/>
-          <p:cNvSpPr>
-            <a:spLocks noGrp="1"/>
-          </p:cNvSpPr>
-          <p:nvPr>
-            <p:ph type="sldNum" sz="quarter" idx="4294967295"/>
-          </p:nvPr>
-        </p:nvSpPr>
-        <p:spPr>
-          <a:xfrm>
-            <a:off x="11247120" y="6473952"/>
-            <a:ext cx="548640" cy="274320"/>
-          </a:xfrm>
-          <a:prstGeom prst="rect">
-            <a:avLst/>
-          </a:prstGeom>
-          <a:extLst>
-            <a:ext uri="{C572A759-6A51-4108-AA02-DFA0A04FC94B}">
-              <ma14:wrappingTextBoxFlag xmlns:ma14="http://schemas.microsoft.com/office/mac/drawingml/2011/main" val="0"/>
-            </a:ext>
-          </a:extLst>
-        </p:spPr>
-        <p:txBody>
-          <a:bodyPr/>
-          <a:lstStyle>
-            <a:lvl1pPr>
-              <a:defRPr sz="1000">
-                <a:solidFill>
-                  <a:srgbClr val="56687A"/>
-                </a:solidFill>
-              </a:defRPr>
-            </a:lvl1pPr>
-          </a:lstStyle>
-          <a:p>
-            <a:pPr algn="r"/>
-            <a:fld id="{F7021451-1387-4CA6-816F-3879F97B5CBC}" type="slidenum">
-              <a:rPr b="0" lang="en-US"/>
-              <a:t>7</a:t>
-            </a:fld>
-            <a:endParaRPr lang="en-US"/>
-          </a:p>
-        </p:txBody>
-      </p:sp>
-    </p:spTree>
-  </p:cSld>
-  <p:clrMapOvr>
-    <a:masterClrMapping/>
-  </p:clrMapOvr>
-</p:sld>
-</file>
-
-<file path=ppt/slides/slide8.xml><?xml version="1.0" encoding="utf-8"?>
-<p:sld xmlns:a="http://schemas.openxmlformats.org/drawingml/2006/main" xmlns:r="http://schemas.openxmlformats.org/officeDocument/2006/relationships" xmlns:p="http://schemas.openxmlformats.org/presentationml/2006/main">
-  <p:cSld name="Slide 8">
-    <p:spTree>
-      <p:nvGrpSpPr>
-        <p:cNvPr id="1" name=""/>
-        <p:cNvGrpSpPr/>
-        <p:nvPr/>
-      </p:nvGrpSpPr>
-      <p:grpSpPr>
-        <a:xfrm>
-          <a:off x="0" y="0"/>
-          <a:ext cx="0" cy="0"/>
-          <a:chOff x="0" y="0"/>
-          <a:chExt cx="0" cy="0"/>
-        </a:xfrm>
-      </p:grpSpPr>
-      <p:sp>
-        <p:nvSpPr>
-          <p:cNvPr id="2" name="titel-150"/>
-          <p:cNvSpPr txBox="1"/>
-          <p:nvPr/>
-        </p:nvSpPr>
-        <p:spPr>
-          <a:xfrm>
-            <a:off x="548640" y="896112"/>
-            <a:ext cx="11094415" cy="640080"/>
-          </a:xfrm>
-          <a:prstGeom prst="rect">
-            <a:avLst/>
-          </a:prstGeom>
-          <a:noFill/>
-          <a:ln/>
-        </p:spPr>
-        <p:txBody>
-          <a:bodyPr wrap="square" lIns="0" tIns="0" rIns="0" bIns="0" rtlCol="0" anchor="ctr"/>
-          <a:lstStyle/>
-          <a:p>
-            <a:pPr indent="0" marL="0">
-              <a:buNone/>
-            </a:pPr>
-            <a:r>
-              <a:rPr lang="en-US" sz="2800" b="1" dirty="0">
-                <a:solidFill>
-                  <a:srgbClr val="14232F"/>
-                </a:solidFill>
-              </a:rPr>
               <a:t>Mehrperspektivische Technikdidaktik: Inhaltsfelder</a:t>
             </a:r>
             <a:endParaRPr lang="en-US" sz="2800" dirty="0"/>
@@ -4242,7 +3677,7 @@
       </p:sp>
       <p:graphicFrame>
         <p:nvGraphicFramePr>
-          <p:cNvPr id="9" name="table-151"/>
+          <p:cNvPr id="14" name="table-214"/>
           <p:cNvGraphicFramePr>
             <a:graphicFrameLocks noGrp="1"/>
           </p:cNvGraphicFramePr>
@@ -4964,7 +4399,7 @@
       </p:graphicFrame>
       <p:sp>
         <p:nvSpPr>
-          <p:cNvPr id="4" name="box-152"/>
+          <p:cNvPr id="5" name="box-215"/>
           <p:cNvSpPr txBox="1"/>
           <p:nvPr/>
         </p:nvSpPr>
@@ -5002,7 +4437,7 @@
       </p:sp>
       <p:sp>
         <p:nvSpPr>
-          <p:cNvPr id="5" name="text-153"/>
+          <p:cNvPr id="6" name="text-216"/>
           <p:cNvSpPr txBox="1"/>
           <p:nvPr/>
         </p:nvSpPr>
@@ -5075,7 +4510,7 @@
             <a:pPr algn="r"/>
             <a:fld id="{F7021451-1387-4CA6-816F-3879F97B5CBC}" type="slidenum">
               <a:rPr b="0" lang="en-US"/>
-              <a:t>8</a:t>
+              <a:t>13</a:t>
             </a:fld>
             <a:endParaRPr lang="en-US"/>
           </a:p>
@@ -5089,9 +4524,9 @@
 </p:sld>
 </file>
 
-<file path=ppt/slides/slide9.xml><?xml version="1.0" encoding="utf-8"?>
+<file path=ppt/slides/slide14.xml><?xml version="1.0" encoding="utf-8"?>
 <p:sld xmlns:a="http://schemas.openxmlformats.org/drawingml/2006/main" xmlns:r="http://schemas.openxmlformats.org/officeDocument/2006/relationships" xmlns:p="http://schemas.openxmlformats.org/presentationml/2006/main">
-  <p:cSld name="Slide 9">
+  <p:cSld name="Slide 14">
     <p:spTree>
       <p:nvGrpSpPr>
         <p:cNvPr id="1" name=""/>
@@ -5108,7 +4543,45 @@
       </p:grpSpPr>
       <p:sp>
         <p:nvSpPr>
-          <p:cNvPr id="2" name="titel-154"/>
+          <p:cNvPr id="2" name="box-217"/>
+          <p:cNvSpPr txBox="1"/>
+          <p:nvPr/>
+        </p:nvSpPr>
+        <p:spPr>
+          <a:xfrm>
+            <a:off x="8915400" y="246888"/>
+            <a:ext cx="2862072" cy="384048"/>
+          </a:xfrm>
+          <a:prstGeom prst="rect">
+            <a:avLst/>
+          </a:prstGeom>
+          <a:solidFill>
+            <a:srgbClr val="F5B700"/>
+          </a:solidFill>
+          <a:ln/>
+        </p:spPr>
+        <p:txBody>
+          <a:bodyPr wrap="square" lIns="25400" tIns="25400" rIns="25400" bIns="25400" rtlCol="0" anchor="ctr"/>
+          <a:lstStyle/>
+          <a:p>
+            <a:pPr algn="ctr" indent="0" marL="0">
+              <a:buNone/>
+            </a:pPr>
+            <a:r>
+              <a:rPr lang="en-US" sz="1400" b="1" dirty="0">
+                <a:solidFill>
+                  <a:srgbClr val="14232F"/>
+                </a:solidFill>
+              </a:rPr>
+              <a:t>Aufgaben für zu Hause</a:t>
+            </a:r>
+            <a:endParaRPr lang="en-US" sz="1400" dirty="0"/>
+          </a:p>
+        </p:txBody>
+      </p:sp>
+      <p:sp>
+        <p:nvSpPr>
+          <p:cNvPr id="3" name="titel-218"/>
           <p:cNvSpPr txBox="1"/>
           <p:nvPr/>
         </p:nvSpPr>
@@ -5144,7 +4617,7 @@
       </p:sp>
       <p:sp>
         <p:nvSpPr>
-          <p:cNvPr id="3" name="tile-155"/>
+          <p:cNvPr id="4" name="tile-219"/>
           <p:cNvSpPr txBox="1"/>
           <p:nvPr/>
         </p:nvSpPr>
@@ -5203,7 +4676,7 @@
       </p:sp>
       <p:sp>
         <p:nvSpPr>
-          <p:cNvPr id="4" name="tile-156"/>
+          <p:cNvPr id="5" name="tile-220"/>
           <p:cNvSpPr txBox="1"/>
           <p:nvPr/>
         </p:nvSpPr>
@@ -5262,7 +4735,7 @@
       </p:sp>
       <p:sp>
         <p:nvSpPr>
-          <p:cNvPr id="5" name="aufgabe-157"/>
+          <p:cNvPr id="6" name="aufgabe-221"/>
           <p:cNvSpPr txBox="1"/>
           <p:nvPr/>
         </p:nvSpPr>
@@ -5321,7 +4794,7 @@
       </p:sp>
       <p:sp>
         <p:nvSpPr>
-          <p:cNvPr id="6" name="text-158"/>
+          <p:cNvPr id="7" name="text-222"/>
           <p:cNvSpPr txBox="1"/>
           <p:nvPr/>
         </p:nvSpPr>
@@ -5394,9 +4867,2799 @@
             <a:pPr algn="r"/>
             <a:fld id="{F7021451-1387-4CA6-816F-3879F97B5CBC}" type="slidenum">
               <a:rPr b="0" lang="en-US"/>
-              <a:t>9</a:t>
+              <a:t>14</a:t>
             </a:fld>
             <a:endParaRPr lang="en-US"/>
+          </a:p>
+        </p:txBody>
+      </p:sp>
+    </p:spTree>
+  </p:cSld>
+  <p:clrMapOvr>
+    <a:masterClrMapping/>
+  </p:clrMapOvr>
+</p:sld>
+</file>
+
+<file path=ppt/slides/slide15.xml><?xml version="1.0" encoding="utf-8"?>
+<p:sld xmlns:a="http://schemas.openxmlformats.org/drawingml/2006/main" xmlns:r="http://schemas.openxmlformats.org/officeDocument/2006/relationships" xmlns:p="http://schemas.openxmlformats.org/presentationml/2006/main">
+  <p:cSld name="Slide 15">
+    <p:spTree>
+      <p:nvGrpSpPr>
+        <p:cNvPr id="1" name=""/>
+        <p:cNvGrpSpPr/>
+        <p:nvPr/>
+      </p:nvGrpSpPr>
+      <p:grpSpPr>
+        <a:xfrm>
+          <a:off x="0" y="0"/>
+          <a:ext cx="0" cy="0"/>
+          <a:chOff x="0" y="0"/>
+          <a:chExt cx="0" cy="0"/>
+        </a:xfrm>
+      </p:grpSpPr>
+      <p:sp>
+        <p:nvSpPr>
+          <p:cNvPr id="2" name="box-223"/>
+          <p:cNvSpPr txBox="1"/>
+          <p:nvPr/>
+        </p:nvSpPr>
+        <p:spPr>
+          <a:xfrm>
+            <a:off x="8915400" y="246888"/>
+            <a:ext cx="2862072" cy="384048"/>
+          </a:xfrm>
+          <a:prstGeom prst="rect">
+            <a:avLst/>
+          </a:prstGeom>
+          <a:solidFill>
+            <a:srgbClr val="F5B700"/>
+          </a:solidFill>
+          <a:ln/>
+        </p:spPr>
+        <p:txBody>
+          <a:bodyPr wrap="square" lIns="25400" tIns="25400" rIns="25400" bIns="25400" rtlCol="0" anchor="ctr"/>
+          <a:lstStyle/>
+          <a:p>
+            <a:pPr algn="ctr" indent="0" marL="0">
+              <a:buNone/>
+            </a:pPr>
+            <a:r>
+              <a:rPr lang="en-US" sz="1400" b="1" dirty="0">
+                <a:solidFill>
+                  <a:srgbClr val="14232F"/>
+                </a:solidFill>
+              </a:rPr>
+              <a:t>Aufgaben für zu Hause</a:t>
+            </a:r>
+            <a:endParaRPr lang="en-US" sz="1400" dirty="0"/>
+          </a:p>
+        </p:txBody>
+      </p:sp>
+      <p:sp>
+        <p:nvSpPr>
+          <p:cNvPr id="3" name="titel-224"/>
+          <p:cNvSpPr txBox="1"/>
+          <p:nvPr/>
+        </p:nvSpPr>
+        <p:spPr>
+          <a:xfrm>
+            <a:off x="548640" y="896112"/>
+            <a:ext cx="11094415" cy="640080"/>
+          </a:xfrm>
+          <a:prstGeom prst="rect">
+            <a:avLst/>
+          </a:prstGeom>
+          <a:noFill/>
+          <a:ln/>
+        </p:spPr>
+        <p:txBody>
+          <a:bodyPr wrap="square" lIns="0" tIns="0" rIns="0" bIns="0" rtlCol="0" anchor="ctr"/>
+          <a:lstStyle/>
+          <a:p>
+            <a:pPr indent="0" marL="0">
+              <a:buNone/>
+            </a:pPr>
+            <a:r>
+              <a:rPr lang="en-US" sz="2800" b="1" dirty="0">
+                <a:solidFill>
+                  <a:srgbClr val="14232F"/>
+                </a:solidFill>
+              </a:rPr>
+              <a:t>Bis Termin 3: Aufgabenpaket 2</a:t>
+            </a:r>
+            <a:endParaRPr lang="en-US" sz="2800" dirty="0"/>
+          </a:p>
+        </p:txBody>
+      </p:sp>
+      <p:sp>
+        <p:nvSpPr>
+          <p:cNvPr id="4" name="tile-225"/>
+          <p:cNvSpPr txBox="1"/>
+          <p:nvPr/>
+        </p:nvSpPr>
+        <p:spPr>
+          <a:xfrm>
+            <a:off x="548640" y="1600200"/>
+            <a:ext cx="5440680" cy="1920240"/>
+          </a:xfrm>
+          <a:prstGeom prst="rect">
+            <a:avLst/>
+          </a:prstGeom>
+          <a:solidFill>
+            <a:srgbClr val="EEF3F7"/>
+          </a:solidFill>
+          <a:ln w="6350">
+            <a:solidFill>
+              <a:srgbClr val="EEF3F7"/>
+            </a:solidFill>
+          </a:ln>
+        </p:spPr>
+        <p:txBody>
+          <a:bodyPr wrap="square" lIns="127000" tIns="127000" rIns="127000" bIns="127000" rtlCol="0" anchor="t"/>
+          <a:lstStyle/>
+          <a:p>
+            <a:pPr indent="0" marL="0">
+              <a:buNone/>
+            </a:pPr>
+            <a:r>
+              <a:rPr lang="en-US" sz="2200" b="1" dirty="0">
+                <a:solidFill>
+                  <a:srgbClr val="035591"/>
+                </a:solidFill>
+              </a:rPr>
+              <a:t>mpTu · 2.1–2.3</a:t>
+            </a:r>
+            <a:endParaRPr lang="en-US" sz="2200" dirty="0"/>
+          </a:p>
+          <a:p>
+            <a:pPr indent="0" marL="0">
+              <a:spcBef>
+                <a:spcPts val="400"/>
+              </a:spcBef>
+              <a:buNone/>
+            </a:pPr>
+            <a:r>
+              <a:rPr lang="en-US" sz="1900" dirty="0">
+                <a:solidFill>
+                  <a:srgbClr val="14232F"/>
+                </a:solidFill>
+              </a:rPr>
+              <a:t>Erkenntnis- und Zielperspektive, Perspektiven im KC, Inhaltsfelder im KC</a:t>
+            </a:r>
+            <a:endParaRPr lang="en-US" sz="2200" dirty="0"/>
+          </a:p>
+        </p:txBody>
+      </p:sp>
+      <p:sp>
+        <p:nvSpPr>
+          <p:cNvPr id="5" name="tile-226"/>
+          <p:cNvSpPr txBox="1"/>
+          <p:nvPr/>
+        </p:nvSpPr>
+        <p:spPr>
+          <a:xfrm>
+            <a:off x="6199632" y="1600200"/>
+            <a:ext cx="5440680" cy="1920240"/>
+          </a:xfrm>
+          <a:prstGeom prst="rect">
+            <a:avLst/>
+          </a:prstGeom>
+          <a:solidFill>
+            <a:srgbClr val="FFF3C9"/>
+          </a:solidFill>
+          <a:ln w="6350">
+            <a:solidFill>
+              <a:srgbClr val="FFF3C9"/>
+            </a:solidFill>
+          </a:ln>
+        </p:spPr>
+        <p:txBody>
+          <a:bodyPr wrap="square" lIns="127000" tIns="127000" rIns="127000" bIns="127000" rtlCol="0" anchor="t"/>
+          <a:lstStyle/>
+          <a:p>
+            <a:pPr indent="0" marL="0">
+              <a:buNone/>
+            </a:pPr>
+            <a:r>
+              <a:rPr lang="en-US" sz="2200" b="1" dirty="0">
+                <a:solidFill>
+                  <a:srgbClr val="035591"/>
+                </a:solidFill>
+              </a:rPr>
+              <a:t>Referat · 2.4</a:t>
+            </a:r>
+            <a:endParaRPr lang="en-US" sz="2200" dirty="0"/>
+          </a:p>
+          <a:p>
+            <a:pPr indent="0" marL="0">
+              <a:spcBef>
+                <a:spcPts val="400"/>
+              </a:spcBef>
+              <a:buNone/>
+            </a:pPr>
+            <a:r>
+              <a:rPr lang="en-US" sz="1900" dirty="0">
+                <a:solidFill>
+                  <a:srgbClr val="14232F"/>
+                </a:solidFill>
+              </a:rPr>
+              <a:t>Thema wählen, Weg A oder B</a:t>
+            </a:r>
+            <a:endParaRPr lang="en-US" sz="2200" dirty="0"/>
+          </a:p>
+        </p:txBody>
+      </p:sp>
+      <p:sp>
+        <p:nvSpPr>
+          <p:cNvPr id="6" name="link-227"/>
+          <p:cNvSpPr txBox="1"/>
+          <p:nvPr/>
+        </p:nvSpPr>
+        <p:spPr>
+          <a:xfrm>
+            <a:off x="548640" y="3931920"/>
+            <a:ext cx="7132320" cy="640080"/>
+          </a:xfrm>
+          <a:prstGeom prst="rect">
+            <a:avLst/>
+          </a:prstGeom>
+          <a:noFill/>
+          <a:ln/>
+        </p:spPr>
+        <p:txBody>
+          <a:bodyPr wrap="square" lIns="38100" tIns="38100" rIns="38100" bIns="38100" rtlCol="0" anchor="ctr"/>
+          <a:lstStyle/>
+          <a:p>
+            <a:pPr indent="0" marL="0">
+              <a:buNone/>
+            </a:pPr>
+            <a:r>
+              <a:rPr lang="en-US" sz="3000" dirty="0">
+                <a:solidFill>
+                  <a:srgbClr val="14232F"/>
+                </a:solidFill>
+              </a:rPr>
+              <a:t>Kursseite: </a:t>
+            </a:r>
+            <a:pPr indent="0" marL="0">
+              <a:buNone/>
+            </a:pPr>
+            <a:r>
+              <a:rPr lang="en-US" sz="3000" b="1" u="sng" dirty="0">
+                <a:solidFill>
+                  <a:srgbClr val="035591"/>
+                </a:solidFill>
+                <a:hlinkClick r:id="rId1" invalidUrl="" action="" tgtFrame="" tooltip="" history="1" highlightClick="0" endSnd="0">
+                  <a:extLst>
+                    <a:ext uri="{A12FA001-AC4F-418D-AE19-62706E023703}">
+                      <ahyp:hlinkClr xmlns:ahyp="http://schemas.microsoft.com/office/drawing/2018/hyperlinkcolor" val="tx"/>
+                    </a:ext>
+                  </a:extLst>
+                </a:hlinkClick>
+              </a:rPr>
+              <a:t>https://t1p.de/tdk-26</a:t>
+            </a:r>
+            <a:endParaRPr lang="en-US" sz="3000" dirty="0"/>
+          </a:p>
+        </p:txBody>
+      </p:sp>
+      <p:sp>
+        <p:nvSpPr>
+          <p:cNvPr id="7" name="text-228"/>
+          <p:cNvSpPr txBox="1"/>
+          <p:nvPr/>
+        </p:nvSpPr>
+        <p:spPr>
+          <a:xfrm>
+            <a:off x="548640" y="4663440"/>
+            <a:ext cx="7132320" cy="548640"/>
+          </a:xfrm>
+          <a:prstGeom prst="rect">
+            <a:avLst/>
+          </a:prstGeom>
+          <a:noFill/>
+          <a:ln/>
+        </p:spPr>
+        <p:txBody>
+          <a:bodyPr wrap="square" lIns="38100" tIns="38100" rIns="38100" bIns="38100" rtlCol="0" anchor="t"/>
+          <a:lstStyle/>
+          <a:p>
+            <a:pPr algn="l" indent="0" marL="0">
+              <a:buNone/>
+            </a:pPr>
+            <a:r>
+              <a:rPr lang="en-US" sz="2000" dirty="0">
+                <a:solidFill>
+                  <a:srgbClr val="14232F"/>
+                </a:solidFill>
+              </a:rPr>
+              <a:t>Vor Termin 3: Export „Nur Aufgabenpaket 2“ schicken</a:t>
+            </a:r>
+            <a:endParaRPr lang="en-US" sz="2000" dirty="0"/>
+          </a:p>
+        </p:txBody>
+      </p:sp>
+      <p:pic>
+        <p:nvPicPr>
+          <p:cNvPr id="8" name="qr-229" descr="QR-Code zur Kursseite: https://t1p.de/tdk-26">    </p:cNvPr>
+          <p:cNvPicPr>
+            <a:picLocks noChangeAspect="1"/>
+          </p:cNvPicPr>
+          <p:nvPr/>
+        </p:nvPicPr>
+        <p:blipFill>
+          <a:blip r:embed="rId2"/>
+          <a:stretch>
+            <a:fillRect/>
+          </a:stretch>
+        </p:blipFill>
+        <p:spPr>
+          <a:xfrm>
+            <a:off x="9098280" y="3703320"/>
+            <a:ext cx="2103120" cy="2103120"/>
+          </a:xfrm>
+          <a:prstGeom prst="rect">
+            <a:avLst/>
+          </a:prstGeom>
+        </p:spPr>
+      </p:pic>
+      <p:sp>
+        <p:nvSpPr>
+          <p:cNvPr id="25" name="Slide Number Placeholder 0"/>
+          <p:cNvSpPr>
+            <a:spLocks noGrp="1"/>
+          </p:cNvSpPr>
+          <p:nvPr>
+            <p:ph type="sldNum" sz="quarter" idx="4294967295"/>
+          </p:nvPr>
+        </p:nvSpPr>
+        <p:spPr>
+          <a:xfrm>
+            <a:off x="11247120" y="6473952"/>
+            <a:ext cx="548640" cy="274320"/>
+          </a:xfrm>
+          <a:prstGeom prst="rect">
+            <a:avLst/>
+          </a:prstGeom>
+          <a:extLst>
+            <a:ext uri="{C572A759-6A51-4108-AA02-DFA0A04FC94B}">
+              <ma14:wrappingTextBoxFlag xmlns:ma14="http://schemas.microsoft.com/office/mac/drawingml/2011/main" val="0"/>
+            </a:ext>
+          </a:extLst>
+        </p:spPr>
+        <p:txBody>
+          <a:bodyPr/>
+          <a:lstStyle>
+            <a:lvl1pPr>
+              <a:defRPr sz="1000">
+                <a:solidFill>
+                  <a:srgbClr val="56687A"/>
+                </a:solidFill>
+              </a:defRPr>
+            </a:lvl1pPr>
+          </a:lstStyle>
+          <a:p>
+            <a:pPr algn="r"/>
+            <a:fld id="{F7021451-1387-4CA6-816F-3879F97B5CBC}" type="slidenum">
+              <a:rPr b="0" lang="en-US"/>
+              <a:t>15</a:t>
+            </a:fld>
+            <a:endParaRPr lang="en-US"/>
+          </a:p>
+        </p:txBody>
+      </p:sp>
+    </p:spTree>
+  </p:cSld>
+  <p:clrMapOvr>
+    <a:masterClrMapping/>
+  </p:clrMapOvr>
+</p:sld>
+</file>
+
+<file path=ppt/slides/slide2.xml><?xml version="1.0" encoding="utf-8"?>
+<p:sld xmlns:a="http://schemas.openxmlformats.org/drawingml/2006/main" xmlns:r="http://schemas.openxmlformats.org/officeDocument/2006/relationships" xmlns:p="http://schemas.openxmlformats.org/presentationml/2006/main">
+  <p:cSld name="Slide 2">
+    <p:spTree>
+      <p:nvGrpSpPr>
+        <p:cNvPr id="1" name=""/>
+        <p:cNvGrpSpPr/>
+        <p:nvPr/>
+      </p:nvGrpSpPr>
+      <p:grpSpPr>
+        <a:xfrm>
+          <a:off x="0" y="0"/>
+          <a:ext cx="0" cy="0"/>
+          <a:chOff x="0" y="0"/>
+          <a:chExt cx="0" cy="0"/>
+        </a:xfrm>
+      </p:grpSpPr>
+      <p:sp>
+        <p:nvSpPr>
+          <p:cNvPr id="2" name="titel-159"/>
+          <p:cNvSpPr txBox="1"/>
+          <p:nvPr/>
+        </p:nvSpPr>
+        <p:spPr>
+          <a:xfrm>
+            <a:off x="548640" y="896112"/>
+            <a:ext cx="11094415" cy="640080"/>
+          </a:xfrm>
+          <a:prstGeom prst="rect">
+            <a:avLst/>
+          </a:prstGeom>
+          <a:noFill/>
+          <a:ln/>
+        </p:spPr>
+        <p:txBody>
+          <a:bodyPr wrap="square" lIns="0" tIns="0" rIns="0" bIns="0" rtlCol="0" anchor="ctr"/>
+          <a:lstStyle/>
+          <a:p>
+            <a:pPr indent="0" marL="0">
+              <a:buNone/>
+            </a:pPr>
+            <a:r>
+              <a:rPr lang="en-US" sz="2800" b="1" dirty="0">
+                <a:solidFill>
+                  <a:srgbClr val="14232F"/>
+                </a:solidFill>
+              </a:rPr>
+              <a:t>Ablauf heute</a:t>
+            </a:r>
+            <a:endParaRPr lang="en-US" sz="2800" dirty="0"/>
+          </a:p>
+        </p:txBody>
+      </p:sp>
+      <p:sp>
+        <p:nvSpPr>
+          <p:cNvPr id="3" name="phase-160"/>
+          <p:cNvSpPr txBox="1"/>
+          <p:nvPr/>
+        </p:nvSpPr>
+        <p:spPr>
+          <a:xfrm>
+            <a:off x="548640" y="1783080"/>
+            <a:ext cx="3423818" cy="2651760"/>
+          </a:xfrm>
+          <a:prstGeom prst="rect">
+            <a:avLst/>
+          </a:prstGeom>
+          <a:solidFill>
+            <a:srgbClr val="E2F4E8"/>
+          </a:solidFill>
+          <a:ln w="31750">
+            <a:solidFill>
+              <a:srgbClr val="17803F"/>
+            </a:solidFill>
+          </a:ln>
+        </p:spPr>
+        <p:txBody>
+          <a:bodyPr wrap="square" lIns="152400" tIns="152400" rIns="152400" bIns="152400" rtlCol="0" anchor="t"/>
+          <a:lstStyle/>
+          <a:p>
+            <a:pPr indent="0" marL="0">
+              <a:buNone/>
+            </a:pPr>
+            <a:r>
+              <a:rPr lang="en-US" sz="2200" b="1" dirty="0">
+                <a:solidFill>
+                  <a:srgbClr val="17803F"/>
+                </a:solidFill>
+              </a:rPr>
+              <a:t>Besprechung</a:t>
+            </a:r>
+            <a:endParaRPr lang="en-US" sz="2200" dirty="0"/>
+          </a:p>
+          <a:p>
+            <a:pPr indent="0" marL="0">
+              <a:spcBef>
+                <a:spcPts val="600"/>
+              </a:spcBef>
+              <a:buNone/>
+            </a:pPr>
+            <a:r>
+              <a:rPr lang="en-US" sz="2000" dirty="0">
+                <a:solidFill>
+                  <a:srgbClr val="14232F"/>
+                </a:solidFill>
+              </a:rPr>
+              <a:t>Aufgabenpaket 1</a:t>
+            </a:r>
+            <a:endParaRPr lang="en-US" sz="2200" dirty="0"/>
+          </a:p>
+          <a:p>
+            <a:pPr indent="0" marL="0">
+              <a:spcBef>
+                <a:spcPts val="1000"/>
+              </a:spcBef>
+              <a:buNone/>
+            </a:pPr>
+            <a:r>
+              <a:rPr lang="en-US" sz="1800" b="1" dirty="0">
+                <a:solidFill>
+                  <a:srgbClr val="14232F"/>
+                </a:solidFill>
+              </a:rPr>
+              <a:t>Folien 3–5</a:t>
+            </a:r>
+            <a:endParaRPr lang="en-US" sz="2200" dirty="0"/>
+          </a:p>
+        </p:txBody>
+      </p:sp>
+      <p:sp>
+        <p:nvSpPr>
+          <p:cNvPr id="4" name="arrow-161"/>
+          <p:cNvSpPr/>
+          <p:nvPr/>
+        </p:nvSpPr>
+        <p:spPr>
+          <a:xfrm>
+            <a:off x="4027322" y="3108960"/>
+            <a:ext cx="301752" cy="914"/>
+          </a:xfrm>
+          <a:prstGeom prst="line">
+            <a:avLst/>
+          </a:prstGeom>
+          <a:noFill/>
+          <a:ln w="25400">
+            <a:solidFill>
+              <a:srgbClr val="56687A"/>
+            </a:solidFill>
+            <a:prstDash val="solid"/>
+            <a:tailEnd type="triangle"/>
+          </a:ln>
+        </p:spPr>
+      </p:sp>
+      <p:sp>
+        <p:nvSpPr>
+          <p:cNvPr id="5" name="phase-162"/>
+          <p:cNvSpPr txBox="1"/>
+          <p:nvPr/>
+        </p:nvSpPr>
+        <p:spPr>
+          <a:xfrm>
+            <a:off x="4383938" y="1783080"/>
+            <a:ext cx="3423818" cy="2651760"/>
+          </a:xfrm>
+          <a:prstGeom prst="rect">
+            <a:avLst/>
+          </a:prstGeom>
+          <a:solidFill>
+            <a:srgbClr val="DDE9F1"/>
+          </a:solidFill>
+          <a:ln w="31750">
+            <a:solidFill>
+              <a:srgbClr val="035591"/>
+            </a:solidFill>
+          </a:ln>
+        </p:spPr>
+        <p:txBody>
+          <a:bodyPr wrap="square" lIns="152400" tIns="152400" rIns="152400" bIns="152400" rtlCol="0" anchor="t"/>
+          <a:lstStyle/>
+          <a:p>
+            <a:pPr indent="0" marL="0">
+              <a:buNone/>
+            </a:pPr>
+            <a:r>
+              <a:rPr lang="en-US" sz="2200" b="1" dirty="0">
+                <a:solidFill>
+                  <a:srgbClr val="035591"/>
+                </a:solidFill>
+              </a:rPr>
+              <a:t>Impuls</a:t>
+            </a:r>
+            <a:endParaRPr lang="en-US" sz="2200" dirty="0"/>
+          </a:p>
+          <a:p>
+            <a:pPr indent="0" marL="0">
+              <a:spcBef>
+                <a:spcPts val="600"/>
+              </a:spcBef>
+              <a:buNone/>
+            </a:pPr>
+            <a:r>
+              <a:rPr lang="en-US" sz="2000" dirty="0">
+                <a:solidFill>
+                  <a:srgbClr val="14232F"/>
+                </a:solidFill>
+              </a:rPr>
+              <a:t>Der mehrperspektivische Technikunterricht</a:t>
+            </a:r>
+            <a:endParaRPr lang="en-US" sz="2200" dirty="0"/>
+          </a:p>
+          <a:p>
+            <a:pPr indent="0" marL="0">
+              <a:spcBef>
+                <a:spcPts val="1000"/>
+              </a:spcBef>
+              <a:buNone/>
+            </a:pPr>
+            <a:r>
+              <a:rPr lang="en-US" sz="1800" b="1" dirty="0">
+                <a:solidFill>
+                  <a:srgbClr val="14232F"/>
+                </a:solidFill>
+              </a:rPr>
+              <a:t>Folien 6–8</a:t>
+            </a:r>
+            <a:endParaRPr lang="en-US" sz="2200" dirty="0"/>
+          </a:p>
+        </p:txBody>
+      </p:sp>
+      <p:sp>
+        <p:nvSpPr>
+          <p:cNvPr id="6" name="arrow-163"/>
+          <p:cNvSpPr/>
+          <p:nvPr/>
+        </p:nvSpPr>
+        <p:spPr>
+          <a:xfrm>
+            <a:off x="7862621" y="3108960"/>
+            <a:ext cx="301752" cy="914"/>
+          </a:xfrm>
+          <a:prstGeom prst="line">
+            <a:avLst/>
+          </a:prstGeom>
+          <a:noFill/>
+          <a:ln w="25400">
+            <a:solidFill>
+              <a:srgbClr val="56687A"/>
+            </a:solidFill>
+            <a:prstDash val="solid"/>
+            <a:tailEnd type="triangle"/>
+          </a:ln>
+        </p:spPr>
+      </p:sp>
+      <p:sp>
+        <p:nvSpPr>
+          <p:cNvPr id="7" name="phase-164"/>
+          <p:cNvSpPr txBox="1"/>
+          <p:nvPr/>
+        </p:nvSpPr>
+        <p:spPr>
+          <a:xfrm>
+            <a:off x="8219237" y="1783080"/>
+            <a:ext cx="3423818" cy="2651760"/>
+          </a:xfrm>
+          <a:prstGeom prst="rect">
+            <a:avLst/>
+          </a:prstGeom>
+          <a:solidFill>
+            <a:srgbClr val="FFF3C9"/>
+          </a:solidFill>
+          <a:ln w="31750">
+            <a:solidFill>
+              <a:srgbClr val="F5B700"/>
+            </a:solidFill>
+          </a:ln>
+        </p:spPr>
+        <p:txBody>
+          <a:bodyPr wrap="square" lIns="152400" tIns="152400" rIns="152400" bIns="152400" rtlCol="0" anchor="t"/>
+          <a:lstStyle/>
+          <a:p>
+            <a:pPr indent="0" marL="0">
+              <a:buNone/>
+            </a:pPr>
+            <a:r>
+              <a:rPr lang="en-US" sz="2200" b="1" dirty="0">
+                <a:solidFill>
+                  <a:srgbClr val="B7791F"/>
+                </a:solidFill>
+              </a:rPr>
+              <a:t>Aufgaben für zu Hause</a:t>
+            </a:r>
+            <a:endParaRPr lang="en-US" sz="2200" dirty="0"/>
+          </a:p>
+          <a:p>
+            <a:pPr indent="0" marL="0">
+              <a:spcBef>
+                <a:spcPts val="600"/>
+              </a:spcBef>
+              <a:buNone/>
+            </a:pPr>
+            <a:r>
+              <a:rPr lang="en-US" sz="2000" dirty="0">
+                <a:solidFill>
+                  <a:srgbClr val="14232F"/>
+                </a:solidFill>
+              </a:rPr>
+              <a:t>Aufgabenpaket 2: mpTu und dein Thema</a:t>
+            </a:r>
+            <a:endParaRPr lang="en-US" sz="2200" dirty="0"/>
+          </a:p>
+          <a:p>
+            <a:pPr indent="0" marL="0">
+              <a:spcBef>
+                <a:spcPts val="1000"/>
+              </a:spcBef>
+              <a:buNone/>
+            </a:pPr>
+            <a:r>
+              <a:rPr lang="en-US" sz="1800" b="1" dirty="0">
+                <a:solidFill>
+                  <a:srgbClr val="14232F"/>
+                </a:solidFill>
+              </a:rPr>
+              <a:t>Folien 9–15</a:t>
+            </a:r>
+            <a:endParaRPr lang="en-US" sz="2200" dirty="0"/>
+          </a:p>
+        </p:txBody>
+      </p:sp>
+      <p:sp>
+        <p:nvSpPr>
+          <p:cNvPr id="8" name="text-165"/>
+          <p:cNvSpPr txBox="1"/>
+          <p:nvPr/>
+        </p:nvSpPr>
+        <p:spPr>
+          <a:xfrm>
+            <a:off x="548640" y="4754880"/>
+            <a:ext cx="11094415" cy="914400"/>
+          </a:xfrm>
+          <a:prstGeom prst="rect">
+            <a:avLst/>
+          </a:prstGeom>
+          <a:noFill/>
+          <a:ln/>
+        </p:spPr>
+        <p:txBody>
+          <a:bodyPr wrap="square" lIns="38100" tIns="38100" rIns="38100" bIns="38100" rtlCol="0" anchor="t"/>
+          <a:lstStyle/>
+          <a:p>
+            <a:pPr algn="l" indent="0" marL="0">
+              <a:buNone/>
+            </a:pPr>
+            <a:r>
+              <a:rPr lang="en-US" sz="2000" dirty="0">
+                <a:solidFill>
+                  <a:srgbClr val="56687A"/>
+                </a:solidFill>
+              </a:rPr>
+              <a:t>Ab „Aufgaben für zu Hause“: die Aufgaben bis zum nächsten Termin – bearbeiten auf der Lernplattform unter „Zu Hause“.</a:t>
+            </a:r>
+            <a:endParaRPr lang="en-US" sz="2000" dirty="0"/>
+          </a:p>
+        </p:txBody>
+      </p:sp>
+      <p:sp>
+        <p:nvSpPr>
+          <p:cNvPr id="25" name="Slide Number Placeholder 0"/>
+          <p:cNvSpPr>
+            <a:spLocks noGrp="1"/>
+          </p:cNvSpPr>
+          <p:nvPr>
+            <p:ph type="sldNum" sz="quarter" idx="4294967295"/>
+          </p:nvPr>
+        </p:nvSpPr>
+        <p:spPr>
+          <a:xfrm>
+            <a:off x="11247120" y="6473952"/>
+            <a:ext cx="548640" cy="274320"/>
+          </a:xfrm>
+          <a:prstGeom prst="rect">
+            <a:avLst/>
+          </a:prstGeom>
+          <a:extLst>
+            <a:ext uri="{C572A759-6A51-4108-AA02-DFA0A04FC94B}">
+              <ma14:wrappingTextBoxFlag xmlns:ma14="http://schemas.microsoft.com/office/mac/drawingml/2011/main" val="0"/>
+            </a:ext>
+          </a:extLst>
+        </p:spPr>
+        <p:txBody>
+          <a:bodyPr/>
+          <a:lstStyle>
+            <a:lvl1pPr>
+              <a:defRPr sz="1000">
+                <a:solidFill>
+                  <a:srgbClr val="56687A"/>
+                </a:solidFill>
+              </a:defRPr>
+            </a:lvl1pPr>
+          </a:lstStyle>
+          <a:p>
+            <a:pPr algn="r"/>
+            <a:fld id="{F7021451-1387-4CA6-816F-3879F97B5CBC}" type="slidenum">
+              <a:rPr b="0" lang="en-US"/>
+              <a:t>2</a:t>
+            </a:fld>
+            <a:endParaRPr lang="en-US"/>
+          </a:p>
+        </p:txBody>
+      </p:sp>
+    </p:spTree>
+  </p:cSld>
+  <p:clrMapOvr>
+    <a:masterClrMapping/>
+  </p:clrMapOvr>
+</p:sld>
+</file>
+
+<file path=ppt/slides/slide3.xml><?xml version="1.0" encoding="utf-8"?>
+<p:sld xmlns:a="http://schemas.openxmlformats.org/drawingml/2006/main" xmlns:r="http://schemas.openxmlformats.org/officeDocument/2006/relationships" xmlns:p="http://schemas.openxmlformats.org/presentationml/2006/main">
+  <p:cSld name="Slide 3">
+    <p:bg>
+      <p:bgPr>
+        <a:solidFill>
+          <a:srgbClr val="E2F4E8"/>
+        </a:solidFill>
+      </p:bgPr>
+    </p:bg>
+    <p:spTree>
+      <p:nvGrpSpPr>
+        <p:cNvPr id="1" name=""/>
+        <p:cNvGrpSpPr/>
+        <p:nvPr/>
+      </p:nvGrpSpPr>
+      <p:grpSpPr>
+        <a:xfrm>
+          <a:off x="0" y="0"/>
+          <a:ext cx="0" cy="0"/>
+          <a:chOff x="0" y="0"/>
+          <a:chExt cx="0" cy="0"/>
+        </a:xfrm>
+      </p:grpSpPr>
+      <p:sp>
+        <p:nvSpPr>
+          <p:cNvPr id="2" name="band-166"/>
+          <p:cNvSpPr/>
+          <p:nvPr/>
+        </p:nvSpPr>
+        <p:spPr>
+          <a:xfrm>
+            <a:off x="0" y="0"/>
+            <a:ext cx="320040" cy="6858000"/>
+          </a:xfrm>
+          <a:prstGeom prst="rect">
+            <a:avLst/>
+          </a:prstGeom>
+          <a:solidFill>
+            <a:srgbClr val="17803F"/>
+          </a:solidFill>
+          <a:ln/>
+        </p:spPr>
+      </p:sp>
+      <p:sp>
+        <p:nvSpPr>
+          <p:cNvPr id="3" name="box-167"/>
+          <p:cNvSpPr txBox="1"/>
+          <p:nvPr/>
+        </p:nvSpPr>
+        <p:spPr>
+          <a:xfrm>
+            <a:off x="822960" y="1463040"/>
+            <a:ext cx="5852160" cy="640080"/>
+          </a:xfrm>
+          <a:prstGeom prst="rect">
+            <a:avLst/>
+          </a:prstGeom>
+          <a:solidFill>
+            <a:srgbClr val="17803F"/>
+          </a:solidFill>
+          <a:ln/>
+        </p:spPr>
+        <p:txBody>
+          <a:bodyPr wrap="square" lIns="101600" tIns="101600" rIns="101600" bIns="101600" rtlCol="0" anchor="ctr"/>
+          <a:lstStyle/>
+          <a:p>
+            <a:pPr algn="ctr" indent="0" marL="0">
+              <a:buNone/>
+            </a:pPr>
+            <a:r>
+              <a:rPr lang="en-US" sz="2400" b="1" dirty="0">
+                <a:solidFill>
+                  <a:srgbClr val="FFFFFF"/>
+                </a:solidFill>
+              </a:rPr>
+              <a:t>BESPRECHUNG</a:t>
+            </a:r>
+            <a:endParaRPr lang="en-US" sz="2400" dirty="0"/>
+          </a:p>
+        </p:txBody>
+      </p:sp>
+      <p:sp>
+        <p:nvSpPr>
+          <p:cNvPr id="4" name="titel-168"/>
+          <p:cNvSpPr txBox="1"/>
+          <p:nvPr/>
+        </p:nvSpPr>
+        <p:spPr>
+          <a:xfrm>
+            <a:off x="822960" y="2377440"/>
+            <a:ext cx="10607040" cy="1828800"/>
+          </a:xfrm>
+          <a:prstGeom prst="rect">
+            <a:avLst/>
+          </a:prstGeom>
+          <a:noFill/>
+          <a:ln/>
+        </p:spPr>
+        <p:txBody>
+          <a:bodyPr wrap="square" lIns="0" tIns="0" rIns="0" bIns="0" rtlCol="0" anchor="t"/>
+          <a:lstStyle/>
+          <a:p>
+            <a:pPr indent="0" marL="0">
+              <a:buNone/>
+            </a:pPr>
+            <a:r>
+              <a:rPr lang="en-US" sz="4000" b="1" dirty="0">
+                <a:solidFill>
+                  <a:srgbClr val="14232F"/>
+                </a:solidFill>
+              </a:rPr>
+              <a:t>Besprechung: Aufgabenpaket 1</a:t>
+            </a:r>
+            <a:endParaRPr lang="en-US" sz="4000" dirty="0"/>
+          </a:p>
+        </p:txBody>
+      </p:sp>
+      <p:sp>
+        <p:nvSpPr>
+          <p:cNvPr id="5" name="text-169"/>
+          <p:cNvSpPr txBox="1"/>
+          <p:nvPr/>
+        </p:nvSpPr>
+        <p:spPr>
+          <a:xfrm>
+            <a:off x="822960" y="4480560"/>
+            <a:ext cx="10607040" cy="731520"/>
+          </a:xfrm>
+          <a:prstGeom prst="rect">
+            <a:avLst/>
+          </a:prstGeom>
+          <a:noFill/>
+          <a:ln/>
+        </p:spPr>
+        <p:txBody>
+          <a:bodyPr wrap="square" lIns="38100" tIns="38100" rIns="38100" bIns="38100" rtlCol="0" anchor="t"/>
+          <a:lstStyle/>
+          <a:p>
+            <a:pPr algn="l" indent="0" marL="0">
+              <a:buNone/>
+            </a:pPr>
+            <a:r>
+              <a:rPr lang="en-US" sz="2600" dirty="0">
+                <a:solidFill>
+                  <a:srgbClr val="56687A"/>
+                </a:solidFill>
+              </a:rPr>
+              <a:t>Im Termin</a:t>
+            </a:r>
+            <a:endParaRPr lang="en-US" sz="2600" dirty="0"/>
+          </a:p>
+        </p:txBody>
+      </p:sp>
+    </p:spTree>
+  </p:cSld>
+  <p:clrMapOvr>
+    <a:masterClrMapping/>
+  </p:clrMapOvr>
+</p:sld>
+</file>
+
+<file path=ppt/slides/slide4.xml><?xml version="1.0" encoding="utf-8"?>
+<p:sld xmlns:a="http://schemas.openxmlformats.org/drawingml/2006/main" xmlns:r="http://schemas.openxmlformats.org/officeDocument/2006/relationships" xmlns:p="http://schemas.openxmlformats.org/presentationml/2006/main">
+  <p:cSld name="Slide 4">
+    <p:spTree>
+      <p:nvGrpSpPr>
+        <p:cNvPr id="1" name=""/>
+        <p:cNvGrpSpPr/>
+        <p:nvPr/>
+      </p:nvGrpSpPr>
+      <p:grpSpPr>
+        <a:xfrm>
+          <a:off x="0" y="0"/>
+          <a:ext cx="0" cy="0"/>
+          <a:chOff x="0" y="0"/>
+          <a:chExt cx="0" cy="0"/>
+        </a:xfrm>
+      </p:grpSpPr>
+      <p:sp>
+        <p:nvSpPr>
+          <p:cNvPr id="2" name="box-170"/>
+          <p:cNvSpPr txBox="1"/>
+          <p:nvPr/>
+        </p:nvSpPr>
+        <p:spPr>
+          <a:xfrm>
+            <a:off x="8915400" y="246888"/>
+            <a:ext cx="2862072" cy="384048"/>
+          </a:xfrm>
+          <a:prstGeom prst="rect">
+            <a:avLst/>
+          </a:prstGeom>
+          <a:solidFill>
+            <a:srgbClr val="17803F"/>
+          </a:solidFill>
+          <a:ln/>
+        </p:spPr>
+        <p:txBody>
+          <a:bodyPr wrap="square" lIns="25400" tIns="25400" rIns="25400" bIns="25400" rtlCol="0" anchor="ctr"/>
+          <a:lstStyle/>
+          <a:p>
+            <a:pPr algn="ctr" indent="0" marL="0">
+              <a:buNone/>
+            </a:pPr>
+            <a:r>
+              <a:rPr lang="en-US" sz="1400" b="1" dirty="0">
+                <a:solidFill>
+                  <a:srgbClr val="FFFFFF"/>
+                </a:solidFill>
+              </a:rPr>
+              <a:t>Besprechung</a:t>
+            </a:r>
+            <a:endParaRPr lang="en-US" sz="1400" dirty="0"/>
+          </a:p>
+        </p:txBody>
+      </p:sp>
+      <p:sp>
+        <p:nvSpPr>
+          <p:cNvPr id="3" name="titel-171"/>
+          <p:cNvSpPr txBox="1"/>
+          <p:nvPr/>
+        </p:nvSpPr>
+        <p:spPr>
+          <a:xfrm>
+            <a:off x="548640" y="896112"/>
+            <a:ext cx="11094415" cy="640080"/>
+          </a:xfrm>
+          <a:prstGeom prst="rect">
+            <a:avLst/>
+          </a:prstGeom>
+          <a:noFill/>
+          <a:ln/>
+        </p:spPr>
+        <p:txBody>
+          <a:bodyPr wrap="square" lIns="0" tIns="0" rIns="0" bIns="0" rtlCol="0" anchor="ctr"/>
+          <a:lstStyle/>
+          <a:p>
+            <a:pPr indent="0" marL="0">
+              <a:buNone/>
+            </a:pPr>
+            <a:r>
+              <a:rPr lang="en-US" sz="2800" b="1" dirty="0">
+                <a:solidFill>
+                  <a:srgbClr val="14232F"/>
+                </a:solidFill>
+              </a:rPr>
+              <a:t>Besprechung: Technikbegriff</a:t>
+            </a:r>
+            <a:endParaRPr lang="en-US" sz="2800" dirty="0"/>
+          </a:p>
+        </p:txBody>
+      </p:sp>
+      <p:sp>
+        <p:nvSpPr>
+          <p:cNvPr id="4" name="ntile-172"/>
+          <p:cNvSpPr txBox="1"/>
+          <p:nvPr/>
+        </p:nvSpPr>
+        <p:spPr>
+          <a:xfrm>
+            <a:off x="548640" y="1783080"/>
+            <a:ext cx="3515258" cy="3291840"/>
+          </a:xfrm>
+          <a:prstGeom prst="rect">
+            <a:avLst/>
+          </a:prstGeom>
+          <a:solidFill>
+            <a:srgbClr val="EEF3F7"/>
+          </a:solidFill>
+          <a:ln w="19050">
+            <a:solidFill>
+              <a:srgbClr val="EEF3F7"/>
+            </a:solidFill>
+          </a:ln>
+        </p:spPr>
+        <p:txBody>
+          <a:bodyPr wrap="square" lIns="152400" tIns="152400" rIns="152400" bIns="152400" rtlCol="0" anchor="t"/>
+          <a:lstStyle/>
+          <a:p>
+            <a:pPr indent="0" marL="0">
+              <a:buNone/>
+            </a:pPr>
+            <a:r>
+              <a:rPr lang="en-US" sz="3400" b="1" dirty="0">
+                <a:solidFill>
+                  <a:srgbClr val="035591"/>
+                </a:solidFill>
+              </a:rPr>
+              <a:t>1.1</a:t>
+            </a:r>
+            <a:endParaRPr lang="en-US" sz="3400" dirty="0"/>
+          </a:p>
+          <a:p>
+            <a:pPr indent="0" marL="0">
+              <a:spcBef>
+                <a:spcPts val="400"/>
+              </a:spcBef>
+              <a:buNone/>
+            </a:pPr>
+            <a:r>
+              <a:rPr lang="en-US" sz="2200" dirty="0">
+                <a:solidFill>
+                  <a:srgbClr val="14232F"/>
+                </a:solidFill>
+              </a:rPr>
+              <a:t>Deine Definition für die 6. Klasse: vereinfacht, aber nicht verfälscht?</a:t>
+            </a:r>
+            <a:endParaRPr lang="en-US" sz="3400" dirty="0"/>
+          </a:p>
+        </p:txBody>
+      </p:sp>
+      <p:sp>
+        <p:nvSpPr>
+          <p:cNvPr id="5" name="ntile-173"/>
+          <p:cNvSpPr txBox="1"/>
+          <p:nvPr/>
+        </p:nvSpPr>
+        <p:spPr>
+          <a:xfrm>
+            <a:off x="4338218" y="1783080"/>
+            <a:ext cx="3515258" cy="3291840"/>
+          </a:xfrm>
+          <a:prstGeom prst="rect">
+            <a:avLst/>
+          </a:prstGeom>
+          <a:solidFill>
+            <a:srgbClr val="EEF3F7"/>
+          </a:solidFill>
+          <a:ln w="19050">
+            <a:solidFill>
+              <a:srgbClr val="EEF3F7"/>
+            </a:solidFill>
+          </a:ln>
+        </p:spPr>
+        <p:txBody>
+          <a:bodyPr wrap="square" lIns="152400" tIns="152400" rIns="152400" bIns="152400" rtlCol="0" anchor="t"/>
+          <a:lstStyle/>
+          <a:p>
+            <a:pPr indent="0" marL="0">
+              <a:buNone/>
+            </a:pPr>
+            <a:r>
+              <a:rPr lang="en-US" sz="3400" b="1" dirty="0">
+                <a:solidFill>
+                  <a:srgbClr val="035591"/>
+                </a:solidFill>
+              </a:rPr>
+              <a:t>1.2</a:t>
+            </a:r>
+            <a:endParaRPr lang="en-US" sz="3400" dirty="0"/>
+          </a:p>
+          <a:p>
+            <a:pPr indent="0" marL="0">
+              <a:spcBef>
+                <a:spcPts val="400"/>
+              </a:spcBef>
+              <a:buNone/>
+            </a:pPr>
+            <a:r>
+              <a:rPr lang="en-US" sz="2200" dirty="0">
+                <a:solidFill>
+                  <a:srgbClr val="14232F"/>
+                </a:solidFill>
+              </a:rPr>
+              <a:t>Wie beschreibt das KC Technik?</a:t>
+            </a:r>
+            <a:endParaRPr lang="en-US" sz="3400" dirty="0"/>
+          </a:p>
+        </p:txBody>
+      </p:sp>
+      <p:sp>
+        <p:nvSpPr>
+          <p:cNvPr id="6" name="ntile-174"/>
+          <p:cNvSpPr txBox="1"/>
+          <p:nvPr/>
+        </p:nvSpPr>
+        <p:spPr>
+          <a:xfrm>
+            <a:off x="8127797" y="1783080"/>
+            <a:ext cx="3515258" cy="3291840"/>
+          </a:xfrm>
+          <a:prstGeom prst="rect">
+            <a:avLst/>
+          </a:prstGeom>
+          <a:solidFill>
+            <a:srgbClr val="FFF3C9"/>
+          </a:solidFill>
+          <a:ln w="19050">
+            <a:solidFill>
+              <a:srgbClr val="F5B700"/>
+            </a:solidFill>
+          </a:ln>
+        </p:spPr>
+        <p:txBody>
+          <a:bodyPr wrap="square" lIns="152400" tIns="152400" rIns="152400" bIns="152400" rtlCol="0" anchor="t"/>
+          <a:lstStyle/>
+          <a:p>
+            <a:pPr indent="0" marL="0">
+              <a:buNone/>
+            </a:pPr>
+            <a:r>
+              <a:rPr lang="en-US" sz="3400" b="1" dirty="0">
+                <a:solidFill>
+                  <a:srgbClr val="035591"/>
+                </a:solidFill>
+              </a:rPr>
+              <a:t>1.3</a:t>
+            </a:r>
+            <a:endParaRPr lang="en-US" sz="3400" dirty="0"/>
+          </a:p>
+          <a:p>
+            <a:pPr indent="0" marL="0">
+              <a:spcBef>
+                <a:spcPts val="400"/>
+              </a:spcBef>
+              <a:buNone/>
+            </a:pPr>
+            <a:r>
+              <a:rPr lang="en-US" sz="2200" dirty="0">
+                <a:solidFill>
+                  <a:srgbClr val="14232F"/>
+                </a:solidFill>
+              </a:rPr>
+              <a:t>KC und Ropohl: Was ist gleich, was fehlt?</a:t>
+            </a:r>
+            <a:endParaRPr lang="en-US" sz="3400" dirty="0"/>
+          </a:p>
+        </p:txBody>
+      </p:sp>
+      <p:sp>
+        <p:nvSpPr>
+          <p:cNvPr id="25" name="Slide Number Placeholder 0"/>
+          <p:cNvSpPr>
+            <a:spLocks noGrp="1"/>
+          </p:cNvSpPr>
+          <p:nvPr>
+            <p:ph type="sldNum" sz="quarter" idx="4294967295"/>
+          </p:nvPr>
+        </p:nvSpPr>
+        <p:spPr>
+          <a:xfrm>
+            <a:off x="11247120" y="6473952"/>
+            <a:ext cx="548640" cy="274320"/>
+          </a:xfrm>
+          <a:prstGeom prst="rect">
+            <a:avLst/>
+          </a:prstGeom>
+          <a:extLst>
+            <a:ext uri="{C572A759-6A51-4108-AA02-DFA0A04FC94B}">
+              <ma14:wrappingTextBoxFlag xmlns:ma14="http://schemas.microsoft.com/office/mac/drawingml/2011/main" val="0"/>
+            </a:ext>
+          </a:extLst>
+        </p:spPr>
+        <p:txBody>
+          <a:bodyPr/>
+          <a:lstStyle>
+            <a:lvl1pPr>
+              <a:defRPr sz="1000">
+                <a:solidFill>
+                  <a:srgbClr val="56687A"/>
+                </a:solidFill>
+              </a:defRPr>
+            </a:lvl1pPr>
+          </a:lstStyle>
+          <a:p>
+            <a:pPr algn="r"/>
+            <a:fld id="{F7021451-1387-4CA6-816F-3879F97B5CBC}" type="slidenum">
+              <a:rPr b="0" lang="en-US"/>
+              <a:t>4</a:t>
+            </a:fld>
+            <a:endParaRPr lang="en-US"/>
+          </a:p>
+        </p:txBody>
+      </p:sp>
+    </p:spTree>
+  </p:cSld>
+  <p:clrMapOvr>
+    <a:masterClrMapping/>
+  </p:clrMapOvr>
+</p:sld>
+</file>
+
+<file path=ppt/slides/slide5.xml><?xml version="1.0" encoding="utf-8"?>
+<p:sld xmlns:a="http://schemas.openxmlformats.org/drawingml/2006/main" xmlns:r="http://schemas.openxmlformats.org/officeDocument/2006/relationships" xmlns:p="http://schemas.openxmlformats.org/presentationml/2006/main">
+  <p:cSld name="Slide 5">
+    <p:spTree>
+      <p:nvGrpSpPr>
+        <p:cNvPr id="1" name=""/>
+        <p:cNvGrpSpPr/>
+        <p:nvPr/>
+      </p:nvGrpSpPr>
+      <p:grpSpPr>
+        <a:xfrm>
+          <a:off x="0" y="0"/>
+          <a:ext cx="0" cy="0"/>
+          <a:chOff x="0" y="0"/>
+          <a:chExt cx="0" cy="0"/>
+        </a:xfrm>
+      </p:grpSpPr>
+      <p:sp>
+        <p:nvSpPr>
+          <p:cNvPr id="2" name="box-175"/>
+          <p:cNvSpPr txBox="1"/>
+          <p:nvPr/>
+        </p:nvSpPr>
+        <p:spPr>
+          <a:xfrm>
+            <a:off x="8915400" y="246888"/>
+            <a:ext cx="2862072" cy="384048"/>
+          </a:xfrm>
+          <a:prstGeom prst="rect">
+            <a:avLst/>
+          </a:prstGeom>
+          <a:solidFill>
+            <a:srgbClr val="17803F"/>
+          </a:solidFill>
+          <a:ln/>
+        </p:spPr>
+        <p:txBody>
+          <a:bodyPr wrap="square" lIns="25400" tIns="25400" rIns="25400" bIns="25400" rtlCol="0" anchor="ctr"/>
+          <a:lstStyle/>
+          <a:p>
+            <a:pPr algn="ctr" indent="0" marL="0">
+              <a:buNone/>
+            </a:pPr>
+            <a:r>
+              <a:rPr lang="en-US" sz="1400" b="1" dirty="0">
+                <a:solidFill>
+                  <a:srgbClr val="FFFFFF"/>
+                </a:solidFill>
+              </a:rPr>
+              <a:t>Besprechung</a:t>
+            </a:r>
+            <a:endParaRPr lang="en-US" sz="1400" dirty="0"/>
+          </a:p>
+        </p:txBody>
+      </p:sp>
+      <p:sp>
+        <p:nvSpPr>
+          <p:cNvPr id="3" name="titel-176"/>
+          <p:cNvSpPr txBox="1"/>
+          <p:nvPr/>
+        </p:nvSpPr>
+        <p:spPr>
+          <a:xfrm>
+            <a:off x="548640" y="896112"/>
+            <a:ext cx="11094415" cy="640080"/>
+          </a:xfrm>
+          <a:prstGeom prst="rect">
+            <a:avLst/>
+          </a:prstGeom>
+          <a:noFill/>
+          <a:ln/>
+        </p:spPr>
+        <p:txBody>
+          <a:bodyPr wrap="square" lIns="0" tIns="0" rIns="0" bIns="0" rtlCol="0" anchor="ctr"/>
+          <a:lstStyle/>
+          <a:p>
+            <a:pPr indent="0" marL="0">
+              <a:buNone/>
+            </a:pPr>
+            <a:r>
+              <a:rPr lang="en-US" sz="2800" b="1" dirty="0">
+                <a:solidFill>
+                  <a:srgbClr val="14232F"/>
+                </a:solidFill>
+              </a:rPr>
+              <a:t>Besprechung: Technik im Fächerkanon</a:t>
+            </a:r>
+            <a:endParaRPr lang="en-US" sz="2800" dirty="0"/>
+          </a:p>
+        </p:txBody>
+      </p:sp>
+      <p:sp>
+        <p:nvSpPr>
+          <p:cNvPr id="4" name="ntile-177"/>
+          <p:cNvSpPr txBox="1"/>
+          <p:nvPr/>
+        </p:nvSpPr>
+        <p:spPr>
+          <a:xfrm>
+            <a:off x="548640" y="1691640"/>
+            <a:ext cx="3515258" cy="2011680"/>
+          </a:xfrm>
+          <a:prstGeom prst="rect">
+            <a:avLst/>
+          </a:prstGeom>
+          <a:solidFill>
+            <a:srgbClr val="EEF3F7"/>
+          </a:solidFill>
+          <a:ln w="19050">
+            <a:solidFill>
+              <a:srgbClr val="EEF3F7"/>
+            </a:solidFill>
+          </a:ln>
+        </p:spPr>
+        <p:txBody>
+          <a:bodyPr wrap="square" lIns="152400" tIns="152400" rIns="152400" bIns="152400" rtlCol="0" anchor="t"/>
+          <a:lstStyle/>
+          <a:p>
+            <a:pPr indent="0" marL="0">
+              <a:buNone/>
+            </a:pPr>
+            <a:r>
+              <a:rPr lang="en-US" sz="3400" b="1" dirty="0">
+                <a:solidFill>
+                  <a:srgbClr val="035591"/>
+                </a:solidFill>
+              </a:rPr>
+              <a:t>1.4</a:t>
+            </a:r>
+            <a:endParaRPr lang="en-US" sz="3400" dirty="0"/>
+          </a:p>
+          <a:p>
+            <a:pPr indent="0" marL="0">
+              <a:spcBef>
+                <a:spcPts val="400"/>
+              </a:spcBef>
+              <a:buNone/>
+            </a:pPr>
+            <a:r>
+              <a:rPr lang="en-US" sz="2000" dirty="0">
+                <a:solidFill>
+                  <a:srgbClr val="14232F"/>
+                </a:solidFill>
+              </a:rPr>
+              <a:t>Intentionen und Begründungen</a:t>
+            </a:r>
+            <a:endParaRPr lang="en-US" sz="3400" dirty="0"/>
+          </a:p>
+        </p:txBody>
+      </p:sp>
+      <p:sp>
+        <p:nvSpPr>
+          <p:cNvPr id="5" name="ntile-178"/>
+          <p:cNvSpPr txBox="1"/>
+          <p:nvPr/>
+        </p:nvSpPr>
+        <p:spPr>
+          <a:xfrm>
+            <a:off x="4338218" y="1691640"/>
+            <a:ext cx="3515258" cy="2011680"/>
+          </a:xfrm>
+          <a:prstGeom prst="rect">
+            <a:avLst/>
+          </a:prstGeom>
+          <a:solidFill>
+            <a:srgbClr val="EEF3F7"/>
+          </a:solidFill>
+          <a:ln w="19050">
+            <a:solidFill>
+              <a:srgbClr val="EEF3F7"/>
+            </a:solidFill>
+          </a:ln>
+        </p:spPr>
+        <p:txBody>
+          <a:bodyPr wrap="square" lIns="152400" tIns="152400" rIns="152400" bIns="152400" rtlCol="0" anchor="t"/>
+          <a:lstStyle/>
+          <a:p>
+            <a:pPr indent="0" marL="0">
+              <a:buNone/>
+            </a:pPr>
+            <a:r>
+              <a:rPr lang="en-US" sz="3400" b="1" dirty="0">
+                <a:solidFill>
+                  <a:srgbClr val="035591"/>
+                </a:solidFill>
+              </a:rPr>
+              <a:t>1.5</a:t>
+            </a:r>
+            <a:endParaRPr lang="en-US" sz="3400" dirty="0"/>
+          </a:p>
+          <a:p>
+            <a:pPr indent="0" marL="0">
+              <a:spcBef>
+                <a:spcPts val="400"/>
+              </a:spcBef>
+              <a:buNone/>
+            </a:pPr>
+            <a:r>
+              <a:rPr lang="en-US" sz="2000" dirty="0">
+                <a:solidFill>
+                  <a:srgbClr val="14232F"/>
+                </a:solidFill>
+              </a:rPr>
+              <a:t>Harald Lesch und das Fach Technik</a:t>
+            </a:r>
+            <a:endParaRPr lang="en-US" sz="3400" dirty="0"/>
+          </a:p>
+        </p:txBody>
+      </p:sp>
+      <p:sp>
+        <p:nvSpPr>
+          <p:cNvPr id="6" name="ntile-179"/>
+          <p:cNvSpPr txBox="1"/>
+          <p:nvPr/>
+        </p:nvSpPr>
+        <p:spPr>
+          <a:xfrm>
+            <a:off x="8127797" y="1691640"/>
+            <a:ext cx="3515258" cy="2011680"/>
+          </a:xfrm>
+          <a:prstGeom prst="rect">
+            <a:avLst/>
+          </a:prstGeom>
+          <a:solidFill>
+            <a:srgbClr val="EEF3F7"/>
+          </a:solidFill>
+          <a:ln w="19050">
+            <a:solidFill>
+              <a:srgbClr val="EEF3F7"/>
+            </a:solidFill>
+          </a:ln>
+        </p:spPr>
+        <p:txBody>
+          <a:bodyPr wrap="square" lIns="152400" tIns="152400" rIns="152400" bIns="152400" rtlCol="0" anchor="t"/>
+          <a:lstStyle/>
+          <a:p>
+            <a:pPr indent="0" marL="0">
+              <a:buNone/>
+            </a:pPr>
+            <a:r>
+              <a:rPr lang="en-US" sz="3400" b="1" dirty="0">
+                <a:solidFill>
+                  <a:srgbClr val="035591"/>
+                </a:solidFill>
+              </a:rPr>
+              <a:t>1.6</a:t>
+            </a:r>
+            <a:endParaRPr lang="en-US" sz="3400" dirty="0"/>
+          </a:p>
+          <a:p>
+            <a:pPr indent="0" marL="0">
+              <a:spcBef>
+                <a:spcPts val="400"/>
+              </a:spcBef>
+              <a:buNone/>
+            </a:pPr>
+            <a:r>
+              <a:rPr lang="en-US" sz="2000" dirty="0">
+                <a:solidFill>
+                  <a:srgbClr val="14232F"/>
+                </a:solidFill>
+              </a:rPr>
+              <a:t>Der Schulversuch der RBG</a:t>
+            </a:r>
+            <a:endParaRPr lang="en-US" sz="3400" dirty="0"/>
+          </a:p>
+        </p:txBody>
+      </p:sp>
+      <p:sp>
+        <p:nvSpPr>
+          <p:cNvPr id="7" name="ntile-180"/>
+          <p:cNvSpPr txBox="1"/>
+          <p:nvPr/>
+        </p:nvSpPr>
+        <p:spPr>
+          <a:xfrm>
+            <a:off x="548640" y="3931920"/>
+            <a:ext cx="3515258" cy="2011680"/>
+          </a:xfrm>
+          <a:prstGeom prst="rect">
+            <a:avLst/>
+          </a:prstGeom>
+          <a:solidFill>
+            <a:srgbClr val="EEF3F7"/>
+          </a:solidFill>
+          <a:ln w="19050">
+            <a:solidFill>
+              <a:srgbClr val="EEF3F7"/>
+            </a:solidFill>
+          </a:ln>
+        </p:spPr>
+        <p:txBody>
+          <a:bodyPr wrap="square" lIns="152400" tIns="152400" rIns="152400" bIns="152400" rtlCol="0" anchor="t"/>
+          <a:lstStyle/>
+          <a:p>
+            <a:pPr indent="0" marL="0">
+              <a:buNone/>
+            </a:pPr>
+            <a:r>
+              <a:rPr lang="en-US" sz="3400" b="1" dirty="0">
+                <a:solidFill>
+                  <a:srgbClr val="035591"/>
+                </a:solidFill>
+              </a:rPr>
+              <a:t>1.7</a:t>
+            </a:r>
+            <a:endParaRPr lang="en-US" sz="3400" dirty="0"/>
+          </a:p>
+          <a:p>
+            <a:pPr indent="0" marL="0">
+              <a:spcBef>
+                <a:spcPts val="400"/>
+              </a:spcBef>
+              <a:buNone/>
+            </a:pPr>
+            <a:r>
+              <a:rPr lang="en-US" sz="2000" dirty="0">
+                <a:solidFill>
+                  <a:srgbClr val="14232F"/>
+                </a:solidFill>
+              </a:rPr>
+              <a:t>Physik und Technik zusammenlegen?</a:t>
+            </a:r>
+            <a:endParaRPr lang="en-US" sz="3400" dirty="0"/>
+          </a:p>
+        </p:txBody>
+      </p:sp>
+      <p:sp>
+        <p:nvSpPr>
+          <p:cNvPr id="8" name="ntile-181"/>
+          <p:cNvSpPr txBox="1"/>
+          <p:nvPr/>
+        </p:nvSpPr>
+        <p:spPr>
+          <a:xfrm>
+            <a:off x="4338218" y="3931920"/>
+            <a:ext cx="3515258" cy="2011680"/>
+          </a:xfrm>
+          <a:prstGeom prst="rect">
+            <a:avLst/>
+          </a:prstGeom>
+          <a:solidFill>
+            <a:srgbClr val="EEF3F7"/>
+          </a:solidFill>
+          <a:ln w="19050">
+            <a:solidFill>
+              <a:srgbClr val="EEF3F7"/>
+            </a:solidFill>
+          </a:ln>
+        </p:spPr>
+        <p:txBody>
+          <a:bodyPr wrap="square" lIns="152400" tIns="152400" rIns="152400" bIns="152400" rtlCol="0" anchor="t"/>
+          <a:lstStyle/>
+          <a:p>
+            <a:pPr indent="0" marL="0">
+              <a:buNone/>
+            </a:pPr>
+            <a:r>
+              <a:rPr lang="en-US" sz="3400" b="1" dirty="0">
+                <a:solidFill>
+                  <a:srgbClr val="035591"/>
+                </a:solidFill>
+              </a:rPr>
+              <a:t>1.8</a:t>
+            </a:r>
+            <a:endParaRPr lang="en-US" sz="3400" dirty="0"/>
+          </a:p>
+          <a:p>
+            <a:pPr indent="0" marL="0">
+              <a:spcBef>
+                <a:spcPts val="400"/>
+              </a:spcBef>
+              <a:buNone/>
+            </a:pPr>
+            <a:r>
+              <a:rPr lang="en-US" sz="2000" dirty="0">
+                <a:solidFill>
+                  <a:srgbClr val="14232F"/>
+                </a:solidFill>
+              </a:rPr>
+              <a:t>Und der VDI?</a:t>
+            </a:r>
+            <a:endParaRPr lang="en-US" sz="3400" dirty="0"/>
+          </a:p>
+        </p:txBody>
+      </p:sp>
+      <p:sp>
+        <p:nvSpPr>
+          <p:cNvPr id="9" name="ntile-182"/>
+          <p:cNvSpPr txBox="1"/>
+          <p:nvPr/>
+        </p:nvSpPr>
+        <p:spPr>
+          <a:xfrm>
+            <a:off x="8127797" y="3931920"/>
+            <a:ext cx="3515258" cy="2011680"/>
+          </a:xfrm>
+          <a:prstGeom prst="rect">
+            <a:avLst/>
+          </a:prstGeom>
+          <a:solidFill>
+            <a:srgbClr val="FFF3C9"/>
+          </a:solidFill>
+          <a:ln w="19050">
+            <a:solidFill>
+              <a:srgbClr val="F5B700"/>
+            </a:solidFill>
+          </a:ln>
+        </p:spPr>
+        <p:txBody>
+          <a:bodyPr wrap="square" lIns="152400" tIns="152400" rIns="152400" bIns="152400" rtlCol="0" anchor="t"/>
+          <a:lstStyle/>
+          <a:p>
+            <a:pPr indent="0" marL="0">
+              <a:buNone/>
+            </a:pPr>
+            <a:r>
+              <a:rPr lang="en-US" sz="3400" b="1" dirty="0">
+                <a:solidFill>
+                  <a:srgbClr val="035591"/>
+                </a:solidFill>
+              </a:rPr>
+              <a:t>1.9</a:t>
+            </a:r>
+            <a:endParaRPr lang="en-US" sz="3400" dirty="0"/>
+          </a:p>
+          <a:p>
+            <a:pPr indent="0" marL="0">
+              <a:spcBef>
+                <a:spcPts val="400"/>
+              </a:spcBef>
+              <a:buNone/>
+            </a:pPr>
+            <a:r>
+              <a:rPr lang="en-US" sz="2000" dirty="0">
+                <a:solidFill>
+                  <a:srgbClr val="14232F"/>
+                </a:solidFill>
+              </a:rPr>
+              <a:t>Deine Entscheidung (a–f) und dein stärkstes Argument</a:t>
+            </a:r>
+            <a:endParaRPr lang="en-US" sz="3400" dirty="0"/>
+          </a:p>
+        </p:txBody>
+      </p:sp>
+      <p:sp>
+        <p:nvSpPr>
+          <p:cNvPr id="25" name="Slide Number Placeholder 0"/>
+          <p:cNvSpPr>
+            <a:spLocks noGrp="1"/>
+          </p:cNvSpPr>
+          <p:nvPr>
+            <p:ph type="sldNum" sz="quarter" idx="4294967295"/>
+          </p:nvPr>
+        </p:nvSpPr>
+        <p:spPr>
+          <a:xfrm>
+            <a:off x="11247120" y="6473952"/>
+            <a:ext cx="548640" cy="274320"/>
+          </a:xfrm>
+          <a:prstGeom prst="rect">
+            <a:avLst/>
+          </a:prstGeom>
+          <a:extLst>
+            <a:ext uri="{C572A759-6A51-4108-AA02-DFA0A04FC94B}">
+              <ma14:wrappingTextBoxFlag xmlns:ma14="http://schemas.microsoft.com/office/mac/drawingml/2011/main" val="0"/>
+            </a:ext>
+          </a:extLst>
+        </p:spPr>
+        <p:txBody>
+          <a:bodyPr/>
+          <a:lstStyle>
+            <a:lvl1pPr>
+              <a:defRPr sz="1000">
+                <a:solidFill>
+                  <a:srgbClr val="56687A"/>
+                </a:solidFill>
+              </a:defRPr>
+            </a:lvl1pPr>
+          </a:lstStyle>
+          <a:p>
+            <a:pPr algn="r"/>
+            <a:fld id="{F7021451-1387-4CA6-816F-3879F97B5CBC}" type="slidenum">
+              <a:rPr b="0" lang="en-US"/>
+              <a:t>5</a:t>
+            </a:fld>
+            <a:endParaRPr lang="en-US"/>
+          </a:p>
+        </p:txBody>
+      </p:sp>
+    </p:spTree>
+  </p:cSld>
+  <p:clrMapOvr>
+    <a:masterClrMapping/>
+  </p:clrMapOvr>
+</p:sld>
+</file>
+
+<file path=ppt/slides/slide6.xml><?xml version="1.0" encoding="utf-8"?>
+<p:sld xmlns:a="http://schemas.openxmlformats.org/drawingml/2006/main" xmlns:r="http://schemas.openxmlformats.org/officeDocument/2006/relationships" xmlns:p="http://schemas.openxmlformats.org/presentationml/2006/main">
+  <p:cSld name="Slide 6">
+    <p:bg>
+      <p:bgPr>
+        <a:solidFill>
+          <a:srgbClr val="DDE9F1"/>
+        </a:solidFill>
+      </p:bgPr>
+    </p:bg>
+    <p:spTree>
+      <p:nvGrpSpPr>
+        <p:cNvPr id="1" name=""/>
+        <p:cNvGrpSpPr/>
+        <p:nvPr/>
+      </p:nvGrpSpPr>
+      <p:grpSpPr>
+        <a:xfrm>
+          <a:off x="0" y="0"/>
+          <a:ext cx="0" cy="0"/>
+          <a:chOff x="0" y="0"/>
+          <a:chExt cx="0" cy="0"/>
+        </a:xfrm>
+      </p:grpSpPr>
+      <p:sp>
+        <p:nvSpPr>
+          <p:cNvPr id="2" name="band-183"/>
+          <p:cNvSpPr/>
+          <p:nvPr/>
+        </p:nvSpPr>
+        <p:spPr>
+          <a:xfrm>
+            <a:off x="0" y="0"/>
+            <a:ext cx="320040" cy="6858000"/>
+          </a:xfrm>
+          <a:prstGeom prst="rect">
+            <a:avLst/>
+          </a:prstGeom>
+          <a:solidFill>
+            <a:srgbClr val="035591"/>
+          </a:solidFill>
+          <a:ln/>
+        </p:spPr>
+      </p:sp>
+      <p:sp>
+        <p:nvSpPr>
+          <p:cNvPr id="3" name="box-184"/>
+          <p:cNvSpPr txBox="1"/>
+          <p:nvPr/>
+        </p:nvSpPr>
+        <p:spPr>
+          <a:xfrm>
+            <a:off x="822960" y="1463040"/>
+            <a:ext cx="5852160" cy="640080"/>
+          </a:xfrm>
+          <a:prstGeom prst="rect">
+            <a:avLst/>
+          </a:prstGeom>
+          <a:solidFill>
+            <a:srgbClr val="035591"/>
+          </a:solidFill>
+          <a:ln/>
+        </p:spPr>
+        <p:txBody>
+          <a:bodyPr wrap="square" lIns="101600" tIns="101600" rIns="101600" bIns="101600" rtlCol="0" anchor="ctr"/>
+          <a:lstStyle/>
+          <a:p>
+            <a:pPr algn="ctr" indent="0" marL="0">
+              <a:buNone/>
+            </a:pPr>
+            <a:r>
+              <a:rPr lang="en-US" sz="2400" b="1" dirty="0">
+                <a:solidFill>
+                  <a:srgbClr val="FFFFFF"/>
+                </a:solidFill>
+              </a:rPr>
+              <a:t>IMPULS</a:t>
+            </a:r>
+            <a:endParaRPr lang="en-US" sz="2400" dirty="0"/>
+          </a:p>
+        </p:txBody>
+      </p:sp>
+      <p:sp>
+        <p:nvSpPr>
+          <p:cNvPr id="4" name="titel-185"/>
+          <p:cNvSpPr txBox="1"/>
+          <p:nvPr/>
+        </p:nvSpPr>
+        <p:spPr>
+          <a:xfrm>
+            <a:off x="822960" y="2377440"/>
+            <a:ext cx="10607040" cy="1828800"/>
+          </a:xfrm>
+          <a:prstGeom prst="rect">
+            <a:avLst/>
+          </a:prstGeom>
+          <a:noFill/>
+          <a:ln/>
+        </p:spPr>
+        <p:txBody>
+          <a:bodyPr wrap="square" lIns="0" tIns="0" rIns="0" bIns="0" rtlCol="0" anchor="t"/>
+          <a:lstStyle/>
+          <a:p>
+            <a:pPr indent="0" marL="0">
+              <a:buNone/>
+            </a:pPr>
+            <a:r>
+              <a:rPr lang="en-US" sz="4000" b="1" dirty="0">
+                <a:solidFill>
+                  <a:srgbClr val="14232F"/>
+                </a:solidFill>
+              </a:rPr>
+              <a:t>Impuls: Der mehrperspektivische Technikunterricht</a:t>
+            </a:r>
+            <a:endParaRPr lang="en-US" sz="4000" dirty="0"/>
+          </a:p>
+        </p:txBody>
+      </p:sp>
+      <p:sp>
+        <p:nvSpPr>
+          <p:cNvPr id="5" name="text-186"/>
+          <p:cNvSpPr txBox="1"/>
+          <p:nvPr/>
+        </p:nvSpPr>
+        <p:spPr>
+          <a:xfrm>
+            <a:off x="822960" y="4480560"/>
+            <a:ext cx="10607040" cy="731520"/>
+          </a:xfrm>
+          <a:prstGeom prst="rect">
+            <a:avLst/>
+          </a:prstGeom>
+          <a:noFill/>
+          <a:ln/>
+        </p:spPr>
+        <p:txBody>
+          <a:bodyPr wrap="square" lIns="38100" tIns="38100" rIns="38100" bIns="38100" rtlCol="0" anchor="t"/>
+          <a:lstStyle/>
+          <a:p>
+            <a:pPr algn="l" indent="0" marL="0">
+              <a:buNone/>
+            </a:pPr>
+            <a:r>
+              <a:rPr lang="en-US" sz="2600" dirty="0">
+                <a:solidFill>
+                  <a:srgbClr val="56687A"/>
+                </a:solidFill>
+              </a:rPr>
+              <a:t>Im Termin</a:t>
+            </a:r>
+            <a:endParaRPr lang="en-US" sz="2600" dirty="0"/>
+          </a:p>
+        </p:txBody>
+      </p:sp>
+    </p:spTree>
+  </p:cSld>
+  <p:clrMapOvr>
+    <a:masterClrMapping/>
+  </p:clrMapOvr>
+</p:sld>
+</file>
+
+<file path=ppt/slides/slide7.xml><?xml version="1.0" encoding="utf-8"?>
+<p:sld xmlns:a="http://schemas.openxmlformats.org/drawingml/2006/main" xmlns:r="http://schemas.openxmlformats.org/officeDocument/2006/relationships" xmlns:p="http://schemas.openxmlformats.org/presentationml/2006/main">
+  <p:cSld name="Slide 7">
+    <p:spTree>
+      <p:nvGrpSpPr>
+        <p:cNvPr id="1" name=""/>
+        <p:cNvGrpSpPr/>
+        <p:nvPr/>
+      </p:nvGrpSpPr>
+      <p:grpSpPr>
+        <a:xfrm>
+          <a:off x="0" y="0"/>
+          <a:ext cx="0" cy="0"/>
+          <a:chOff x="0" y="0"/>
+          <a:chExt cx="0" cy="0"/>
+        </a:xfrm>
+      </p:grpSpPr>
+      <p:sp>
+        <p:nvSpPr>
+          <p:cNvPr id="2" name="box-187"/>
+          <p:cNvSpPr txBox="1"/>
+          <p:nvPr/>
+        </p:nvSpPr>
+        <p:spPr>
+          <a:xfrm>
+            <a:off x="8915400" y="246888"/>
+            <a:ext cx="2862072" cy="384048"/>
+          </a:xfrm>
+          <a:prstGeom prst="rect">
+            <a:avLst/>
+          </a:prstGeom>
+          <a:solidFill>
+            <a:srgbClr val="035591"/>
+          </a:solidFill>
+          <a:ln/>
+        </p:spPr>
+        <p:txBody>
+          <a:bodyPr wrap="square" lIns="25400" tIns="25400" rIns="25400" bIns="25400" rtlCol="0" anchor="ctr"/>
+          <a:lstStyle/>
+          <a:p>
+            <a:pPr algn="ctr" indent="0" marL="0">
+              <a:buNone/>
+            </a:pPr>
+            <a:r>
+              <a:rPr lang="en-US" sz="1400" b="1" dirty="0">
+                <a:solidFill>
+                  <a:srgbClr val="FFFFFF"/>
+                </a:solidFill>
+              </a:rPr>
+              <a:t>Impuls</a:t>
+            </a:r>
+            <a:endParaRPr lang="en-US" sz="1400" dirty="0"/>
+          </a:p>
+        </p:txBody>
+      </p:sp>
+      <p:sp>
+        <p:nvSpPr>
+          <p:cNvPr id="3" name="titel-188"/>
+          <p:cNvSpPr txBox="1"/>
+          <p:nvPr/>
+        </p:nvSpPr>
+        <p:spPr>
+          <a:xfrm>
+            <a:off x="548640" y="896112"/>
+            <a:ext cx="11094415" cy="640080"/>
+          </a:xfrm>
+          <a:prstGeom prst="rect">
+            <a:avLst/>
+          </a:prstGeom>
+          <a:noFill/>
+          <a:ln/>
+        </p:spPr>
+        <p:txBody>
+          <a:bodyPr wrap="square" lIns="0" tIns="0" rIns="0" bIns="0" rtlCol="0" anchor="ctr"/>
+          <a:lstStyle/>
+          <a:p>
+            <a:pPr indent="0" marL="0">
+              <a:buNone/>
+            </a:pPr>
+            <a:r>
+              <a:rPr lang="en-US" sz="2800" b="1" dirty="0">
+                <a:solidFill>
+                  <a:srgbClr val="14232F"/>
+                </a:solidFill>
+              </a:rPr>
+              <a:t>Mehrperspektivisch ≠ mehrdimensional</a:t>
+            </a:r>
+            <a:endParaRPr lang="en-US" sz="2800" dirty="0"/>
+          </a:p>
+        </p:txBody>
+      </p:sp>
+      <p:sp>
+        <p:nvSpPr>
+          <p:cNvPr id="4" name="tile-189"/>
+          <p:cNvSpPr txBox="1"/>
+          <p:nvPr/>
+        </p:nvSpPr>
+        <p:spPr>
+          <a:xfrm>
+            <a:off x="548640" y="1691640"/>
+            <a:ext cx="5440680" cy="3017520"/>
+          </a:xfrm>
+          <a:prstGeom prst="rect">
+            <a:avLst/>
+          </a:prstGeom>
+          <a:solidFill>
+            <a:srgbClr val="FCE8E5"/>
+          </a:solidFill>
+          <a:ln w="25400">
+            <a:solidFill>
+              <a:srgbClr val="C23B2E"/>
+            </a:solidFill>
+          </a:ln>
+        </p:spPr>
+        <p:txBody>
+          <a:bodyPr wrap="square" lIns="127000" tIns="127000" rIns="127000" bIns="127000" rtlCol="0" anchor="t"/>
+          <a:lstStyle/>
+          <a:p>
+            <a:pPr indent="0" marL="0">
+              <a:buNone/>
+            </a:pPr>
+            <a:r>
+              <a:rPr lang="en-US" sz="2600" b="1" dirty="0">
+                <a:solidFill>
+                  <a:srgbClr val="C23B2E"/>
+                </a:solidFill>
+              </a:rPr>
+              <a:t>Nicht gemeint</a:t>
+            </a:r>
+            <a:endParaRPr lang="en-US" sz="2600" dirty="0"/>
+          </a:p>
+          <a:p>
+            <a:pPr indent="0" marL="0">
+              <a:spcBef>
+                <a:spcPts val="400"/>
+              </a:spcBef>
+              <a:buNone/>
+            </a:pPr>
+            <a:r>
+              <a:rPr lang="en-US" sz="2200" dirty="0">
+                <a:solidFill>
+                  <a:srgbClr val="14232F"/>
+                </a:solidFill>
+              </a:rPr>
+              <a:t>möglichst viele Wissenschaften berücksichtigen – dafür wäre „mehrdimensional“ das passende Wort</a:t>
+            </a:r>
+            <a:endParaRPr lang="en-US" sz="2600" dirty="0"/>
+          </a:p>
+        </p:txBody>
+      </p:sp>
+      <p:sp>
+        <p:nvSpPr>
+          <p:cNvPr id="5" name="tile-190"/>
+          <p:cNvSpPr txBox="1"/>
+          <p:nvPr/>
+        </p:nvSpPr>
+        <p:spPr>
+          <a:xfrm>
+            <a:off x="6199632" y="1691640"/>
+            <a:ext cx="5440680" cy="3017520"/>
+          </a:xfrm>
+          <a:prstGeom prst="rect">
+            <a:avLst/>
+          </a:prstGeom>
+          <a:solidFill>
+            <a:srgbClr val="E2F4E8"/>
+          </a:solidFill>
+          <a:ln w="25400">
+            <a:solidFill>
+              <a:srgbClr val="17803F"/>
+            </a:solidFill>
+          </a:ln>
+        </p:spPr>
+        <p:txBody>
+          <a:bodyPr wrap="square" lIns="127000" tIns="127000" rIns="127000" bIns="127000" rtlCol="0" anchor="t"/>
+          <a:lstStyle/>
+          <a:p>
+            <a:pPr indent="0" marL="0">
+              <a:buNone/>
+            </a:pPr>
+            <a:r>
+              <a:rPr lang="en-US" sz="2600" b="1" dirty="0">
+                <a:solidFill>
+                  <a:srgbClr val="17803F"/>
+                </a:solidFill>
+              </a:rPr>
+              <a:t>Gemeint</a:t>
+            </a:r>
+            <a:endParaRPr lang="en-US" sz="2600" dirty="0"/>
+          </a:p>
+          <a:p>
+            <a:pPr indent="0" marL="0">
+              <a:spcBef>
+                <a:spcPts val="400"/>
+              </a:spcBef>
+              <a:buNone/>
+            </a:pPr>
+            <a:r>
+              <a:rPr lang="en-US" sz="2200" dirty="0">
+                <a:solidFill>
+                  <a:srgbClr val="14232F"/>
+                </a:solidFill>
+              </a:rPr>
+              <a:t>ein Unterricht, der die Zielperspektiven verfolgt – Richtziel: Mündigkeit in einer von Technik geprägten Welt</a:t>
+            </a:r>
+            <a:endParaRPr lang="en-US" sz="2600" dirty="0"/>
+          </a:p>
+        </p:txBody>
+      </p:sp>
+      <p:sp>
+        <p:nvSpPr>
+          <p:cNvPr id="6" name="text-191"/>
+          <p:cNvSpPr txBox="1"/>
+          <p:nvPr/>
+        </p:nvSpPr>
+        <p:spPr>
+          <a:xfrm>
+            <a:off x="548640" y="5394960"/>
+            <a:ext cx="11094415" cy="292608"/>
+          </a:xfrm>
+          <a:prstGeom prst="rect">
+            <a:avLst/>
+          </a:prstGeom>
+          <a:noFill/>
+          <a:ln/>
+        </p:spPr>
+        <p:txBody>
+          <a:bodyPr wrap="square" lIns="38100" tIns="38100" rIns="38100" bIns="38100" rtlCol="0" anchor="t"/>
+          <a:lstStyle/>
+          <a:p>
+            <a:pPr algn="l" indent="0" marL="0">
+              <a:buNone/>
+            </a:pPr>
+            <a:r>
+              <a:rPr lang="en-US" sz="1100" dirty="0">
+                <a:solidFill>
+                  <a:srgbClr val="56687A"/>
+                </a:solidFill>
+              </a:rPr>
+              <a:t>Bienhaus (2008): Technikdidaktik – der mehrperspektivische Ansatz, S. 3 und 6</a:t>
+            </a:r>
+            <a:endParaRPr lang="en-US" sz="1100" dirty="0"/>
+          </a:p>
+        </p:txBody>
+      </p:sp>
+      <p:sp>
+        <p:nvSpPr>
+          <p:cNvPr id="25" name="Slide Number Placeholder 0"/>
+          <p:cNvSpPr>
+            <a:spLocks noGrp="1"/>
+          </p:cNvSpPr>
+          <p:nvPr>
+            <p:ph type="sldNum" sz="quarter" idx="4294967295"/>
+          </p:nvPr>
+        </p:nvSpPr>
+        <p:spPr>
+          <a:xfrm>
+            <a:off x="11247120" y="6473952"/>
+            <a:ext cx="548640" cy="274320"/>
+          </a:xfrm>
+          <a:prstGeom prst="rect">
+            <a:avLst/>
+          </a:prstGeom>
+          <a:extLst>
+            <a:ext uri="{C572A759-6A51-4108-AA02-DFA0A04FC94B}">
+              <ma14:wrappingTextBoxFlag xmlns:ma14="http://schemas.microsoft.com/office/mac/drawingml/2011/main" val="0"/>
+            </a:ext>
+          </a:extLst>
+        </p:spPr>
+        <p:txBody>
+          <a:bodyPr/>
+          <a:lstStyle>
+            <a:lvl1pPr>
+              <a:defRPr sz="1000">
+                <a:solidFill>
+                  <a:srgbClr val="56687A"/>
+                </a:solidFill>
+              </a:defRPr>
+            </a:lvl1pPr>
+          </a:lstStyle>
+          <a:p>
+            <a:pPr algn="r"/>
+            <a:fld id="{F7021451-1387-4CA6-816F-3879F97B5CBC}" type="slidenum">
+              <a:rPr b="0" lang="en-US"/>
+              <a:t>7</a:t>
+            </a:fld>
+            <a:endParaRPr lang="en-US"/>
+          </a:p>
+        </p:txBody>
+      </p:sp>
+    </p:spTree>
+  </p:cSld>
+  <p:clrMapOvr>
+    <a:masterClrMapping/>
+  </p:clrMapOvr>
+</p:sld>
+</file>
+
+<file path=ppt/slides/slide8.xml><?xml version="1.0" encoding="utf-8"?>
+<p:sld xmlns:a="http://schemas.openxmlformats.org/drawingml/2006/main" xmlns:r="http://schemas.openxmlformats.org/officeDocument/2006/relationships" xmlns:p="http://schemas.openxmlformats.org/presentationml/2006/main">
+  <p:cSld name="Slide 8">
+    <p:spTree>
+      <p:nvGrpSpPr>
+        <p:cNvPr id="1" name=""/>
+        <p:cNvGrpSpPr/>
+        <p:nvPr/>
+      </p:nvGrpSpPr>
+      <p:grpSpPr>
+        <a:xfrm>
+          <a:off x="0" y="0"/>
+          <a:ext cx="0" cy="0"/>
+          <a:chOff x="0" y="0"/>
+          <a:chExt cx="0" cy="0"/>
+        </a:xfrm>
+      </p:grpSpPr>
+      <p:sp>
+        <p:nvSpPr>
+          <p:cNvPr id="2" name="box-192"/>
+          <p:cNvSpPr txBox="1"/>
+          <p:nvPr/>
+        </p:nvSpPr>
+        <p:spPr>
+          <a:xfrm>
+            <a:off x="8915400" y="246888"/>
+            <a:ext cx="2862072" cy="384048"/>
+          </a:xfrm>
+          <a:prstGeom prst="rect">
+            <a:avLst/>
+          </a:prstGeom>
+          <a:solidFill>
+            <a:srgbClr val="035591"/>
+          </a:solidFill>
+          <a:ln/>
+        </p:spPr>
+        <p:txBody>
+          <a:bodyPr wrap="square" lIns="25400" tIns="25400" rIns="25400" bIns="25400" rtlCol="0" anchor="ctr"/>
+          <a:lstStyle/>
+          <a:p>
+            <a:pPr algn="ctr" indent="0" marL="0">
+              <a:buNone/>
+            </a:pPr>
+            <a:r>
+              <a:rPr lang="en-US" sz="1400" b="1" dirty="0">
+                <a:solidFill>
+                  <a:srgbClr val="FFFFFF"/>
+                </a:solidFill>
+              </a:rPr>
+              <a:t>Impuls</a:t>
+            </a:r>
+            <a:endParaRPr lang="en-US" sz="1400" dirty="0"/>
+          </a:p>
+        </p:txBody>
+      </p:sp>
+      <p:sp>
+        <p:nvSpPr>
+          <p:cNvPr id="3" name="titel-193"/>
+          <p:cNvSpPr txBox="1"/>
+          <p:nvPr/>
+        </p:nvSpPr>
+        <p:spPr>
+          <a:xfrm>
+            <a:off x="548640" y="896112"/>
+            <a:ext cx="11094415" cy="640080"/>
+          </a:xfrm>
+          <a:prstGeom prst="rect">
+            <a:avLst/>
+          </a:prstGeom>
+          <a:noFill/>
+          <a:ln/>
+        </p:spPr>
+        <p:txBody>
+          <a:bodyPr wrap="square" lIns="0" tIns="0" rIns="0" bIns="0" rtlCol="0" anchor="ctr"/>
+          <a:lstStyle/>
+          <a:p>
+            <a:pPr indent="0" marL="0">
+              <a:buNone/>
+            </a:pPr>
+            <a:r>
+              <a:rPr lang="en-US" sz="2800" b="1" dirty="0">
+                <a:solidFill>
+                  <a:srgbClr val="14232F"/>
+                </a:solidFill>
+              </a:rPr>
+              <a:t>Ein Gegenstand, drei Blicke</a:t>
+            </a:r>
+            <a:endParaRPr lang="en-US" sz="2800" dirty="0"/>
+          </a:p>
+        </p:txBody>
+      </p:sp>
+      <p:sp>
+        <p:nvSpPr>
+          <p:cNvPr id="4" name="text-194"/>
+          <p:cNvSpPr txBox="1"/>
+          <p:nvPr/>
+        </p:nvSpPr>
+        <p:spPr>
+          <a:xfrm>
+            <a:off x="548640" y="1554480"/>
+            <a:ext cx="11094415" cy="548640"/>
+          </a:xfrm>
+          <a:prstGeom prst="rect">
+            <a:avLst/>
+          </a:prstGeom>
+          <a:noFill/>
+          <a:ln/>
+        </p:spPr>
+        <p:txBody>
+          <a:bodyPr wrap="square" lIns="38100" tIns="38100" rIns="38100" bIns="38100" rtlCol="0" anchor="t"/>
+          <a:lstStyle/>
+          <a:p>
+            <a:pPr algn="l" indent="0" marL="0">
+              <a:buNone/>
+            </a:pPr>
+            <a:r>
+              <a:rPr lang="en-US" sz="2400" b="1" dirty="0">
+                <a:solidFill>
+                  <a:srgbClr val="035591"/>
+                </a:solidFill>
+              </a:rPr>
+              <a:t>Beispiel: das E-Bike</a:t>
+            </a:r>
+            <a:endParaRPr lang="en-US" sz="2400" dirty="0"/>
+          </a:p>
+        </p:txBody>
+      </p:sp>
+      <p:sp>
+        <p:nvSpPr>
+          <p:cNvPr id="5" name="tile-195"/>
+          <p:cNvSpPr txBox="1"/>
+          <p:nvPr/>
+        </p:nvSpPr>
+        <p:spPr>
+          <a:xfrm>
+            <a:off x="548640" y="2240280"/>
+            <a:ext cx="3474720" cy="3108960"/>
+          </a:xfrm>
+          <a:prstGeom prst="rect">
+            <a:avLst/>
+          </a:prstGeom>
+          <a:solidFill>
+            <a:srgbClr val="DDE9F1"/>
+          </a:solidFill>
+          <a:ln w="6350">
+            <a:solidFill>
+              <a:srgbClr val="DDE9F1"/>
+            </a:solidFill>
+          </a:ln>
+        </p:spPr>
+        <p:txBody>
+          <a:bodyPr wrap="square" lIns="127000" tIns="127000" rIns="127000" bIns="127000" rtlCol="0" anchor="t"/>
+          <a:lstStyle/>
+          <a:p>
+            <a:pPr indent="0" marL="0">
+              <a:buNone/>
+            </a:pPr>
+            <a:r>
+              <a:rPr lang="en-US" sz="2200" b="1" dirty="0">
+                <a:solidFill>
+                  <a:srgbClr val="035591"/>
+                </a:solidFill>
+              </a:rPr>
+              <a:t>Sachperspektive</a:t>
+            </a:r>
+            <a:endParaRPr lang="en-US" sz="2200" dirty="0"/>
+          </a:p>
+          <a:p>
+            <a:pPr indent="0" marL="0">
+              <a:spcBef>
+                <a:spcPts val="400"/>
+              </a:spcBef>
+              <a:buNone/>
+            </a:pPr>
+            <a:r>
+              <a:rPr lang="en-US" sz="2100" dirty="0">
+                <a:solidFill>
+                  <a:srgbClr val="14232F"/>
+                </a:solidFill>
+              </a:rPr>
+              <a:t>Wie arbeiten Motor, Akku und Steuerung zusammen?</a:t>
+            </a:r>
+            <a:endParaRPr lang="en-US" sz="2200" dirty="0"/>
+          </a:p>
+        </p:txBody>
+      </p:sp>
+      <p:sp>
+        <p:nvSpPr>
+          <p:cNvPr id="6" name="tile-196"/>
+          <p:cNvSpPr txBox="1"/>
+          <p:nvPr/>
+        </p:nvSpPr>
+        <p:spPr>
+          <a:xfrm>
+            <a:off x="4297680" y="2240280"/>
+            <a:ext cx="3474720" cy="3108960"/>
+          </a:xfrm>
+          <a:prstGeom prst="rect">
+            <a:avLst/>
+          </a:prstGeom>
+          <a:solidFill>
+            <a:srgbClr val="FBE3EC"/>
+          </a:solidFill>
+          <a:ln w="6350">
+            <a:solidFill>
+              <a:srgbClr val="FBE3EC"/>
+            </a:solidFill>
+          </a:ln>
+        </p:spPr>
+        <p:txBody>
+          <a:bodyPr wrap="square" lIns="127000" tIns="127000" rIns="127000" bIns="127000" rtlCol="0" anchor="t"/>
+          <a:lstStyle/>
+          <a:p>
+            <a:pPr indent="0" marL="0">
+              <a:buNone/>
+            </a:pPr>
+            <a:r>
+              <a:rPr lang="en-US" sz="2200" b="1" dirty="0">
+                <a:solidFill>
+                  <a:srgbClr val="035591"/>
+                </a:solidFill>
+              </a:rPr>
+              <a:t>human-soziale Perspektive</a:t>
+            </a:r>
+            <a:endParaRPr lang="en-US" sz="2200" dirty="0"/>
+          </a:p>
+          <a:p>
+            <a:pPr indent="0" marL="0">
+              <a:spcBef>
+                <a:spcPts val="400"/>
+              </a:spcBef>
+              <a:buNone/>
+            </a:pPr>
+            <a:r>
+              <a:rPr lang="en-US" sz="2100" dirty="0">
+                <a:solidFill>
+                  <a:srgbClr val="14232F"/>
+                </a:solidFill>
+              </a:rPr>
+              <a:t>Wer fährt E-Bike – und wie verändert es Wege zur Arbeit oder Lieferdienste?</a:t>
+            </a:r>
+            <a:endParaRPr lang="en-US" sz="2200" dirty="0"/>
+          </a:p>
+        </p:txBody>
+      </p:sp>
+      <p:sp>
+        <p:nvSpPr>
+          <p:cNvPr id="7" name="tile-197"/>
+          <p:cNvSpPr txBox="1"/>
+          <p:nvPr/>
+        </p:nvSpPr>
+        <p:spPr>
+          <a:xfrm>
+            <a:off x="8046720" y="2240280"/>
+            <a:ext cx="3474720" cy="3108960"/>
+          </a:xfrm>
+          <a:prstGeom prst="rect">
+            <a:avLst/>
+          </a:prstGeom>
+          <a:solidFill>
+            <a:srgbClr val="FDE6D7"/>
+          </a:solidFill>
+          <a:ln w="6350">
+            <a:solidFill>
+              <a:srgbClr val="FDE6D7"/>
+            </a:solidFill>
+          </a:ln>
+        </p:spPr>
+        <p:txBody>
+          <a:bodyPr wrap="square" lIns="127000" tIns="127000" rIns="127000" bIns="127000" rtlCol="0" anchor="t"/>
+          <a:lstStyle/>
+          <a:p>
+            <a:pPr indent="0" marL="0">
+              <a:buNone/>
+            </a:pPr>
+            <a:r>
+              <a:rPr lang="en-US" sz="2200" b="1" dirty="0">
+                <a:solidFill>
+                  <a:srgbClr val="035591"/>
+                </a:solidFill>
+              </a:rPr>
+              <a:t>Sinn- und Wertperspektive</a:t>
+            </a:r>
+            <a:endParaRPr lang="en-US" sz="2200" dirty="0"/>
+          </a:p>
+          <a:p>
+            <a:pPr indent="0" marL="0">
+              <a:spcBef>
+                <a:spcPts val="400"/>
+              </a:spcBef>
+              <a:buNone/>
+            </a:pPr>
+            <a:r>
+              <a:rPr lang="en-US" sz="2100" dirty="0">
+                <a:solidFill>
+                  <a:srgbClr val="14232F"/>
+                </a:solidFill>
+              </a:rPr>
+              <a:t>Beitrag zur Verkehrswende? Und um welchen Preis, etwa bei Rohstoffen für Akkus?</a:t>
+            </a:r>
+            <a:endParaRPr lang="en-US" sz="2200" dirty="0"/>
+          </a:p>
+        </p:txBody>
+      </p:sp>
+      <p:sp>
+        <p:nvSpPr>
+          <p:cNvPr id="8" name="text-198"/>
+          <p:cNvSpPr txBox="1"/>
+          <p:nvPr/>
+        </p:nvSpPr>
+        <p:spPr>
+          <a:xfrm>
+            <a:off x="548640" y="5577840"/>
+            <a:ext cx="11094415" cy="292608"/>
+          </a:xfrm>
+          <a:prstGeom prst="rect">
+            <a:avLst/>
+          </a:prstGeom>
+          <a:noFill/>
+          <a:ln/>
+        </p:spPr>
+        <p:txBody>
+          <a:bodyPr wrap="square" lIns="38100" tIns="38100" rIns="38100" bIns="38100" rtlCol="0" anchor="t"/>
+          <a:lstStyle/>
+          <a:p>
+            <a:pPr algn="l" indent="0" marL="0">
+              <a:buNone/>
+            </a:pPr>
+            <a:r>
+              <a:rPr lang="en-US" sz="1100" dirty="0">
+                <a:solidFill>
+                  <a:srgbClr val="56687A"/>
+                </a:solidFill>
+              </a:rPr>
+              <a:t>Erkenntnisperspektiven nach Schmayl, dargestellt bei Bienhaus (2008), S. 2 f. Beispiel: eigene Darstellung.</a:t>
+            </a:r>
+            <a:endParaRPr lang="en-US" sz="1100" dirty="0"/>
+          </a:p>
+        </p:txBody>
+      </p:sp>
+      <p:sp>
+        <p:nvSpPr>
+          <p:cNvPr id="25" name="Slide Number Placeholder 0"/>
+          <p:cNvSpPr>
+            <a:spLocks noGrp="1"/>
+          </p:cNvSpPr>
+          <p:nvPr>
+            <p:ph type="sldNum" sz="quarter" idx="4294967295"/>
+          </p:nvPr>
+        </p:nvSpPr>
+        <p:spPr>
+          <a:xfrm>
+            <a:off x="11247120" y="6473952"/>
+            <a:ext cx="548640" cy="274320"/>
+          </a:xfrm>
+          <a:prstGeom prst="rect">
+            <a:avLst/>
+          </a:prstGeom>
+          <a:extLst>
+            <a:ext uri="{C572A759-6A51-4108-AA02-DFA0A04FC94B}">
+              <ma14:wrappingTextBoxFlag xmlns:ma14="http://schemas.microsoft.com/office/mac/drawingml/2011/main" val="0"/>
+            </a:ext>
+          </a:extLst>
+        </p:spPr>
+        <p:txBody>
+          <a:bodyPr/>
+          <a:lstStyle>
+            <a:lvl1pPr>
+              <a:defRPr sz="1000">
+                <a:solidFill>
+                  <a:srgbClr val="56687A"/>
+                </a:solidFill>
+              </a:defRPr>
+            </a:lvl1pPr>
+          </a:lstStyle>
+          <a:p>
+            <a:pPr algn="r"/>
+            <a:fld id="{F7021451-1387-4CA6-816F-3879F97B5CBC}" type="slidenum">
+              <a:rPr b="0" lang="en-US"/>
+              <a:t>8</a:t>
+            </a:fld>
+            <a:endParaRPr lang="en-US"/>
+          </a:p>
+        </p:txBody>
+      </p:sp>
+    </p:spTree>
+  </p:cSld>
+  <p:clrMapOvr>
+    <a:masterClrMapping/>
+  </p:clrMapOvr>
+</p:sld>
+</file>
+
+<file path=ppt/slides/slide9.xml><?xml version="1.0" encoding="utf-8"?>
+<p:sld xmlns:a="http://schemas.openxmlformats.org/drawingml/2006/main" xmlns:r="http://schemas.openxmlformats.org/officeDocument/2006/relationships" xmlns:p="http://schemas.openxmlformats.org/presentationml/2006/main">
+  <p:cSld name="Slide 9">
+    <p:bg>
+      <p:bgPr>
+        <a:solidFill>
+          <a:srgbClr val="FFF3C9"/>
+        </a:solidFill>
+      </p:bgPr>
+    </p:bg>
+    <p:spTree>
+      <p:nvGrpSpPr>
+        <p:cNvPr id="1" name=""/>
+        <p:cNvGrpSpPr/>
+        <p:nvPr/>
+      </p:nvGrpSpPr>
+      <p:grpSpPr>
+        <a:xfrm>
+          <a:off x="0" y="0"/>
+          <a:ext cx="0" cy="0"/>
+          <a:chOff x="0" y="0"/>
+          <a:chExt cx="0" cy="0"/>
+        </a:xfrm>
+      </p:grpSpPr>
+      <p:sp>
+        <p:nvSpPr>
+          <p:cNvPr id="2" name="band-199"/>
+          <p:cNvSpPr/>
+          <p:nvPr/>
+        </p:nvSpPr>
+        <p:spPr>
+          <a:xfrm>
+            <a:off x="0" y="0"/>
+            <a:ext cx="320040" cy="6858000"/>
+          </a:xfrm>
+          <a:prstGeom prst="rect">
+            <a:avLst/>
+          </a:prstGeom>
+          <a:solidFill>
+            <a:srgbClr val="F5B700"/>
+          </a:solidFill>
+          <a:ln/>
+        </p:spPr>
+      </p:sp>
+      <p:sp>
+        <p:nvSpPr>
+          <p:cNvPr id="3" name="box-200"/>
+          <p:cNvSpPr txBox="1"/>
+          <p:nvPr/>
+        </p:nvSpPr>
+        <p:spPr>
+          <a:xfrm>
+            <a:off x="822960" y="1463040"/>
+            <a:ext cx="5852160" cy="640080"/>
+          </a:xfrm>
+          <a:prstGeom prst="rect">
+            <a:avLst/>
+          </a:prstGeom>
+          <a:solidFill>
+            <a:srgbClr val="F5B700"/>
+          </a:solidFill>
+          <a:ln/>
+        </p:spPr>
+        <p:txBody>
+          <a:bodyPr wrap="square" lIns="101600" tIns="101600" rIns="101600" bIns="101600" rtlCol="0" anchor="ctr"/>
+          <a:lstStyle/>
+          <a:p>
+            <a:pPr algn="ctr" indent="0" marL="0">
+              <a:buNone/>
+            </a:pPr>
+            <a:r>
+              <a:rPr lang="en-US" sz="2400" b="1" dirty="0">
+                <a:solidFill>
+                  <a:srgbClr val="14232F"/>
+                </a:solidFill>
+              </a:rPr>
+              <a:t>AUFGABEN FÜR ZU HAUSE</a:t>
+            </a:r>
+            <a:endParaRPr lang="en-US" sz="2400" dirty="0"/>
+          </a:p>
+        </p:txBody>
+      </p:sp>
+      <p:sp>
+        <p:nvSpPr>
+          <p:cNvPr id="4" name="titel-201"/>
+          <p:cNvSpPr txBox="1"/>
+          <p:nvPr/>
+        </p:nvSpPr>
+        <p:spPr>
+          <a:xfrm>
+            <a:off x="822960" y="2377440"/>
+            <a:ext cx="10607040" cy="1828800"/>
+          </a:xfrm>
+          <a:prstGeom prst="rect">
+            <a:avLst/>
+          </a:prstGeom>
+          <a:noFill/>
+          <a:ln/>
+        </p:spPr>
+        <p:txBody>
+          <a:bodyPr wrap="square" lIns="0" tIns="0" rIns="0" bIns="0" rtlCol="0" anchor="t"/>
+          <a:lstStyle/>
+          <a:p>
+            <a:pPr indent="0" marL="0">
+              <a:buNone/>
+            </a:pPr>
+            <a:r>
+              <a:rPr lang="en-US" sz="4000" b="1" dirty="0">
+                <a:solidFill>
+                  <a:srgbClr val="14232F"/>
+                </a:solidFill>
+              </a:rPr>
+              <a:t>Aufgabenpaket 2: mpTu und dein Thema</a:t>
+            </a:r>
+            <a:endParaRPr lang="en-US" sz="4000" dirty="0"/>
+          </a:p>
+        </p:txBody>
+      </p:sp>
+      <p:sp>
+        <p:nvSpPr>
+          <p:cNvPr id="5" name="text-202"/>
+          <p:cNvSpPr txBox="1"/>
+          <p:nvPr/>
+        </p:nvSpPr>
+        <p:spPr>
+          <a:xfrm>
+            <a:off x="822960" y="4480560"/>
+            <a:ext cx="10607040" cy="731520"/>
+          </a:xfrm>
+          <a:prstGeom prst="rect">
+            <a:avLst/>
+          </a:prstGeom>
+          <a:noFill/>
+          <a:ln/>
+        </p:spPr>
+        <p:txBody>
+          <a:bodyPr wrap="square" lIns="38100" tIns="38100" rIns="38100" bIns="38100" rtlCol="0" anchor="t"/>
+          <a:lstStyle/>
+          <a:p>
+            <a:pPr algn="l" indent="0" marL="0">
+              <a:buNone/>
+            </a:pPr>
+            <a:r>
+              <a:rPr lang="en-US" sz="2600" dirty="0">
+                <a:solidFill>
+                  <a:srgbClr val="56687A"/>
+                </a:solidFill>
+              </a:rPr>
+              <a:t>Zu Hause bearbeiten · fertig bis Termin 3</a:t>
+            </a:r>
+            <a:endParaRPr lang="en-US" sz="2600" dirty="0"/>
           </a:p>
         </p:txBody>
       </p:sp>
